--- a/hw2_slides.pptx
+++ b/hw2_slides.pptx
@@ -112,28 +112,28 @@
   <p:extLst>
     <p:ext uri="{521415D9-36F7-43E2-AB2F-B90AF26B5E84}">
       <p14:sectionLst xmlns:p14="http://schemas.microsoft.com/office/powerpoint/2010/main">
-        <p14:section name="Intro" id="{71d63e8f-3cdf-5b8e-5d2b-ddc1d1fbbd9e}">
+        <p14:section name="Intro" id="{c98d4379-bc66-38cc-8252-1ba2055ef098}">
           <p14:sldIdLst>
             <p14:sldId id="256"/>
           </p14:sldIdLst>
         </p14:section>
-        <p14:section name="Setup" id="{022fa347-5e24-4014-7adb-1f642483b8cb}">
+        <p14:section name="Setup" id="{bb59dd1d-2ad6-58c9-98f3-931a42979e1f}">
           <p14:sldIdLst>
             <p14:sldId id="257"/>
           </p14:sldIdLst>
         </p14:section>
-        <p14:section name="Methods" id="{d8c07527-3c41-f622-3d89-911b8eb4102d}">
+        <p14:section name="Methods" id="{4e5c476d-c848-620b-b396-44fcd506b00c}">
           <p14:sldIdLst>
             <p14:sldId id="258"/>
           </p14:sldIdLst>
         </p14:section>
-        <p14:section name="Results" id="{c80184d0-9fb9-ef67-77d9-4f9eb210fa13}">
+        <p14:section name="Results" id="{6366478d-590f-f58a-28b0-82c7d577da2d}">
           <p14:sldIdLst>
             <p14:sldId id="259"/>
             <p14:sldId id="260"/>
           </p14:sldIdLst>
         </p14:section>
-        <p14:section name="Close" id="{91c6d86b-2a20-0f4e-3c0e-9f0c5671a249}">
+        <p14:section name="Close" id="{49e856a5-2b4c-ca03-b11c-a7d4fde76567}">
           <p14:sldIdLst>
             <p14:sldId id="261"/>
           </p14:sldIdLst>
@@ -173,7 +173,7 @@
                 </a:solidFill>
                 <a:latin typeface="+mn-lt"/>
               </a:rPr>
-              <a:t>K = 100, times better than plain (1 = no gain)</a:t>
+              <a:t>Relative to plain MC (plain = 1)</a:t>
             </a:r>
           </a:p>
         </c:rich>
@@ -197,7 +197,7 @@
               <c:strCache>
                 <c:ptCount val="1"/>
                 <c:pt idx="0">
-                  <c:v>Variance reduction (VRF)</c:v>
+                  <c:v>VRF</c:v>
                 </c:pt>
               </c:strCache>
             </c:strRef>
@@ -280,7 +280,7 @@
               <c:strCache>
                 <c:ptCount val="1"/>
                 <c:pt idx="0">
-                  <c:v>Efficiency incl. run time (Gain)</c:v>
+                  <c:v>Gain</c:v>
                 </c:pt>
               </c:strCache>
             </c:strRef>
@@ -546,7 +546,7 @@
                 </a:solidFill>
                 <a:latin typeface="+mn-lt"/>
               </a:rPr>
-              <a:t>Variance reduction (VRF), K = 100</a:t>
+              <a:t>VRF; one parameter changed at a time</a:t>
             </a:r>
           </a:p>
         </c:rich>
@@ -616,7 +616,7 @@
                     <c:v>Baseline</c:v>
                   </c:pt>
                   <c:pt idx="1">
-                    <c:v>Vol-of-vol 0.5</c:v>
+                    <c:v>η = 0.5</c:v>
                   </c:pt>
                   <c:pt idx="2">
                     <c:v>H = 0.4</c:v>
@@ -699,7 +699,7 @@
                     <c:v>Baseline</c:v>
                   </c:pt>
                   <c:pt idx="1">
-                    <c:v>Vol-of-vol 0.5</c:v>
+                    <c:v>η = 0.5</c:v>
                   </c:pt>
                   <c:pt idx="2">
                     <c:v>H = 0.4</c:v>
@@ -1288,7 +1288,7 @@
           <a:p>
             <a:r>
               <a:rPr lang="en-US" dirty="0"/>
-              <a:t>We price puts in the rough Bergomi model by simulation and ask: which tricks make the simulation more accurate for the same effort?</a:t>
+              <a:t>The homework asks how much control variates and antithetic variates improve Monte Carlo prices of puts in the rough Bergomi model, separating variance reduction from computational efficiency.</a:t>
             </a:r>
             <a:endParaRPr lang="en-US" dirty="0"/>
           </a:p>
@@ -1376,7 +1376,7 @@
           <a:p>
             <a:r>
               <a:rPr lang="en-US" dirty="0"/>
-              <a:t>Volatility in this model is very jagged, so there is no closed-form price. We simulate and average. Before comparing methods we checked the simulator: average variance matches, and with no vol-of-vol it reproduces Black–Scholes.</a:t>
+              <a:t>Model and parameters are the assignment's baseline. Checks at n = 128: sample means of Y within 1.8 SE of zero, sample variance within 0.8% of q_j, mean of V within 2.0 SE of xi. With eta = 0 the scheme is exact Black–Scholes simulation for any n; prices match within 2.0 SE. The figure shows H = 0.1 paths are rougher than H = 0.4 paths from the same inputs.</a:t>
             </a:r>
             <a:endParaRPr lang="en-US" dirty="0"/>
           </a:p>
@@ -1464,7 +1464,7 @@
           <a:p>
             <a:r>
               <a:rPr lang="en-US" dirty="0"/>
-              <a:t>All four estimate the same number. CV uses a Black–Scholes stock driven by the same random numbers as a reference with a known price. AV reuses each random draw with its sign flipped. The combined method does both. CV and the combination fit their correction size on a small separate pilot run.</a:t>
+              <a:t>These are the four estimators of Problems 2–5. The fixed budget is from Problem 5(a). VRF and Gain are defined in equation (19).</a:t>
             </a:r>
             <a:endParaRPr lang="en-US" dirty="0"/>
           </a:p>
@@ -1552,7 +1552,7 @@
           <a:p>
             <a:r>
               <a:rPr lang="en-US" dirty="0"/>
-              <a:t>VRF = how much smaller the error variance is than plain MC for the same number of paths. Gain also accounts for run time. CV gives the biggest VRF (3.16). AV is weak on accuracy (1.37) but cheap because it needs half the random numbers. The combination gets close to CV's accuracy at lower cost, so it has the best Gain (2.82).</a:t>
+              <a:t>K = 100 from Problem 5(a); the report has all three strikes. Prices: plain 5.061 [5.01, 5.12], CV 5.108, AV 5.095, AV+CV 5.106. VRF ranks CV first; Gain ranks AV+CV first because antithetic pairs need half the random numbers. AV+CV has the largest Gain at K = 90 and 100; at K = 110 the Gains are within timing noise.</a:t>
             </a:r>
             <a:endParaRPr lang="en-US" dirty="0"/>
           </a:p>
@@ -1640,7 +1640,7 @@
           <a:p>
             <a:r>
               <a:rPr lang="en-US" dirty="0"/>
-              <a:t>Each case changes one parameter. Lower vol-of-vol: correlation between the payoff and the control rises from 0.83 to 0.97, and the VRF jumps to about 20.4. Smoother volatility (H = 0.4) gives about 7.1. At baseline, flipping the random numbers and the control both remove the same part of the noise, so combining them doesn't add much.</a:t>
+              <a:t>Problem 5(c). With a smaller eta or a larger H the simulated stock is closer to the Black–Scholes control, so Corr(X, C) and the CV VRF rise. At baseline, pairing removes the part of the payoff the control also explains, so the control correlates less with the pair average and the combination's VRF is slightly below CV's. Gains: eta = 0.5: CV 14.6, AV+CV 19.0; H = 0.4: CV 5.4, AV+CV 9.0.</a:t>
             </a:r>
             <a:endParaRPr lang="en-US" dirty="0"/>
           </a:p>
@@ -1728,7 +1728,7 @@
           <a:p>
             <a:r>
               <a:rPr lang="en-US" dirty="0"/>
-              <a:t>Accuracy per path and accuracy per second can rank methods differently. Here the combined method wins on the second, and the rougher the volatility, the less any of these tricks help.</a:t>
+              <a:t>VRF and Gain can rank methods differently: VRF compares error for the same number of path evaluations, Gain also accounts for computation time.</a:t>
             </a:r>
             <a:endParaRPr lang="en-US" dirty="0"/>
           </a:p>
@@ -2435,7 +2435,7 @@
                   <a:schemeClr val="bg1"/>
                 </a:solidFill>
               </a:rPr>
-              <a:t>Making Monte Carlo cheaper in a rough volatility model</a:t>
+              <a:t>Variance reduction in a rough volatility model</a:t>
             </a:r>
             <a:endParaRPr lang="en-US" sz="3600" dirty="0"/>
           </a:p>
@@ -2473,7 +2473,7 @@
                   <a:schemeClr val="accent3"/>
                 </a:solidFill>
               </a:rPr>
-              <a:t>Control variates and antithetic sampling for put options</a:t>
+              <a:t>Control variates and antithetic variates for rough Bergomi put prices</a:t>
             </a:r>
             <a:endParaRPr lang="en-US" sz="1600" dirty="0"/>
           </a:p>
@@ -2550,7 +2550,7 @@
                   <a:schemeClr val="tx2"/>
                 </a:solidFill>
               </a:rPr>
-              <a:t>The problem: a noisy price from a rough model</a:t>
+              <a:t>Setup and simulator checks</a:t>
             </a:r>
             <a:endParaRPr lang="en-US" sz="2600" dirty="0"/>
           </a:p>
@@ -2558,14 +2558,14 @@
       </p:sp>
       <p:sp>
         <p:nvSpPr>
-          <p:cNvPr id="3" name="problem bullets"/>
+          <p:cNvPr id="3" name="setup bullets"/>
           <p:cNvSpPr txBox="1"/>
           <p:nvPr/>
         </p:nvSpPr>
         <p:spPr>
           <a:xfrm>
             <a:off x="457200" y="1097280"/>
-            <a:ext cx="4023360" cy="2103120"/>
+            <a:ext cx="4023360" cy="2011680"/>
           </a:xfrm>
           <a:prstGeom prst="rect">
             <a:avLst/>
@@ -2590,7 +2590,7 @@
                   <a:schemeClr val="tx1"/>
                 </a:solidFill>
               </a:rPr>
-              <a:t>Stock volatility moves randomly and very roughly (H = 0.1)</a:t>
+              <a:t>Rough Bergomi: H = 0.1, η = 1.5, ρ = −0.7</a:t>
             </a:r>
             <a:endParaRPr lang="en-US" sz="1500" dirty="0"/>
           </a:p>
@@ -2608,7 +2608,7 @@
                   <a:schemeClr val="tx1"/>
                 </a:solidFill>
               </a:rPr>
-              <a:t>No formula for the put price, so we simulate 100,000 paths and average</a:t>
+              <a:t>Put (K − S_T)+, T = 0.5, K = 90, 100, 110</a:t>
             </a:r>
             <a:endParaRPr lang="en-US" sz="1500" dirty="0"/>
           </a:p>
@@ -2626,7 +2626,7 @@
                   <a:schemeClr val="tx1"/>
                 </a:solidFill>
               </a:rPr>
-              <a:t>Averages are noisy; the goal is a smaller error bar for the same work</a:t>
+              <a:t>Supplied hybrid scheme, n = 128 steps; Monte Carlo average over simulated paths</a:t>
             </a:r>
             <a:endParaRPr lang="en-US" sz="1500" dirty="0"/>
           </a:p>
@@ -2640,12 +2640,12 @@
         </p:nvSpPr>
         <p:spPr>
           <a:xfrm>
-            <a:off x="457200" y="3337560"/>
-            <a:ext cx="4023360" cy="1234440"/>
+            <a:off x="457200" y="3246120"/>
+            <a:ext cx="4023360" cy="1325880"/>
           </a:xfrm>
           <a:prstGeom prst="roundRect">
             <a:avLst>
-              <a:gd name="adj" fmla="val 5926"/>
+              <a:gd name="adj" fmla="val 5517"/>
             </a:avLst>
           </a:prstGeom>
           <a:solidFill>
@@ -2667,8 +2667,8 @@
         </p:nvSpPr>
         <p:spPr>
           <a:xfrm>
-            <a:off x="640080" y="3429000"/>
-            <a:ext cx="3657600" cy="1051560"/>
+            <a:off x="640080" y="3337560"/>
+            <a:ext cx="3657600" cy="1143000"/>
           </a:xfrm>
           <a:prstGeom prst="rect">
             <a:avLst/>
@@ -2689,7 +2689,7 @@
                   <a:schemeClr val="tx1"/>
                 </a:solidFill>
               </a:rPr>
-              <a:t>Simulator checked</a:t>
+              <a:t>Checks (Problem 1)</a:t>
             </a:r>
             <a:endParaRPr lang="en-US" sz="1300" dirty="0"/>
           </a:p>
@@ -2703,7 +2703,7 @@
                   <a:schemeClr val="tx1"/>
                 </a:solidFill>
               </a:rPr>
-              <a:t>Average variance = model value (within 2 std. errors)</a:t>
+              <a:t>Mean and variance of Y, mean of V at j = 32, 64, 128 consistent with 0, q_j, ξ (within about 2 SE)</a:t>
             </a:r>
             <a:endParaRPr lang="en-US" sz="1300" dirty="0"/>
           </a:p>
@@ -2717,7 +2717,7 @@
                   <a:schemeClr val="tx1"/>
                 </a:solidFill>
               </a:rPr>
-              <a:t>Vol-of-vol = 0 gives the Black–Scholes price exactly</a:t>
+              <a:t>η = 0: simulated put prices consistent with Black–Scholes (6)</a:t>
             </a:r>
             <a:endParaRPr lang="en-US" sz="1300" dirty="0"/>
           </a:p>
@@ -2756,7 +2756,7 @@
         <p:spPr>
           <a:xfrm>
             <a:off x="4709160" y="2834640"/>
-            <a:ext cx="4023360" cy="457200"/>
+            <a:ext cx="4023360" cy="365760"/>
           </a:xfrm>
           <a:prstGeom prst="rect">
             <a:avLst/>
@@ -2777,7 +2777,7 @@
                   <a:schemeClr val="accent5"/>
                 </a:solidFill>
               </a:rPr>
-              <a:t>Same random inputs: rough (H = 0.1) vs smoother (H = 0.4) variance paths</a:t>
+              <a:t>Three variance paths, same Gaussian inputs, H = 0.1 vs H = 0.4</a:t>
             </a:r>
             <a:endParaRPr lang="en-US" sz="1100" dirty="0"/>
           </a:p>
@@ -2885,7 +2885,7 @@
                   <a:schemeClr val="tx2"/>
                 </a:solidFill>
               </a:rPr>
-              <a:t>Four ways to estimate the same price</a:t>
+              <a:t>Four estimators of the same price</a:t>
             </a:r>
             <a:endParaRPr lang="en-US" sz="2600" dirty="0"/>
           </a:p>
@@ -2899,12 +2899,12 @@
         </p:nvSpPr>
         <p:spPr>
           <a:xfrm>
-            <a:off x="457200" y="1143000"/>
-            <a:ext cx="4023360" cy="1554480"/>
+            <a:off x="457200" y="1097280"/>
+            <a:ext cx="4023360" cy="1325880"/>
           </a:xfrm>
           <a:prstGeom prst="roundRect">
             <a:avLst>
-              <a:gd name="adj" fmla="val 4706"/>
+              <a:gd name="adj" fmla="val 5517"/>
             </a:avLst>
           </a:prstGeom>
           <a:solidFill>
@@ -2926,8 +2926,8 @@
         </p:nvSpPr>
         <p:spPr>
           <a:xfrm>
-            <a:off x="640080" y="1252728"/>
-            <a:ext cx="3657600" cy="1335024"/>
+            <a:off x="640080" y="1188720"/>
+            <a:ext cx="3657600" cy="1143000"/>
           </a:xfrm>
           <a:prstGeom prst="rect">
             <a:avLst/>
@@ -2951,7 +2951,7 @@
                   <a:schemeClr val="accent1"/>
                 </a:solidFill>
               </a:rPr>
-              <a:t>Plain</a:t>
+              <a:t>Plain MC</a:t>
             </a:r>
             <a:endParaRPr lang="en-US" sz="1600" dirty="0"/>
           </a:p>
@@ -2968,7 +2968,7 @@
                   <a:schemeClr val="tx1"/>
                 </a:solidFill>
               </a:rPr>
-              <a:t>Simulate paths, average the payoffs. The baseline.</a:t>
+              <a:t>Average the put payoffs over independent paths.</a:t>
             </a:r>
             <a:endParaRPr lang="en-US" sz="1600" dirty="0"/>
           </a:p>
@@ -2982,12 +2982,12 @@
         </p:nvSpPr>
         <p:spPr>
           <a:xfrm>
-            <a:off x="4663440" y="1143000"/>
-            <a:ext cx="4023360" cy="1554480"/>
+            <a:off x="4663440" y="1097280"/>
+            <a:ext cx="4023360" cy="1325880"/>
           </a:xfrm>
           <a:prstGeom prst="roundRect">
             <a:avLst>
-              <a:gd name="adj" fmla="val 4706"/>
+              <a:gd name="adj" fmla="val 5517"/>
             </a:avLst>
           </a:prstGeom>
           <a:solidFill>
@@ -3009,8 +3009,8 @@
         </p:nvSpPr>
         <p:spPr>
           <a:xfrm>
-            <a:off x="4846320" y="1252728"/>
-            <a:ext cx="3657600" cy="1335024"/>
+            <a:off x="4846320" y="1188720"/>
+            <a:ext cx="3657600" cy="1143000"/>
           </a:xfrm>
           <a:prstGeom prst="rect">
             <a:avLst/>
@@ -3051,7 +3051,7 @@
                   <a:schemeClr val="tx1"/>
                 </a:solidFill>
               </a:rPr>
-              <a:t>Also price a Black–Scholes stock on the same random numbers; its exact price lets us correct the noise.</a:t>
+              <a:t>Black–Scholes stock built from the same increments; its known price corrects the payoff. Coefficient fitted on a separate pilot run.</a:t>
             </a:r>
             <a:endParaRPr lang="en-US" sz="1600" dirty="0"/>
           </a:p>
@@ -3065,12 +3065,12 @@
         </p:nvSpPr>
         <p:spPr>
           <a:xfrm>
-            <a:off x="457200" y="2880360"/>
-            <a:ext cx="4023360" cy="1554480"/>
+            <a:off x="457200" y="2606040"/>
+            <a:ext cx="4023360" cy="1325880"/>
           </a:xfrm>
           <a:prstGeom prst="roundRect">
             <a:avLst>
-              <a:gd name="adj" fmla="val 4706"/>
+              <a:gd name="adj" fmla="val 5517"/>
             </a:avLst>
           </a:prstGeom>
           <a:solidFill>
@@ -3092,8 +3092,8 @@
         </p:nvSpPr>
         <p:spPr>
           <a:xfrm>
-            <a:off x="640080" y="2990088"/>
-            <a:ext cx="3657600" cy="1335024"/>
+            <a:off x="640080" y="2697480"/>
+            <a:ext cx="3657600" cy="1143000"/>
           </a:xfrm>
           <a:prstGeom prst="rect">
             <a:avLst/>
@@ -3134,7 +3134,7 @@
                   <a:schemeClr val="tx1"/>
                 </a:solidFill>
               </a:rPr>
-              <a:t>Use every set of random numbers twice: as is and flipped. Errors partly cancel; half the random numbers needed.</a:t>
+              <a:t>Each set of Gaussian inputs is used twice, as Z and −Z; the pair average is one observation.</a:t>
             </a:r>
             <a:endParaRPr lang="en-US" sz="1600" dirty="0"/>
           </a:p>
@@ -3148,12 +3148,12 @@
         </p:nvSpPr>
         <p:spPr>
           <a:xfrm>
-            <a:off x="4663440" y="2880360"/>
-            <a:ext cx="4023360" cy="1554480"/>
+            <a:off x="4663440" y="2606040"/>
+            <a:ext cx="4023360" cy="1325880"/>
           </a:xfrm>
           <a:prstGeom prst="roundRect">
             <a:avLst>
-              <a:gd name="adj" fmla="val 4706"/>
+              <a:gd name="adj" fmla="val 5517"/>
             </a:avLst>
           </a:prstGeom>
           <a:solidFill>
@@ -3175,8 +3175,8 @@
         </p:nvSpPr>
         <p:spPr>
           <a:xfrm>
-            <a:off x="4846320" y="2990088"/>
-            <a:ext cx="3657600" cy="1335024"/>
+            <a:off x="4846320" y="2697480"/>
+            <a:ext cx="3657600" cy="1143000"/>
           </a:xfrm>
           <a:prstGeom prst="rect">
             <a:avLst/>
@@ -3217,9 +3217,45 @@
                   <a:schemeClr val="tx1"/>
                 </a:solidFill>
               </a:rPr>
-              <a:t>Flip the random numbers and apply the control to each pair.</a:t>
+              <a:t>Antithetic pairs, with the control applied to the pair average. Coefficient from a pilot of pairs.</a:t>
             </a:r>
             <a:endParaRPr lang="en-US" sz="1600" dirty="0"/>
+          </a:p>
+        </p:txBody>
+      </p:sp>
+      <p:sp>
+        <p:nvSpPr>
+          <p:cNvPr id="11" name="budget note"/>
+          <p:cNvSpPr txBox="1"/>
+          <p:nvPr/>
+        </p:nvSpPr>
+        <p:spPr>
+          <a:xfrm>
+            <a:off x="457200" y="4160520"/>
+            <a:ext cx="8229600" cy="411480"/>
+          </a:xfrm>
+          <a:prstGeom prst="rect">
+            <a:avLst/>
+          </a:prstGeom>
+          <a:noFill/>
+          <a:ln/>
+        </p:spPr>
+        <p:txBody>
+          <a:bodyPr wrap="square" rtlCol="0" anchor="ctr"/>
+          <a:lstStyle/>
+          <a:p>
+            <a:pPr indent="0" marL="0">
+              <a:buNone/>
+            </a:pPr>
+            <a:r>
+              <a:rPr lang="en-US" sz="1200" dirty="0">
+                <a:solidFill>
+                  <a:schemeClr val="accent5"/>
+                </a:solidFill>
+              </a:rPr>
+              <a:t>Each method: 100,000 production path evaluations; pilots of 10,000. VRF = SE² ratio vs plain; Gain also divides by run time (incl. pilot).</a:t>
+            </a:r>
+            <a:endParaRPr lang="en-US" sz="1200" dirty="0"/>
           </a:p>
         </p:txBody>
       </p:sp>
@@ -3325,7 +3361,7 @@
                   <a:schemeClr val="tx2"/>
                 </a:solidFill>
               </a:rPr>
-              <a:t>CV cuts the error most; AV+CV is best per second</a:t>
+              <a:t>Baseline results, K = 100</a:t>
             </a:r>
             <a:endParaRPr lang="en-US" sz="2600" dirty="0"/>
           </a:p>
@@ -3339,7 +3375,7 @@
         </p:nvGraphicFramePr>
         <p:xfrm>
           <a:off x="457200" y="1097280"/>
-          <a:ext cx="4846320" cy="3474720"/>
+          <a:ext cx="4389120" cy="3474720"/>
         </p:xfrm>
         <a:graphic xmlns:a="http://schemas.openxmlformats.org/drawingml/2006/main">
           <a:graphicData uri="http://schemas.openxmlformats.org/drawingml/2006/chart">
@@ -3355,12 +3391,12 @@
         </p:nvSpPr>
         <p:spPr>
           <a:xfrm>
-            <a:off x="5577840" y="1097280"/>
-            <a:ext cx="3108960" cy="3474720"/>
+            <a:off x="5029200" y="1097280"/>
+            <a:ext cx="3657600" cy="3474720"/>
           </a:xfrm>
           <a:prstGeom prst="roundRect">
             <a:avLst>
-              <a:gd name="adj" fmla="val 2353"/>
+              <a:gd name="adj" fmla="val 2105"/>
             </a:avLst>
           </a:prstGeom>
           <a:solidFill>
@@ -3382,8 +3418,8 @@
         </p:nvSpPr>
         <p:spPr>
           <a:xfrm>
-            <a:off x="5760720" y="1234440"/>
-            <a:ext cx="2743200" cy="3200400"/>
+            <a:off x="5212080" y="1188720"/>
+            <a:ext cx="3291840" cy="3291840"/>
           </a:xfrm>
           <a:prstGeom prst="rect">
             <a:avLst/>
@@ -3407,7 +3443,7 @@
                   <a:schemeClr val="tx2"/>
                 </a:solidFill>
               </a:rPr>
-              <a:t>What the bars say</a:t>
+              <a:t>Observations</a:t>
             </a:r>
             <a:endParaRPr lang="en-US" sz="1300" dirty="0"/>
           </a:p>
@@ -3425,7 +3461,7 @@
                   <a:schemeClr val="tx1"/>
                 </a:solidFill>
               </a:rPr>
-              <a:t>CV: error variance 3.2× smaller</a:t>
+              <a:t>CV: VRF 3.2. Payoff and control move together (corr 0.83); VRF ≈ 1/(1−corr²)</a:t>
             </a:r>
             <a:endParaRPr lang="en-US" sz="1300" dirty="0"/>
           </a:p>
@@ -3443,7 +3479,7 @@
                   <a:schemeClr val="tx1"/>
                 </a:solidFill>
               </a:rPr>
-              <a:t>AV: only 1.4× smaller, but cheapest to run</a:t>
+              <a:t>AV: VRF 1.4. Pair outcomes only mildly offset (corr -0.28); VRF ≈ 1/(1+corr)</a:t>
             </a:r>
             <a:endParaRPr lang="en-US" sz="1300" dirty="0"/>
           </a:p>
@@ -3461,7 +3497,7 @@
                   <a:schemeClr val="tx1"/>
                 </a:solidFill>
               </a:rPr>
-              <a:t>AV+CV: almost CV's accuracy at lower cost, so best overall at K = 90 and 100</a:t>
+              <a:t>Gain ranks AV+CV first (2.8): a pair needs half the random numbers, so it runs faster</a:t>
             </a:r>
             <a:endParaRPr lang="en-US" sz="1300" dirty="0"/>
           </a:p>
@@ -3479,7 +3515,7 @@
                   <a:schemeClr val="tx1"/>
                 </a:solidFill>
               </a:rPr>
-              <a:t>All four give the same price within their error bars</a:t>
+              <a:t>All four 95% confidence intervals overlap</a:t>
             </a:r>
             <a:endParaRPr lang="en-US" sz="1300" dirty="0"/>
           </a:p>
@@ -3587,7 +3623,7 @@
                   <a:schemeClr val="tx2"/>
                 </a:solidFill>
               </a:rPr>
-              <a:t>Calmer volatility: the control works much better</a:t>
+              <a:t>Parameter sensitivity, K = 100</a:t>
             </a:r>
             <a:endParaRPr lang="en-US" sz="2600" dirty="0"/>
           </a:p>
@@ -3601,7 +3637,7 @@
         </p:nvGraphicFramePr>
         <p:xfrm>
           <a:off x="457200" y="1097280"/>
-          <a:ext cx="4846320" cy="3474720"/>
+          <a:ext cx="4389120" cy="3474720"/>
         </p:xfrm>
         <a:graphic xmlns:a="http://schemas.openxmlformats.org/drawingml/2006/main">
           <a:graphicData uri="http://schemas.openxmlformats.org/drawingml/2006/chart">
@@ -3617,12 +3653,12 @@
         </p:nvSpPr>
         <p:spPr>
           <a:xfrm>
-            <a:off x="5577840" y="1097280"/>
-            <a:ext cx="3108960" cy="3474720"/>
+            <a:off x="5029200" y="1097280"/>
+            <a:ext cx="3657600" cy="3474720"/>
           </a:xfrm>
           <a:prstGeom prst="roundRect">
             <a:avLst>
-              <a:gd name="adj" fmla="val 2353"/>
+              <a:gd name="adj" fmla="val 2105"/>
             </a:avLst>
           </a:prstGeom>
           <a:solidFill>
@@ -3644,8 +3680,8 @@
         </p:nvSpPr>
         <p:spPr>
           <a:xfrm>
-            <a:off x="5760720" y="1234440"/>
-            <a:ext cx="2743200" cy="3200400"/>
+            <a:off x="5212080" y="1188720"/>
+            <a:ext cx="3291840" cy="3291840"/>
           </a:xfrm>
           <a:prstGeom prst="rect">
             <a:avLst/>
@@ -3669,7 +3705,7 @@
                   <a:schemeClr val="tx2"/>
                 </a:solidFill>
               </a:rPr>
-              <a:t>Why</a:t>
+              <a:t>Observations</a:t>
             </a:r>
             <a:endParaRPr lang="en-US" sz="1300" dirty="0"/>
           </a:p>
@@ -3687,7 +3723,7 @@
                   <a:schemeClr val="tx1"/>
                 </a:solidFill>
               </a:rPr>
-              <a:t>The control is a Black–Scholes stock. The calmer the volatility, the more the real stock looks like it, and the better it cancels noise</a:t>
+              <a:t>Smaller η or larger H: the stock behaves more like the Black–Scholes control, so corr rises (0.83 → 0.97, 0.93) and CV improves</a:t>
             </a:r>
             <a:endParaRPr lang="en-US" sz="1300" dirty="0"/>
           </a:p>
@@ -3705,7 +3741,7 @@
                   <a:schemeClr val="tx1"/>
                 </a:solidFill>
               </a:rPr>
-              <a:t>Baseline: flipping and the control remove the same noise, so combining adds little</a:t>
+              <a:t>Baseline: AV+CV is below CV. Flipping removes noise the control already explains (corr falls to 0.74 after pairing)</a:t>
             </a:r>
             <a:endParaRPr lang="en-US" sz="1300" dirty="0"/>
           </a:p>
@@ -3723,7 +3759,7 @@
                   <a:schemeClr val="tx1"/>
                 </a:solidFill>
               </a:rPr>
-              <a:t>Calmer cases: combining beats both</a:t>
+              <a:t>η = 0.5, H = 0.4: the control still fits the pair well, so AV+CV leads on VRF and Gain</a:t>
             </a:r>
             <a:endParaRPr lang="en-US" sz="1300" dirty="0"/>
           </a:p>
@@ -3831,7 +3867,7 @@
                   <a:schemeClr val="bg1"/>
                 </a:solidFill>
               </a:rPr>
-              <a:t>Takeaways</a:t>
+              <a:t>Conclusions</a:t>
             </a:r>
             <a:endParaRPr lang="en-US" sz="3600" dirty="0"/>
           </a:p>
@@ -3873,7 +3909,7 @@
                   <a:schemeClr val="accent3"/>
                 </a:solidFill>
               </a:rPr>
-              <a:t>The control variate gives the biggest accuracy gain; antithetic gives the biggest speed gain</a:t>
+              <a:t>Variance reduction (VRF): the control variate is largest at all three baseline strikes</a:t>
             </a:r>
             <a:endParaRPr lang="en-US" sz="1600" dirty="0"/>
           </a:p>
@@ -3891,7 +3927,7 @@
                   <a:schemeClr val="accent3"/>
                 </a:solidFill>
               </a:rPr>
-              <a:t>Combined is the most efficient at K = 90 and 100 once run time counts</a:t>
+              <a:t>Efficiency (Gain): AV+CV is largest at K = 90 and 100; antithetic pairs halve random-number cost</a:t>
             </a:r>
             <a:endParaRPr lang="en-US" sz="1600" dirty="0"/>
           </a:p>
@@ -3909,7 +3945,7 @@
                   <a:schemeClr val="accent3"/>
                 </a:solidFill>
               </a:rPr>
-              <a:t>Rougher, wilder volatility makes every trick less effective</a:t>
+              <a:t>With η = 0.5 or H = 0.4, all correlations strengthen and AV+CV leads on both measures</a:t>
             </a:r>
             <a:endParaRPr lang="en-US" sz="1600" dirty="0"/>
           </a:p>

--- a/hw2_slides.pptx
+++ b/hw2_slides.pptx
@@ -11,9 +11,12 @@
     <p:sldId id="259" r:id="rId5"/>
     <p:sldId id="260" r:id="rId6"/>
     <p:sldId id="261" r:id="rId7"/>
+    <p:sldId id="262" r:id="rId8"/>
+    <p:sldId id="263" r:id="rId9"/>
+    <p:sldId id="264" r:id="rId10"/>
   </p:sldIdLst>
   <p:notesMasterIdLst>
-    <p:notesMasterId r:id="rId8"/>
+    <p:notesMasterId r:id="rId11"/>
   </p:notesMasterIdLst>
   <p:sldSz cx="9144000" cy="5143500"/>
   <p:notesSz cx="5143500" cy="9144000"/>
@@ -112,30 +115,41 @@
   <p:extLst>
     <p:ext uri="{521415D9-36F7-43E2-AB2F-B90AF26B5E84}">
       <p14:sectionLst xmlns:p14="http://schemas.microsoft.com/office/powerpoint/2010/main">
-        <p14:section name="Intro" id="{c98d4379-bc66-38cc-8252-1ba2055ef098}">
+        <p14:section name="Intro" id="{e4b5d848-c65d-5f84-9ac5-ccb1ca83c776}">
           <p14:sldIdLst>
             <p14:sldId id="256"/>
           </p14:sldIdLst>
         </p14:section>
-        <p14:section name="Setup" id="{bb59dd1d-2ad6-58c9-98f3-931a42979e1f}">
+        <p14:section name="Problem 1" id="{92d7abf4-2295-9c8d-aec6-d2b3739072aa}">
           <p14:sldIdLst>
             <p14:sldId id="257"/>
-          </p14:sldIdLst>
-        </p14:section>
-        <p14:section name="Methods" id="{4e5c476d-c848-620b-b396-44fcd506b00c}">
-          <p14:sldIdLst>
             <p14:sldId id="258"/>
           </p14:sldIdLst>
         </p14:section>
-        <p14:section name="Results" id="{6366478d-590f-f58a-28b0-82c7d577da2d}">
+        <p14:section name="Problem 2" id="{4bdb643f-2187-9960-3bfb-db7558abd227}">
           <p14:sldIdLst>
             <p14:sldId id="259"/>
+          </p14:sldIdLst>
+        </p14:section>
+        <p14:section name="Problem 3" id="{295a987a-be73-ba73-4489-8d76f7c877cb}">
+          <p14:sldIdLst>
             <p14:sldId id="260"/>
           </p14:sldIdLst>
         </p14:section>
-        <p14:section name="Close" id="{49e856a5-2b4c-ca03-b11c-a7d4fde76567}">
+        <p14:section name="Problem 4" id="{29428b35-a8cf-5c73-7d72-106b6c14d8c6}">
           <p14:sldIdLst>
             <p14:sldId id="261"/>
+          </p14:sldIdLst>
+        </p14:section>
+        <p14:section name="Problem 5" id="{a3e15dc8-9819-700a-68e9-054331abcd0c}">
+          <p14:sldIdLst>
+            <p14:sldId id="262"/>
+            <p14:sldId id="263"/>
+          </p14:sldIdLst>
+        </p14:section>
+        <p14:section name="Close" id="{5b97f897-0429-895a-252b-cba19433a17b}">
+          <p14:sldIdLst>
+            <p14:sldId id="264"/>
           </p14:sldIdLst>
         </p14:section>
       </p14:sectionLst>
@@ -1288,7 +1302,7 @@
           <a:p>
             <a:r>
               <a:rPr lang="en-US" dirty="0"/>
-              <a:t>The homework asks how much control variates and antithetic variates improve Monte Carlo prices of puts in the rough Bergomi model, separating variance reduction from computational efficiency.</a:t>
+              <a:t>Goal of the homework: price puts in the rough Bergomi model by Monte Carlo and measure how much control variates and antithetic variates help, separating variance reduction (VRF) from efficiency including run time (Gain). Parameters: S0 = 100, xi = 0.04, T = 0.5, H = 0.1, eta = 1.5, rho = -0.7, K = 90, 100, 110.</a:t>
             </a:r>
             <a:endParaRPr lang="en-US" dirty="0"/>
           </a:p>
@@ -1376,7 +1390,7 @@
           <a:p>
             <a:r>
               <a:rPr lang="en-US" dirty="0"/>
-              <a:t>Model and parameters are the assignment's baseline. Checks at n = 128: sample means of Y within 1.8 SE of zero, sample variance within 0.8% of q_j, mean of V within 2.0 SE of xi. With eta = 0 the scheme is exact Black–Scholes simulation for any n; prices match within 2.0 SE. The figure shows H = 0.1 paths are rougher than H = 0.4 paths from the same inputs.</a:t>
+              <a:t>(a) Y is a Wiener integral of a deterministic kernel, so it is Gaussian; the Ito isometry gives variance t^{2H}; the Gaussian moment formula gives E[V_t] = xi. a_H = sqrt(2H)/(H+1/2) is in (0,1) for 0 &lt; H &lt; 1/2, and the exact last-step term has covariance a_H Delta^{H+1/2} with Delta W_j, the same as the exact integral. (b) The terms of Y_j are independent Gaussians, so its variance is q_j. Dividing by exp(eta^2 q_j / 2) cancels the Gaussian exponential moment exactly. q_j is below t_j^{2H} because averaging the kernel lowers its squared integral (Cauchy-Schwarz).</a:t>
             </a:r>
             <a:endParaRPr lang="en-US" dirty="0"/>
           </a:p>
@@ -1464,7 +1478,7 @@
           <a:p>
             <a:r>
               <a:rPr lang="en-US" dirty="0"/>
-              <a:t>These are the four estimators of Problems 2–5. The fixed budget is from Problem 5(a). VRF and Gain are defined in equation (19).</a:t>
+              <a:t>(c) At j = 32, 64, 128 the sample mean of Y is within 1.8 SE of zero, the sample variance is within 0.8% of q_j, and the sample mean of V is within about 2 SE of xi. The plot uses the same Gaussian inputs at H = 0.1 and H = 0.4. (d) With eta = 0 every V_j equals xi, so the log stock is a sum of Gaussian increments with total variance xi T: exact Black-Scholes. A dependence bug in the stock noise changes that variance and is caught; a bug in the variance path is invisible because the variance path does not matter at eta = 0.</a:t>
             </a:r>
             <a:endParaRPr lang="en-US" dirty="0"/>
           </a:p>
@@ -1552,7 +1566,7 @@
           <a:p>
             <a:r>
               <a:rPr lang="en-US" dirty="0"/>
-              <a:t>K = 100 from Problem 5(a); the report has all three strikes. Prices: plain 5.061 [5.01, 5.12], CV 5.108, AV 5.095, AV+CV 5.106. VRF ranks CV first; Gain ranks AV+CV first because antithetic pairs need half the random numbers. AV+CV has the largest Gain at K = 90 and 100; at K = 110 the Gains are within timing noise.</a:t>
+              <a:t>(a) E[R] = E[X] - beta (E[C] - c_K) = p. Var R is a quadratic in beta, minimised at Cov/Var, with minimum Var X (1 - rho^2). (b) Given the pilot, beta is a constant, so production observations are iid with the right mean, and the usual SE applies. Fitting beta on the production sample makes it depend on the same C's: small bias and dependent observations. (c) The estimated beta can still fail to reduce variance in a given sample: a fixed beta helps only if it is within beta* of beta*, and sample variances are noisy.</a:t>
             </a:r>
             <a:endParaRPr lang="en-US" dirty="0"/>
           </a:p>
@@ -1640,7 +1654,7 @@
           <a:p>
             <a:r>
               <a:rPr lang="en-US" dirty="0"/>
-              <a:t>Problem 5(c). With a smaller eta or a larger H the simulated stock is closer to the Black–Scholes control, so Corr(X, C) and the CV VRF rise. At baseline, pairing removes the part of the payoff the control also explains, so the control correlates less with the pair average and the combination's VRF is slightly below CV's. Gains: eta = 0.5: CV 14.6, AV+CV 19.0; H = 0.4: CV 5.4, AV+CV 9.0.</a:t>
+              <a:t>(a) The standard normal law is symmetric, so -Z has the same law as Z and both payoffs are correctly distributed; Y is linear in the inputs so it flips sign. (b) Var of a pair average is sigma^2 (1 + r)/2; with M pairs that is sigma^2 (1 + r)/(2M) versus sigma^2/(2M) for plain MC with 2M paths. Antithetic is guaranteed to help for payoffs monotone in each input; here raising G moves the stock one way and the variance another. (c) The naive SE drops the within-pair covariance.</a:t>
             </a:r>
             <a:endParaRPr lang="en-US" dirty="0"/>
           </a:p>
@@ -1728,7 +1742,7 @@
           <a:p>
             <a:r>
               <a:rPr lang="en-US" dirty="0"/>
-              <a:t>VRF and Gain can rank methods differently: VRF compares error for the same number of path evaluations, Gain also accounts for computation time.</a:t>
+              <a:t>Splitting each payoff into a part that is even in Z and a part that is odd: the pair average keeps only the even part, so gamma* is the slope on even parts, while beta* mixes even and odd slopes. Numerically the production mean of C_A is within about 1 SE of c_K, consistent with unbiasedness.</a:t>
             </a:r>
             <a:endParaRPr lang="en-US" dirty="0"/>
           </a:p>
@@ -1752,6 +1766,270 @@
             <a:fld id="{F7021451-1387-4CA6-816F-3879F97B5CBC}" type="slidenum">
               <a:rPr lang="en-US"/>
               <a:t>6</a:t>
+            </a:fld>
+            <a:endParaRPr lang="en-US"/>
+          </a:p>
+        </p:txBody>
+      </p:sp>
+    </p:spTree>
+    <p:extLst>
+      <p:ext uri="{BB962C8B-B14F-4D97-AF65-F5344CB8AC3E}">
+        <p14:creationId xmlns:p14="http://schemas.microsoft.com/office/powerpoint/2010/main" val="1024086991"/>
+      </p:ext>
+    </p:extLst>
+  </p:cSld>
+  <p:clrMapOvr>
+    <a:masterClrMapping/>
+  </p:clrMapOvr>
+</p:notes>
+</file>
+
+<file path=ppt/notesSlides/notesSlide7.xml><?xml version="1.0" encoding="utf-8"?>
+<p:notes xmlns:a="http://schemas.openxmlformats.org/drawingml/2006/main" xmlns:r="http://schemas.openxmlformats.org/officeDocument/2006/relationships" xmlns:p="http://schemas.openxmlformats.org/presentationml/2006/main">
+  <p:cSld>
+    <p:spTree>
+      <p:nvGrpSpPr>
+        <p:cNvPr id="1" name=""/>
+        <p:cNvGrpSpPr/>
+        <p:nvPr/>
+      </p:nvGrpSpPr>
+      <p:grpSpPr>
+        <a:xfrm>
+          <a:off x="0" y="0"/>
+          <a:ext cx="0" cy="0"/>
+          <a:chOff x="0" y="0"/>
+          <a:chExt cx="0" cy="0"/>
+        </a:xfrm>
+      </p:grpSpPr>
+      <p:sp>
+        <p:nvSpPr>
+          <p:cNvPr id="2" name="Slide Image Placeholder 1"/>
+          <p:cNvSpPr>
+            <a:spLocks noGrp="1" noRot="1" noChangeAspect="1"/>
+          </p:cNvSpPr>
+          <p:nvPr>
+            <p:ph type="sldImg"/>
+          </p:nvPr>
+        </p:nvSpPr>
+        <p:spPr/>
+      </p:sp>
+      <p:sp>
+        <p:nvSpPr>
+          <p:cNvPr id="3" name="Notes Placeholder 2"/>
+          <p:cNvSpPr>
+            <a:spLocks noGrp="1"/>
+          </p:cNvSpPr>
+          <p:nvPr>
+            <p:ph type="body" idx="1"/>
+          </p:nvPr>
+        </p:nvSpPr>
+        <p:spPr/>
+        <p:txBody>
+          <a:bodyPr/>
+          <a:lstStyle/>
+          <a:p>
+            <a:r>
+              <a:rPr lang="en-US" dirty="0"/>
+              <a:t>Fixed budget: 100,000 production path evaluations per method; pilots of 10,000. VRF compares squared standard errors with plain MC; Gain also divides by run time including the pilot. K = 100 shown; the report has K = 90 and 110. AV+CV has the largest Gain at K = 90 and 100; at K = 110 the Gains are within timing noise.</a:t>
+            </a:r>
+            <a:endParaRPr lang="en-US" dirty="0"/>
+          </a:p>
+        </p:txBody>
+      </p:sp>
+      <p:sp>
+        <p:nvSpPr>
+          <p:cNvPr id="4" name="Slide Number Placeholder 3"/>
+          <p:cNvSpPr>
+            <a:spLocks noGrp="1"/>
+          </p:cNvSpPr>
+          <p:nvPr>
+            <p:ph type="sldNum" sz="quarter" idx="10"/>
+          </p:nvPr>
+        </p:nvSpPr>
+        <p:spPr/>
+        <p:txBody>
+          <a:bodyPr/>
+          <a:lstStyle/>
+          <a:p>
+            <a:fld id="{F7021451-1387-4CA6-816F-3879F97B5CBC}" type="slidenum">
+              <a:rPr lang="en-US"/>
+              <a:t>7</a:t>
+            </a:fld>
+            <a:endParaRPr lang="en-US"/>
+          </a:p>
+        </p:txBody>
+      </p:sp>
+    </p:spTree>
+    <p:extLst>
+      <p:ext uri="{BB962C8B-B14F-4D97-AF65-F5344CB8AC3E}">
+        <p14:creationId xmlns:p14="http://schemas.microsoft.com/office/powerpoint/2010/main" val="1024086991"/>
+      </p:ext>
+    </p:extLst>
+  </p:cSld>
+  <p:clrMapOvr>
+    <a:masterClrMapping/>
+  </p:clrMapOvr>
+</p:notes>
+</file>
+
+<file path=ppt/notesSlides/notesSlide8.xml><?xml version="1.0" encoding="utf-8"?>
+<p:notes xmlns:a="http://schemas.openxmlformats.org/drawingml/2006/main" xmlns:r="http://schemas.openxmlformats.org/officeDocument/2006/relationships" xmlns:p="http://schemas.openxmlformats.org/presentationml/2006/main">
+  <p:cSld>
+    <p:spTree>
+      <p:nvGrpSpPr>
+        <p:cNvPr id="1" name=""/>
+        <p:cNvGrpSpPr/>
+        <p:nvPr/>
+      </p:nvGrpSpPr>
+      <p:grpSpPr>
+        <a:xfrm>
+          <a:off x="0" y="0"/>
+          <a:ext cx="0" cy="0"/>
+          <a:chOff x="0" y="0"/>
+          <a:chExt cx="0" cy="0"/>
+        </a:xfrm>
+      </p:grpSpPr>
+      <p:sp>
+        <p:nvSpPr>
+          <p:cNvPr id="2" name="Slide Image Placeholder 1"/>
+          <p:cNvSpPr>
+            <a:spLocks noGrp="1" noRot="1" noChangeAspect="1"/>
+          </p:cNvSpPr>
+          <p:nvPr>
+            <p:ph type="sldImg"/>
+          </p:nvPr>
+        </p:nvSpPr>
+        <p:spPr/>
+      </p:sp>
+      <p:sp>
+        <p:nvSpPr>
+          <p:cNvPr id="3" name="Notes Placeholder 2"/>
+          <p:cNvSpPr>
+            <a:spLocks noGrp="1"/>
+          </p:cNvSpPr>
+          <p:nvPr>
+            <p:ph type="body" idx="1"/>
+          </p:nvPr>
+        </p:nvSpPr>
+        <p:spPr/>
+        <p:txBody>
+          <a:bodyPr/>
+          <a:lstStyle/>
+          <a:p>
+            <a:r>
+              <a:rPr lang="en-US" dirty="0"/>
+              <a:t>Gains: eta = 0.5: CV 14.6, AV+CV 19.0; H = 0.4: CV 5.4, AV+CV 9.0. Problem 5(d) (seeds, versions, batching) is in the report.</a:t>
+            </a:r>
+            <a:endParaRPr lang="en-US" dirty="0"/>
+          </a:p>
+        </p:txBody>
+      </p:sp>
+      <p:sp>
+        <p:nvSpPr>
+          <p:cNvPr id="4" name="Slide Number Placeholder 3"/>
+          <p:cNvSpPr>
+            <a:spLocks noGrp="1"/>
+          </p:cNvSpPr>
+          <p:nvPr>
+            <p:ph type="sldNum" sz="quarter" idx="10"/>
+          </p:nvPr>
+        </p:nvSpPr>
+        <p:spPr/>
+        <p:txBody>
+          <a:bodyPr/>
+          <a:lstStyle/>
+          <a:p>
+            <a:fld id="{F7021451-1387-4CA6-816F-3879F97B5CBC}" type="slidenum">
+              <a:rPr lang="en-US"/>
+              <a:t>8</a:t>
+            </a:fld>
+            <a:endParaRPr lang="en-US"/>
+          </a:p>
+        </p:txBody>
+      </p:sp>
+    </p:spTree>
+    <p:extLst>
+      <p:ext uri="{BB962C8B-B14F-4D97-AF65-F5344CB8AC3E}">
+        <p14:creationId xmlns:p14="http://schemas.microsoft.com/office/powerpoint/2010/main" val="1024086991"/>
+      </p:ext>
+    </p:extLst>
+  </p:cSld>
+  <p:clrMapOvr>
+    <a:masterClrMapping/>
+  </p:clrMapOvr>
+</p:notes>
+</file>
+
+<file path=ppt/notesSlides/notesSlide9.xml><?xml version="1.0" encoding="utf-8"?>
+<p:notes xmlns:a="http://schemas.openxmlformats.org/drawingml/2006/main" xmlns:r="http://schemas.openxmlformats.org/officeDocument/2006/relationships" xmlns:p="http://schemas.openxmlformats.org/presentationml/2006/main">
+  <p:cSld>
+    <p:spTree>
+      <p:nvGrpSpPr>
+        <p:cNvPr id="1" name=""/>
+        <p:cNvGrpSpPr/>
+        <p:nvPr/>
+      </p:nvGrpSpPr>
+      <p:grpSpPr>
+        <a:xfrm>
+          <a:off x="0" y="0"/>
+          <a:ext cx="0" cy="0"/>
+          <a:chOff x="0" y="0"/>
+          <a:chExt cx="0" cy="0"/>
+        </a:xfrm>
+      </p:grpSpPr>
+      <p:sp>
+        <p:nvSpPr>
+          <p:cNvPr id="2" name="Slide Image Placeholder 1"/>
+          <p:cNvSpPr>
+            <a:spLocks noGrp="1" noRot="1" noChangeAspect="1"/>
+          </p:cNvSpPr>
+          <p:nvPr>
+            <p:ph type="sldImg"/>
+          </p:nvPr>
+        </p:nvSpPr>
+        <p:spPr/>
+      </p:sp>
+      <p:sp>
+        <p:nvSpPr>
+          <p:cNvPr id="3" name="Notes Placeholder 2"/>
+          <p:cNvSpPr>
+            <a:spLocks noGrp="1"/>
+          </p:cNvSpPr>
+          <p:nvPr>
+            <p:ph type="body" idx="1"/>
+          </p:nvPr>
+        </p:nvSpPr>
+        <p:spPr/>
+        <p:txBody>
+          <a:bodyPr/>
+          <a:lstStyle/>
+          <a:p>
+            <a:r>
+              <a:rPr lang="en-US" dirty="0"/>
+              <a:t>VRF compares error for the same number of path evaluations; Gain also accounts for computation time. The two can rank methods differently.</a:t>
+            </a:r>
+            <a:endParaRPr lang="en-US" dirty="0"/>
+          </a:p>
+        </p:txBody>
+      </p:sp>
+      <p:sp>
+        <p:nvSpPr>
+          <p:cNvPr id="4" name="Slide Number Placeholder 3"/>
+          <p:cNvSpPr>
+            <a:spLocks noGrp="1"/>
+          </p:cNvSpPr>
+          <p:nvPr>
+            <p:ph type="sldNum" sz="quarter" idx="10"/>
+          </p:nvPr>
+        </p:nvSpPr>
+        <p:spPr/>
+        <p:txBody>
+          <a:bodyPr/>
+          <a:lstStyle/>
+          <a:p>
+            <a:fld id="{F7021451-1387-4CA6-816F-3879F97B5CBC}" type="slidenum">
+              <a:rPr lang="en-US"/>
+              <a:t>9</a:t>
             </a:fld>
             <a:endParaRPr lang="en-US"/>
           </a:p>
@@ -2550,7 +2828,7 @@
                   <a:schemeClr val="tx2"/>
                 </a:solidFill>
               </a:rPr>
-              <a:t>Setup and simulator checks</a:t>
+              <a:t>Q1 (a)–(b): the simulator</a:t>
             </a:r>
             <a:endParaRPr lang="en-US" sz="2600" dirty="0"/>
           </a:p>
@@ -2558,14 +2836,14 @@
       </p:sp>
       <p:sp>
         <p:nvSpPr>
-          <p:cNvPr id="3" name="setup bullets"/>
+          <p:cNvPr id="3" name="q1ab bullets"/>
           <p:cNvSpPr txBox="1"/>
           <p:nvPr/>
         </p:nvSpPr>
         <p:spPr>
           <a:xfrm>
             <a:off x="457200" y="1097280"/>
-            <a:ext cx="4023360" cy="2011680"/>
+            <a:ext cx="4754880" cy="3474720"/>
           </a:xfrm>
           <a:prstGeom prst="rect">
             <a:avLst/>
@@ -2577,75 +2855,380 @@
           <a:bodyPr wrap="square" rtlCol="0" anchor="t"/>
           <a:lstStyle/>
           <a:p>
-            <a:pPr marL="342900" indent="-342900">
-              <a:spcAft>
-                <a:spcPts val="800"/>
-              </a:spcAft>
-              <a:buSzPct val="100000"/>
-              <a:buChar char="•"/>
-            </a:pPr>
-            <a:r>
-              <a:rPr lang="en-US" sz="1500" dirty="0">
-                <a:solidFill>
-                  <a:schemeClr val="tx1"/>
-                </a:solidFill>
-              </a:rPr>
-              <a:t>Rough Bergomi: H = 0.1, η = 1.5, ρ = −0.7</a:t>
-            </a:r>
-            <a:endParaRPr lang="en-US" sz="1500" dirty="0"/>
-          </a:p>
-          <a:p>
-            <a:pPr marL="342900" indent="-342900">
-              <a:spcAft>
-                <a:spcPts val="800"/>
-              </a:spcAft>
-              <a:buSzPct val="100000"/>
-              <a:buChar char="•"/>
-            </a:pPr>
-            <a:r>
-              <a:rPr lang="en-US" sz="1500" dirty="0">
-                <a:solidFill>
-                  <a:schemeClr val="tx1"/>
-                </a:solidFill>
-              </a:rPr>
-              <a:t>Put (K − S_T)+, T = 0.5, K = 90, 100, 110</a:t>
-            </a:r>
-            <a:endParaRPr lang="en-US" sz="1500" dirty="0"/>
-          </a:p>
-          <a:p>
-            <a:pPr marL="342900" indent="-342900">
-              <a:spcAft>
-                <a:spcPts val="800"/>
-              </a:spcAft>
-              <a:buSzPct val="100000"/>
-              <a:buChar char="•"/>
-            </a:pPr>
-            <a:r>
-              <a:rPr lang="en-US" sz="1500" dirty="0">
-                <a:solidFill>
-                  <a:schemeClr val="tx1"/>
-                </a:solidFill>
-              </a:rPr>
-              <a:t>Supplied hybrid scheme, n = 128 steps; Monte Carlo average over simulated paths</a:t>
-            </a:r>
-            <a:endParaRPr lang="en-US" sz="1500" dirty="0"/>
+            <a:pPr indent="0" marL="0">
+              <a:spcAft>
+                <a:spcPts val="700"/>
+              </a:spcAft>
+              <a:buNone/>
+            </a:pPr>
+            <a:r>
+              <a:rPr lang="en-US" sz="1400" b="1" dirty="0">
+                <a:solidFill>
+                  <a:srgbClr val="D9622B"/>
+                </a:solidFill>
+              </a:rPr>
+              <a:t>(a)  </a:t>
+            </a:r>
+            <a:pPr indent="0" marL="0">
+              <a:spcAft>
+                <a:spcPts val="700"/>
+              </a:spcAft>
+              <a:buNone/>
+            </a:pPr>
+            <a:r>
+              <a:rPr lang="en-US" sz="1400" dirty="0">
+                <a:solidFill>
+                  <a:schemeClr val="tx1"/>
+                </a:solidFill>
+              </a:rPr>
+              <a:t>Y</a:t>
+            </a:r>
+            <a:pPr indent="0" marL="0">
+              <a:spcAft>
+                <a:spcPts val="700"/>
+              </a:spcAft>
+              <a:buNone/>
+            </a:pPr>
+            <a:r>
+              <a:rPr lang="en-US" sz="1400" baseline="-40000" dirty="0">
+                <a:solidFill>
+                  <a:schemeClr val="tx1"/>
+                </a:solidFill>
+              </a:rPr>
+              <a:t>t</a:t>
+            </a:r>
+            <a:pPr indent="0" marL="0">
+              <a:spcAft>
+                <a:spcPts val="700"/>
+              </a:spcAft>
+              <a:buNone/>
+            </a:pPr>
+            <a:r>
+              <a:rPr lang="en-US" sz="1400" dirty="0">
+                <a:solidFill>
+                  <a:schemeClr val="tx1"/>
+                </a:solidFill>
+              </a:rPr>
+              <a:t> is Gaussian with mean 0 and variance t</a:t>
+            </a:r>
+            <a:pPr indent="0" marL="0">
+              <a:spcAft>
+                <a:spcPts val="700"/>
+              </a:spcAft>
+              <a:buNone/>
+            </a:pPr>
+            <a:r>
+              <a:rPr lang="en-US" sz="1400" baseline="30000" dirty="0">
+                <a:solidFill>
+                  <a:schemeClr val="tx1"/>
+                </a:solidFill>
+              </a:rPr>
+              <a:t>2H</a:t>
+            </a:r>
+            <a:pPr indent="0" marL="0">
+              <a:spcAft>
+                <a:spcPts val="700"/>
+              </a:spcAft>
+              <a:buNone/>
+            </a:pPr>
+            <a:r>
+              <a:rPr lang="en-US" sz="1400" dirty="0">
+                <a:solidFill>
+                  <a:schemeClr val="tx1"/>
+                </a:solidFill>
+              </a:rPr>
+              <a:t>, so E[V</a:t>
+            </a:r>
+            <a:pPr indent="0" marL="0">
+              <a:spcAft>
+                <a:spcPts val="700"/>
+              </a:spcAft>
+              <a:buNone/>
+            </a:pPr>
+            <a:r>
+              <a:rPr lang="en-US" sz="1400" baseline="-40000" dirty="0">
+                <a:solidFill>
+                  <a:schemeClr val="tx1"/>
+                </a:solidFill>
+              </a:rPr>
+              <a:t>t</a:t>
+            </a:r>
+            <a:pPr indent="0" marL="0">
+              <a:spcAft>
+                <a:spcPts val="700"/>
+              </a:spcAft>
+              <a:buNone/>
+            </a:pPr>
+            <a:r>
+              <a:rPr lang="en-US" sz="1400" dirty="0">
+                <a:solidFill>
+                  <a:schemeClr val="tx1"/>
+                </a:solidFill>
+              </a:rPr>
+              <a:t>] = ξ</a:t>
+            </a:r>
+            <a:endParaRPr lang="en-US" sz="1400" dirty="0"/>
+          </a:p>
+          <a:p>
+            <a:pPr indent="0" marL="0">
+              <a:spcAft>
+                <a:spcPts val="700"/>
+              </a:spcAft>
+              <a:buNone/>
+            </a:pPr>
+            <a:r>
+              <a:rPr lang="en-US" sz="1400" b="1" dirty="0">
+                <a:solidFill>
+                  <a:srgbClr val="D9622B"/>
+                </a:solidFill>
+              </a:rPr>
+              <a:t>(a)  </a:t>
+            </a:r>
+            <a:pPr indent="0" marL="0">
+              <a:spcAft>
+                <a:spcPts val="700"/>
+              </a:spcAft>
+              <a:buNone/>
+            </a:pPr>
+            <a:r>
+              <a:rPr lang="en-US" sz="1400" dirty="0">
+                <a:solidFill>
+                  <a:schemeClr val="tx1"/>
+                </a:solidFill>
+              </a:rPr>
+              <a:t>a</a:t>
+            </a:r>
+            <a:pPr indent="0" marL="0">
+              <a:spcAft>
+                <a:spcPts val="700"/>
+              </a:spcAft>
+              <a:buNone/>
+            </a:pPr>
+            <a:r>
+              <a:rPr lang="en-US" sz="1400" baseline="-40000" dirty="0">
+                <a:solidFill>
+                  <a:schemeClr val="tx1"/>
+                </a:solidFill>
+              </a:rPr>
+              <a:t>H</a:t>
+            </a:r>
+            <a:pPr indent="0" marL="0">
+              <a:spcAft>
+                <a:spcPts val="700"/>
+              </a:spcAft>
+              <a:buNone/>
+            </a:pPr>
+            <a:r>
+              <a:rPr lang="en-US" sz="1400" dirty="0">
+                <a:solidFill>
+                  <a:schemeClr val="tx1"/>
+                </a:solidFill>
+              </a:rPr>
+              <a:t> is between 0 and 1, so √(1 − a</a:t>
+            </a:r>
+            <a:pPr indent="0" marL="0">
+              <a:spcAft>
+                <a:spcPts val="700"/>
+              </a:spcAft>
+              <a:buNone/>
+            </a:pPr>
+            <a:r>
+              <a:rPr lang="en-US" sz="1400" baseline="-40000" dirty="0">
+                <a:solidFill>
+                  <a:schemeClr val="tx1"/>
+                </a:solidFill>
+              </a:rPr>
+              <a:t>H</a:t>
+            </a:r>
+            <a:pPr indent="0" marL="0">
+              <a:spcAft>
+                <a:spcPts val="700"/>
+              </a:spcAft>
+              <a:buNone/>
+            </a:pPr>
+            <a:r>
+              <a:rPr lang="en-US" sz="1400" baseline="30000" dirty="0">
+                <a:solidFill>
+                  <a:schemeClr val="tx1"/>
+                </a:solidFill>
+              </a:rPr>
+              <a:t>2</a:t>
+            </a:r>
+            <a:pPr indent="0" marL="0">
+              <a:spcAft>
+                <a:spcPts val="700"/>
+              </a:spcAft>
+              <a:buNone/>
+            </a:pPr>
+            <a:r>
+              <a:rPr lang="en-US" sz="1400" dirty="0">
+                <a:solidFill>
+                  <a:schemeClr val="tx1"/>
+                </a:solidFill>
+              </a:rPr>
+              <a:t>) in the simulation is a real number</a:t>
+            </a:r>
+            <a:endParaRPr lang="en-US" sz="1400" dirty="0"/>
+          </a:p>
+          <a:p>
+            <a:pPr indent="0" marL="0">
+              <a:spcAft>
+                <a:spcPts val="700"/>
+              </a:spcAft>
+              <a:buNone/>
+            </a:pPr>
+            <a:r>
+              <a:rPr lang="en-US" sz="1400" b="1" dirty="0">
+                <a:solidFill>
+                  <a:srgbClr val="D9622B"/>
+                </a:solidFill>
+              </a:rPr>
+              <a:t>(b)  </a:t>
+            </a:r>
+            <a:pPr indent="0" marL="0">
+              <a:spcAft>
+                <a:spcPts val="700"/>
+              </a:spcAft>
+              <a:buNone/>
+            </a:pPr>
+            <a:r>
+              <a:rPr lang="en-US" sz="1400" dirty="0">
+                <a:solidFill>
+                  <a:schemeClr val="tx1"/>
+                </a:solidFill>
+              </a:rPr>
+              <a:t>Y</a:t>
+            </a:r>
+            <a:pPr indent="0" marL="0">
+              <a:spcAft>
+                <a:spcPts val="700"/>
+              </a:spcAft>
+              <a:buNone/>
+            </a:pPr>
+            <a:r>
+              <a:rPr lang="en-US" sz="1400" baseline="-40000" dirty="0">
+                <a:solidFill>
+                  <a:schemeClr val="tx1"/>
+                </a:solidFill>
+              </a:rPr>
+              <a:t>j</a:t>
+            </a:r>
+            <a:pPr indent="0" marL="0">
+              <a:spcAft>
+                <a:spcPts val="700"/>
+              </a:spcAft>
+              <a:buNone/>
+            </a:pPr>
+            <a:r>
+              <a:rPr lang="en-US" sz="1400" dirty="0">
+                <a:solidFill>
+                  <a:schemeClr val="tx1"/>
+                </a:solidFill>
+              </a:rPr>
+              <a:t> is a sum of independent normal pieces, so its variance is q</a:t>
+            </a:r>
+            <a:pPr indent="0" marL="0">
+              <a:spcAft>
+                <a:spcPts val="700"/>
+              </a:spcAft>
+              <a:buNone/>
+            </a:pPr>
+            <a:r>
+              <a:rPr lang="en-US" sz="1400" baseline="-40000" dirty="0">
+                <a:solidFill>
+                  <a:schemeClr val="tx1"/>
+                </a:solidFill>
+              </a:rPr>
+              <a:t>j</a:t>
+            </a:r>
+            <a:pPr indent="0" marL="0">
+              <a:spcAft>
+                <a:spcPts val="700"/>
+              </a:spcAft>
+              <a:buNone/>
+            </a:pPr>
+            <a:r>
+              <a:rPr lang="en-US" sz="1400" dirty="0">
+                <a:solidFill>
+                  <a:schemeClr val="tx1"/>
+                </a:solidFill>
+              </a:rPr>
+              <a:t> = Δ</a:t>
+            </a:r>
+            <a:pPr indent="0" marL="0">
+              <a:spcAft>
+                <a:spcPts val="700"/>
+              </a:spcAft>
+              <a:buNone/>
+            </a:pPr>
+            <a:r>
+              <a:rPr lang="en-US" sz="1400" baseline="30000" dirty="0">
+                <a:solidFill>
+                  <a:schemeClr val="tx1"/>
+                </a:solidFill>
+              </a:rPr>
+              <a:t>2H</a:t>
+            </a:r>
+            <a:pPr indent="0" marL="0">
+              <a:spcAft>
+                <a:spcPts val="700"/>
+              </a:spcAft>
+              <a:buNone/>
+            </a:pPr>
+            <a:r>
+              <a:rPr lang="en-US" sz="1400" dirty="0">
+                <a:solidFill>
+                  <a:schemeClr val="tx1"/>
+                </a:solidFill>
+              </a:rPr>
+              <a:t> + Δ Σ w</a:t>
+            </a:r>
+            <a:pPr indent="0" marL="0">
+              <a:spcAft>
+                <a:spcPts val="700"/>
+              </a:spcAft>
+              <a:buNone/>
+            </a:pPr>
+            <a:r>
+              <a:rPr lang="en-US" sz="1400" baseline="-40000" dirty="0">
+                <a:solidFill>
+                  <a:schemeClr val="tx1"/>
+                </a:solidFill>
+              </a:rPr>
+              <a:t>k</a:t>
+            </a:r>
+            <a:pPr indent="0" marL="0">
+              <a:spcAft>
+                <a:spcPts val="700"/>
+              </a:spcAft>
+              <a:buNone/>
+            </a:pPr>
+            <a:r>
+              <a:rPr lang="en-US" sz="1400" baseline="30000" dirty="0">
+                <a:solidFill>
+                  <a:schemeClr val="tx1"/>
+                </a:solidFill>
+              </a:rPr>
+              <a:t>2</a:t>
+            </a:r>
+            <a:endParaRPr lang="en-US" sz="1400" dirty="0"/>
           </a:p>
         </p:txBody>
       </p:sp>
       <p:sp>
         <p:nvSpPr>
-          <p:cNvPr id="4" name="checks card"/>
+          <p:cNvPr id="4" name="q1ab card"/>
           <p:cNvSpPr/>
           <p:nvPr/>
         </p:nvSpPr>
         <p:spPr>
           <a:xfrm>
-            <a:off x="457200" y="3246120"/>
-            <a:ext cx="4023360" cy="1325880"/>
+            <a:off x="5486400" y="1097280"/>
+            <a:ext cx="3200400" cy="3474720"/>
           </a:xfrm>
           <a:prstGeom prst="roundRect">
             <a:avLst>
-              <a:gd name="adj" fmla="val 5517"/>
+              <a:gd name="adj" fmla="val 2286"/>
             </a:avLst>
           </a:prstGeom>
           <a:solidFill>
@@ -2661,14 +3244,14 @@
       </p:sp>
       <p:sp>
         <p:nvSpPr>
-          <p:cNvPr id="5" name="checks text"/>
+          <p:cNvPr id="5" name="q1ab card text"/>
           <p:cNvSpPr txBox="1"/>
           <p:nvPr/>
         </p:nvSpPr>
         <p:spPr>
           <a:xfrm>
-            <a:off x="640080" y="3337560"/>
-            <a:ext cx="3657600" cy="1143000"/>
+            <a:off x="5669280" y="1234440"/>
+            <a:ext cx="2834640" cy="3200400"/>
           </a:xfrm>
           <a:prstGeom prst="rect">
             <a:avLst/>
@@ -2681,20 +3264,155 @@
           <a:lstStyle/>
           <a:p>
             <a:pPr indent="0" marL="0">
-              <a:buNone/>
-            </a:pPr>
-            <a:r>
-              <a:rPr lang="en-US" sz="1300" b="1" dirty="0">
-                <a:solidFill>
-                  <a:schemeClr val="tx1"/>
-                </a:solidFill>
-              </a:rPr>
-              <a:t>Checks (Problem 1)</a:t>
-            </a:r>
-            <a:endParaRPr lang="en-US" sz="1300" dirty="0"/>
-          </a:p>
-          <a:p>
-            <a:pPr indent="0" marL="0">
+              <a:spcAft>
+                <a:spcPts val="1000"/>
+              </a:spcAft>
+              <a:buNone/>
+            </a:pPr>
+            <a:r>
+              <a:rPr lang="en-US" sz="1500" b="1" dirty="0">
+                <a:solidFill>
+                  <a:schemeClr val="tx2"/>
+                </a:solidFill>
+              </a:rPr>
+              <a:t>Normalization</a:t>
+            </a:r>
+            <a:endParaRPr lang="en-US" sz="1500" dirty="0"/>
+          </a:p>
+          <a:p>
+            <a:pPr indent="0" marL="0">
+              <a:spcAft>
+                <a:spcPts val="1000"/>
+              </a:spcAft>
+              <a:buNone/>
+            </a:pPr>
+            <a:r>
+              <a:rPr lang="en-US" sz="1700" dirty="0">
+                <a:solidFill>
+                  <a:schemeClr val="accent1"/>
+                </a:solidFill>
+              </a:rPr>
+              <a:t>V</a:t>
+            </a:r>
+            <a:pPr indent="0" marL="0">
+              <a:spcAft>
+                <a:spcPts val="1000"/>
+              </a:spcAft>
+              <a:buNone/>
+            </a:pPr>
+            <a:r>
+              <a:rPr lang="en-US" sz="1700" baseline="-40000" dirty="0">
+                <a:solidFill>
+                  <a:schemeClr val="accent1"/>
+                </a:solidFill>
+              </a:rPr>
+              <a:t>j</a:t>
+            </a:r>
+            <a:pPr indent="0" marL="0">
+              <a:spcAft>
+                <a:spcPts val="1000"/>
+              </a:spcAft>
+              <a:buNone/>
+            </a:pPr>
+            <a:r>
+              <a:rPr lang="en-US" sz="1700" dirty="0">
+                <a:solidFill>
+                  <a:schemeClr val="accent1"/>
+                </a:solidFill>
+              </a:rPr>
+              <a:t> = ξ exp(η Y</a:t>
+            </a:r>
+            <a:pPr indent="0" marL="0">
+              <a:spcAft>
+                <a:spcPts val="1000"/>
+              </a:spcAft>
+              <a:buNone/>
+            </a:pPr>
+            <a:r>
+              <a:rPr lang="en-US" sz="1700" baseline="-40000" dirty="0">
+                <a:solidFill>
+                  <a:schemeClr val="accent1"/>
+                </a:solidFill>
+              </a:rPr>
+              <a:t>j</a:t>
+            </a:r>
+            <a:pPr indent="0" marL="0">
+              <a:spcAft>
+                <a:spcPts val="1000"/>
+              </a:spcAft>
+              <a:buNone/>
+            </a:pPr>
+            <a:r>
+              <a:rPr lang="en-US" sz="1700" dirty="0">
+                <a:solidFill>
+                  <a:schemeClr val="accent1"/>
+                </a:solidFill>
+              </a:rPr>
+              <a:t> − η</a:t>
+            </a:r>
+            <a:pPr indent="0" marL="0">
+              <a:spcAft>
+                <a:spcPts val="1000"/>
+              </a:spcAft>
+              <a:buNone/>
+            </a:pPr>
+            <a:r>
+              <a:rPr lang="en-US" sz="1700" baseline="30000" dirty="0">
+                <a:solidFill>
+                  <a:schemeClr val="accent1"/>
+                </a:solidFill>
+              </a:rPr>
+              <a:t>2</a:t>
+            </a:r>
+            <a:pPr indent="0" marL="0">
+              <a:spcAft>
+                <a:spcPts val="1000"/>
+              </a:spcAft>
+              <a:buNone/>
+            </a:pPr>
+            <a:r>
+              <a:rPr lang="en-US" sz="1700" dirty="0">
+                <a:solidFill>
+                  <a:schemeClr val="accent1"/>
+                </a:solidFill>
+              </a:rPr>
+              <a:t> q</a:t>
+            </a:r>
+            <a:pPr indent="0" marL="0">
+              <a:spcAft>
+                <a:spcPts val="1000"/>
+              </a:spcAft>
+              <a:buNone/>
+            </a:pPr>
+            <a:r>
+              <a:rPr lang="en-US" sz="1700" baseline="-40000" dirty="0">
+                <a:solidFill>
+                  <a:schemeClr val="accent1"/>
+                </a:solidFill>
+              </a:rPr>
+              <a:t>j</a:t>
+            </a:r>
+            <a:pPr indent="0" marL="0">
+              <a:spcAft>
+                <a:spcPts val="1000"/>
+              </a:spcAft>
+              <a:buNone/>
+            </a:pPr>
+            <a:r>
+              <a:rPr lang="en-US" sz="1700" dirty="0">
+                <a:solidFill>
+                  <a:schemeClr val="accent1"/>
+                </a:solidFill>
+              </a:rPr>
+              <a:t> / 2)</a:t>
+            </a:r>
+            <a:endParaRPr lang="en-US" sz="1500" dirty="0"/>
+          </a:p>
+          <a:p>
+            <a:pPr indent="0" marL="0">
+              <a:spcAft>
+                <a:spcPts val="1000"/>
+              </a:spcAft>
               <a:buNone/>
             </a:pPr>
             <a:r>
@@ -2703,12 +3421,26 @@
                   <a:schemeClr val="tx1"/>
                 </a:solidFill>
               </a:rPr>
-              <a:t>Mean and variance of Y, mean of V at j = 32, 64, 128 consistent with 0, q_j, ξ (within about 2 SE)</a:t>
-            </a:r>
-            <a:endParaRPr lang="en-US" sz="1300" dirty="0"/>
-          </a:p>
-          <a:p>
-            <a:pPr indent="0" marL="0">
+              <a:t>Using q</a:t>
+            </a:r>
+            <a:pPr indent="0" marL="0">
+              <a:spcAft>
+                <a:spcPts val="1000"/>
+              </a:spcAft>
+              <a:buNone/>
+            </a:pPr>
+            <a:r>
+              <a:rPr lang="en-US" sz="1300" baseline="-40000" dirty="0">
+                <a:solidFill>
+                  <a:schemeClr val="tx1"/>
+                </a:solidFill>
+              </a:rPr>
+              <a:t>j</a:t>
+            </a:r>
+            <a:pPr indent="0" marL="0">
+              <a:spcAft>
+                <a:spcPts val="1000"/>
+              </a:spcAft>
               <a:buNone/>
             </a:pPr>
             <a:r>
@@ -2717,69 +3449,236 @@
                   <a:schemeClr val="tx1"/>
                 </a:solidFill>
               </a:rPr>
-              <a:t>η = 0: simulated put prices consistent with Black–Scholes (6)</a:t>
-            </a:r>
-            <a:endParaRPr lang="en-US" sz="1300" dirty="0"/>
-          </a:p>
-        </p:txBody>
-      </p:sp>
-      <p:pic>
-        <p:nvPicPr>
-          <p:cNvPr id="6" name="variance paths figure" descr="/home/claude/rbergomi-vr/slides/variance_paths.png">    </p:cNvPr>
-          <p:cNvPicPr>
-            <a:picLocks noChangeAspect="1"/>
-          </p:cNvPicPr>
-          <p:nvPr/>
-        </p:nvPicPr>
-        <p:blipFill>
-          <a:blip r:embed="rId1"/>
-          <a:stretch>
-            <a:fillRect/>
-          </a:stretch>
-        </p:blipFill>
-        <p:spPr>
-          <a:xfrm>
-            <a:off x="4709160" y="1325880"/>
-            <a:ext cx="4023360" cy="1453896"/>
-          </a:xfrm>
-          <a:prstGeom prst="rect">
-            <a:avLst/>
-          </a:prstGeom>
-        </p:spPr>
-      </p:pic>
-      <p:sp>
-        <p:nvSpPr>
-          <p:cNvPr id="7" name="fig caption"/>
-          <p:cNvSpPr txBox="1"/>
-          <p:nvPr/>
-        </p:nvSpPr>
-        <p:spPr>
-          <a:xfrm>
-            <a:off x="4709160" y="2834640"/>
-            <a:ext cx="4023360" cy="365760"/>
-          </a:xfrm>
-          <a:prstGeom prst="rect">
-            <a:avLst/>
-          </a:prstGeom>
-          <a:noFill/>
-          <a:ln/>
-        </p:spPr>
-        <p:txBody>
-          <a:bodyPr wrap="square" rtlCol="0" anchor="ctr"/>
-          <a:lstStyle/>
-          <a:p>
-            <a:pPr indent="0" marL="0">
-              <a:buNone/>
-            </a:pPr>
-            <a:r>
-              <a:rPr lang="en-US" sz="1100" dirty="0">
-                <a:solidFill>
-                  <a:schemeClr val="accent5"/>
-                </a:solidFill>
-              </a:rPr>
-              <a:t>Three variance paths, same Gaussian inputs, H = 0.1 vs H = 0.4</a:t>
-            </a:r>
-            <a:endParaRPr lang="en-US" sz="1100" dirty="0"/>
+              <a:t> (not t</a:t>
+            </a:r>
+            <a:pPr indent="0" marL="0">
+              <a:spcAft>
+                <a:spcPts val="1000"/>
+              </a:spcAft>
+              <a:buNone/>
+            </a:pPr>
+            <a:r>
+              <a:rPr lang="en-US" sz="1300" baseline="-40000" dirty="0">
+                <a:solidFill>
+                  <a:schemeClr val="tx1"/>
+                </a:solidFill>
+              </a:rPr>
+              <a:t>j</a:t>
+            </a:r>
+            <a:pPr indent="0" marL="0">
+              <a:spcAft>
+                <a:spcPts val="1000"/>
+              </a:spcAft>
+              <a:buNone/>
+            </a:pPr>
+            <a:r>
+              <a:rPr lang="en-US" sz="1300" baseline="30000" dirty="0">
+                <a:solidFill>
+                  <a:schemeClr val="tx1"/>
+                </a:solidFill>
+              </a:rPr>
+              <a:t>2H</a:t>
+            </a:r>
+            <a:pPr indent="0" marL="0">
+              <a:spcAft>
+                <a:spcPts val="1000"/>
+              </a:spcAft>
+              <a:buNone/>
+            </a:pPr>
+            <a:r>
+              <a:rPr lang="en-US" sz="1300" dirty="0">
+                <a:solidFill>
+                  <a:schemeClr val="tx1"/>
+                </a:solidFill>
+              </a:rPr>
+              <a:t>) makes E[V</a:t>
+            </a:r>
+            <a:pPr indent="0" marL="0">
+              <a:spcAft>
+                <a:spcPts val="1000"/>
+              </a:spcAft>
+              <a:buNone/>
+            </a:pPr>
+            <a:r>
+              <a:rPr lang="en-US" sz="1300" baseline="-40000" dirty="0">
+                <a:solidFill>
+                  <a:schemeClr val="tx1"/>
+                </a:solidFill>
+              </a:rPr>
+              <a:t>j</a:t>
+            </a:r>
+            <a:pPr indent="0" marL="0">
+              <a:spcAft>
+                <a:spcPts val="1000"/>
+              </a:spcAft>
+              <a:buNone/>
+            </a:pPr>
+            <a:r>
+              <a:rPr lang="en-US" sz="1300" dirty="0">
+                <a:solidFill>
+                  <a:schemeClr val="tx1"/>
+                </a:solidFill>
+              </a:rPr>
+              <a:t>] = ξ exactly on the grid.</a:t>
+            </a:r>
+            <a:endParaRPr lang="en-US" sz="1500" dirty="0"/>
+          </a:p>
+          <a:p>
+            <a:pPr indent="0" marL="0">
+              <a:spcAft>
+                <a:spcPts val="1000"/>
+              </a:spcAft>
+              <a:buNone/>
+            </a:pPr>
+            <a:r>
+              <a:rPr lang="en-US" sz="1300" dirty="0">
+                <a:solidFill>
+                  <a:schemeClr val="tx1"/>
+                </a:solidFill>
+              </a:rPr>
+              <a:t>Because q</a:t>
+            </a:r>
+            <a:pPr indent="0" marL="0">
+              <a:spcAft>
+                <a:spcPts val="1000"/>
+              </a:spcAft>
+              <a:buNone/>
+            </a:pPr>
+            <a:r>
+              <a:rPr lang="en-US" sz="1300" baseline="-40000" dirty="0">
+                <a:solidFill>
+                  <a:schemeClr val="tx1"/>
+                </a:solidFill>
+              </a:rPr>
+              <a:t>j</a:t>
+            </a:r>
+            <a:pPr indent="0" marL="0">
+              <a:spcAft>
+                <a:spcPts val="1000"/>
+              </a:spcAft>
+              <a:buNone/>
+            </a:pPr>
+            <a:r>
+              <a:rPr lang="en-US" sz="1300" dirty="0">
+                <a:solidFill>
+                  <a:schemeClr val="tx1"/>
+                </a:solidFill>
+              </a:rPr>
+              <a:t> &lt; t</a:t>
+            </a:r>
+            <a:pPr indent="0" marL="0">
+              <a:spcAft>
+                <a:spcPts val="1000"/>
+              </a:spcAft>
+              <a:buNone/>
+            </a:pPr>
+            <a:r>
+              <a:rPr lang="en-US" sz="1300" baseline="-40000" dirty="0">
+                <a:solidFill>
+                  <a:schemeClr val="tx1"/>
+                </a:solidFill>
+              </a:rPr>
+              <a:t>j</a:t>
+            </a:r>
+            <a:pPr indent="0" marL="0">
+              <a:spcAft>
+                <a:spcPts val="1000"/>
+              </a:spcAft>
+              <a:buNone/>
+            </a:pPr>
+            <a:r>
+              <a:rPr lang="en-US" sz="1300" baseline="30000" dirty="0">
+                <a:solidFill>
+                  <a:schemeClr val="tx1"/>
+                </a:solidFill>
+              </a:rPr>
+              <a:t>2H</a:t>
+            </a:r>
+            <a:pPr indent="0" marL="0">
+              <a:spcAft>
+                <a:spcPts val="1000"/>
+              </a:spcAft>
+              <a:buNone/>
+            </a:pPr>
+            <a:r>
+              <a:rPr lang="en-US" sz="1300" dirty="0">
+                <a:solidFill>
+                  <a:schemeClr val="tx1"/>
+                </a:solidFill>
+              </a:rPr>
+              <a:t> for j ≥ 2, using t</a:t>
+            </a:r>
+            <a:pPr indent="0" marL="0">
+              <a:spcAft>
+                <a:spcPts val="1000"/>
+              </a:spcAft>
+              <a:buNone/>
+            </a:pPr>
+            <a:r>
+              <a:rPr lang="en-US" sz="1300" baseline="-40000" dirty="0">
+                <a:solidFill>
+                  <a:schemeClr val="tx1"/>
+                </a:solidFill>
+              </a:rPr>
+              <a:t>j</a:t>
+            </a:r>
+            <a:pPr indent="0" marL="0">
+              <a:spcAft>
+                <a:spcPts val="1000"/>
+              </a:spcAft>
+              <a:buNone/>
+            </a:pPr>
+            <a:r>
+              <a:rPr lang="en-US" sz="1300" baseline="30000" dirty="0">
+                <a:solidFill>
+                  <a:schemeClr val="tx1"/>
+                </a:solidFill>
+              </a:rPr>
+              <a:t>2H</a:t>
+            </a:r>
+            <a:pPr indent="0" marL="0">
+              <a:spcAft>
+                <a:spcPts val="1000"/>
+              </a:spcAft>
+              <a:buNone/>
+            </a:pPr>
+            <a:r>
+              <a:rPr lang="en-US" sz="1300" dirty="0">
+                <a:solidFill>
+                  <a:schemeClr val="tx1"/>
+                </a:solidFill>
+              </a:rPr>
+              <a:t> would push E[V</a:t>
+            </a:r>
+            <a:pPr indent="0" marL="0">
+              <a:spcAft>
+                <a:spcPts val="1000"/>
+              </a:spcAft>
+              <a:buNone/>
+            </a:pPr>
+            <a:r>
+              <a:rPr lang="en-US" sz="1300" baseline="-40000" dirty="0">
+                <a:solidFill>
+                  <a:schemeClr val="tx1"/>
+                </a:solidFill>
+              </a:rPr>
+              <a:t>j</a:t>
+            </a:r>
+            <a:pPr indent="0" marL="0">
+              <a:spcAft>
+                <a:spcPts val="1000"/>
+              </a:spcAft>
+              <a:buNone/>
+            </a:pPr>
+            <a:r>
+              <a:rPr lang="en-US" sz="1300" dirty="0">
+                <a:solidFill>
+                  <a:schemeClr val="tx1"/>
+                </a:solidFill>
+              </a:rPr>
+              <a:t>] slightly below ξ.</a:t>
+            </a:r>
+            <a:endParaRPr lang="en-US" sz="1500" dirty="0"/>
           </a:p>
         </p:txBody>
       </p:sp>
@@ -2885,26 +3784,1259 @@
                   <a:schemeClr val="tx2"/>
                 </a:solidFill>
               </a:rPr>
-              <a:t>Four estimators of the same price</a:t>
+              <a:t>Q1 (c)–(d): checking the simulator</a:t>
             </a:r>
             <a:endParaRPr lang="en-US" sz="2600" dirty="0"/>
+          </a:p>
+        </p:txBody>
+      </p:sp>
+      <p:graphicFrame>
+        <p:nvGraphicFramePr>
+          <p:cNvPr id="4" name="q1c table"/>
+          <p:cNvGraphicFramePr>
+            <a:graphicFrameLocks noGrp="1"/>
+          </p:cNvGraphicFramePr>
+          <p:nvPr>
+            <p:extLst>
+              <p:ext uri="{D42A27DB-BD31-4B8C-83A1-F6EECF244321}">
+                <p14:modId xmlns:p14="http://schemas.microsoft.com/office/powerpoint/2010/main" val="1579011935"/>
+              </p:ext>
+            </p:extLst>
+          </p:nvPr>
+        </p:nvGraphicFramePr>
+        <p:xfrm>
+          <a:off x="457200" y="1097280"/>
+          <a:ext cx="4480560" cy="914400"/>
+        </p:xfrm>
+        <a:graphic>
+          <a:graphicData uri="http://schemas.openxmlformats.org/drawingml/2006/table">
+            <a:tbl>
+              <a:tblPr/>
+              <a:tblGrid>
+                <a:gridCol w="457200"/>
+                <a:gridCol w="1463040"/>
+                <a:gridCol w="1005840"/>
+                <a:gridCol w="1554480"/>
+              </a:tblGrid>
+              <a:tr h="274320">
+                <a:tc>
+                  <a:txBody>
+                    <a:bodyPr/>
+                    <a:lstStyle/>
+                    <a:p>
+                      <a:pPr indent="0" marL="0">
+                        <a:buNone/>
+                      </a:pPr>
+                      <a:r>
+                        <a:rPr lang="en-US" sz="1200" b="1" dirty="0">
+                          <a:solidFill>
+                            <a:schemeClr val="tx2"/>
+                          </a:solidFill>
+                        </a:rPr>
+                        <a:t>j</a:t>
+                      </a:r>
+                      <a:endParaRPr lang="en-US" sz="1200" dirty="0"/>
+                    </a:p>
+                  </a:txBody>
+                  <a:tcPr marL="91440" marR="91440" marT="45720" marB="45720">
+                    <a:lnL w="6350" cap="flat" cmpd="sng" algn="ctr">
+                      <a:solidFill>
+                        <a:srgbClr val="D5DBDF"/>
+                      </a:solidFill>
+                      <a:prstDash val="solid"/>
+                      <a:round/>
+                      <a:headEnd type="none" w="med" len="med"/>
+                      <a:tailEnd type="none" w="med" len="med"/>
+                    </a:lnL>
+                    <a:lnR w="6350" cap="flat" cmpd="sng" algn="ctr">
+                      <a:solidFill>
+                        <a:srgbClr val="D5DBDF"/>
+                      </a:solidFill>
+                      <a:prstDash val="solid"/>
+                      <a:round/>
+                      <a:headEnd type="none" w="med" len="med"/>
+                      <a:tailEnd type="none" w="med" len="med"/>
+                    </a:lnR>
+                    <a:lnT w="6350" cap="flat" cmpd="sng" algn="ctr">
+                      <a:solidFill>
+                        <a:srgbClr val="D5DBDF"/>
+                      </a:solidFill>
+                      <a:prstDash val="solid"/>
+                      <a:round/>
+                      <a:headEnd type="none" w="med" len="med"/>
+                      <a:tailEnd type="none" w="med" len="med"/>
+                    </a:lnT>
+                    <a:lnB w="6350" cap="flat" cmpd="sng" algn="ctr">
+                      <a:solidFill>
+                        <a:srgbClr val="D5DBDF"/>
+                      </a:solidFill>
+                      <a:prstDash val="solid"/>
+                      <a:round/>
+                      <a:headEnd type="none" w="med" len="med"/>
+                      <a:tailEnd type="none" w="med" len="med"/>
+                    </a:lnB>
+                    <a:solidFill>
+                      <a:schemeClr val="bg2"/>
+                    </a:solidFill>
+                  </a:tcPr>
+                </a:tc>
+                <a:tc>
+                  <a:txBody>
+                    <a:bodyPr/>
+                    <a:lstStyle/>
+                    <a:p>
+                      <a:pPr indent="0" marL="0">
+                        <a:buNone/>
+                      </a:pPr>
+                      <a:r>
+                        <a:rPr lang="en-US" sz="1200" b="1" dirty="0">
+                          <a:solidFill>
+                            <a:schemeClr val="tx2"/>
+                          </a:solidFill>
+                        </a:rPr>
+                        <a:t>mean of Y (SE)</a:t>
+                      </a:r>
+                      <a:endParaRPr lang="en-US" sz="1200" dirty="0"/>
+                    </a:p>
+                  </a:txBody>
+                  <a:tcPr marL="91440" marR="91440" marT="45720" marB="45720">
+                    <a:lnL w="6350" cap="flat" cmpd="sng" algn="ctr">
+                      <a:solidFill>
+                        <a:srgbClr val="D5DBDF"/>
+                      </a:solidFill>
+                      <a:prstDash val="solid"/>
+                      <a:round/>
+                      <a:headEnd type="none" w="med" len="med"/>
+                      <a:tailEnd type="none" w="med" len="med"/>
+                    </a:lnL>
+                    <a:lnR w="6350" cap="flat" cmpd="sng" algn="ctr">
+                      <a:solidFill>
+                        <a:srgbClr val="D5DBDF"/>
+                      </a:solidFill>
+                      <a:prstDash val="solid"/>
+                      <a:round/>
+                      <a:headEnd type="none" w="med" len="med"/>
+                      <a:tailEnd type="none" w="med" len="med"/>
+                    </a:lnR>
+                    <a:lnT w="6350" cap="flat" cmpd="sng" algn="ctr">
+                      <a:solidFill>
+                        <a:srgbClr val="D5DBDF"/>
+                      </a:solidFill>
+                      <a:prstDash val="solid"/>
+                      <a:round/>
+                      <a:headEnd type="none" w="med" len="med"/>
+                      <a:tailEnd type="none" w="med" len="med"/>
+                    </a:lnT>
+                    <a:lnB w="6350" cap="flat" cmpd="sng" algn="ctr">
+                      <a:solidFill>
+                        <a:srgbClr val="D5DBDF"/>
+                      </a:solidFill>
+                      <a:prstDash val="solid"/>
+                      <a:round/>
+                      <a:headEnd type="none" w="med" len="med"/>
+                      <a:tailEnd type="none" w="med" len="med"/>
+                    </a:lnB>
+                    <a:solidFill>
+                      <a:schemeClr val="bg2"/>
+                    </a:solidFill>
+                  </a:tcPr>
+                </a:tc>
+                <a:tc>
+                  <a:txBody>
+                    <a:bodyPr/>
+                    <a:lstStyle/>
+                    <a:p>
+                      <a:pPr indent="0" marL="0">
+                        <a:buNone/>
+                      </a:pPr>
+                      <a:r>
+                        <a:rPr lang="en-US" sz="1200" b="1" dirty="0">
+                          <a:solidFill>
+                            <a:schemeClr val="tx2"/>
+                          </a:solidFill>
+                        </a:rPr>
+                        <a:t>var(Y) / q</a:t>
+                      </a:r>
+                      <a:endParaRPr lang="en-US" sz="1200" dirty="0"/>
+                    </a:p>
+                  </a:txBody>
+                  <a:tcPr marL="91440" marR="91440" marT="45720" marB="45720">
+                    <a:lnL w="6350" cap="flat" cmpd="sng" algn="ctr">
+                      <a:solidFill>
+                        <a:srgbClr val="D5DBDF"/>
+                      </a:solidFill>
+                      <a:prstDash val="solid"/>
+                      <a:round/>
+                      <a:headEnd type="none" w="med" len="med"/>
+                      <a:tailEnd type="none" w="med" len="med"/>
+                    </a:lnL>
+                    <a:lnR w="6350" cap="flat" cmpd="sng" algn="ctr">
+                      <a:solidFill>
+                        <a:srgbClr val="D5DBDF"/>
+                      </a:solidFill>
+                      <a:prstDash val="solid"/>
+                      <a:round/>
+                      <a:headEnd type="none" w="med" len="med"/>
+                      <a:tailEnd type="none" w="med" len="med"/>
+                    </a:lnR>
+                    <a:lnT w="6350" cap="flat" cmpd="sng" algn="ctr">
+                      <a:solidFill>
+                        <a:srgbClr val="D5DBDF"/>
+                      </a:solidFill>
+                      <a:prstDash val="solid"/>
+                      <a:round/>
+                      <a:headEnd type="none" w="med" len="med"/>
+                      <a:tailEnd type="none" w="med" len="med"/>
+                    </a:lnT>
+                    <a:lnB w="6350" cap="flat" cmpd="sng" algn="ctr">
+                      <a:solidFill>
+                        <a:srgbClr val="D5DBDF"/>
+                      </a:solidFill>
+                      <a:prstDash val="solid"/>
+                      <a:round/>
+                      <a:headEnd type="none" w="med" len="med"/>
+                      <a:tailEnd type="none" w="med" len="med"/>
+                    </a:lnB>
+                    <a:solidFill>
+                      <a:schemeClr val="bg2"/>
+                    </a:solidFill>
+                  </a:tcPr>
+                </a:tc>
+                <a:tc>
+                  <a:txBody>
+                    <a:bodyPr/>
+                    <a:lstStyle/>
+                    <a:p>
+                      <a:pPr indent="0" marL="0">
+                        <a:buNone/>
+                      </a:pPr>
+                      <a:r>
+                        <a:rPr lang="en-US" sz="1200" b="1" dirty="0">
+                          <a:solidFill>
+                            <a:schemeClr val="tx2"/>
+                          </a:solidFill>
+                        </a:rPr>
+                        <a:t>mean of V (SE)</a:t>
+                      </a:r>
+                      <a:endParaRPr lang="en-US" sz="1200" dirty="0"/>
+                    </a:p>
+                  </a:txBody>
+                  <a:tcPr marL="91440" marR="91440" marT="45720" marB="45720">
+                    <a:lnL w="6350" cap="flat" cmpd="sng" algn="ctr">
+                      <a:solidFill>
+                        <a:srgbClr val="D5DBDF"/>
+                      </a:solidFill>
+                      <a:prstDash val="solid"/>
+                      <a:round/>
+                      <a:headEnd type="none" w="med" len="med"/>
+                      <a:tailEnd type="none" w="med" len="med"/>
+                    </a:lnL>
+                    <a:lnR w="6350" cap="flat" cmpd="sng" algn="ctr">
+                      <a:solidFill>
+                        <a:srgbClr val="D5DBDF"/>
+                      </a:solidFill>
+                      <a:prstDash val="solid"/>
+                      <a:round/>
+                      <a:headEnd type="none" w="med" len="med"/>
+                      <a:tailEnd type="none" w="med" len="med"/>
+                    </a:lnR>
+                    <a:lnT w="6350" cap="flat" cmpd="sng" algn="ctr">
+                      <a:solidFill>
+                        <a:srgbClr val="D5DBDF"/>
+                      </a:solidFill>
+                      <a:prstDash val="solid"/>
+                      <a:round/>
+                      <a:headEnd type="none" w="med" len="med"/>
+                      <a:tailEnd type="none" w="med" len="med"/>
+                    </a:lnT>
+                    <a:lnB w="6350" cap="flat" cmpd="sng" algn="ctr">
+                      <a:solidFill>
+                        <a:srgbClr val="D5DBDF"/>
+                      </a:solidFill>
+                      <a:prstDash val="solid"/>
+                      <a:round/>
+                      <a:headEnd type="none" w="med" len="med"/>
+                      <a:tailEnd type="none" w="med" len="med"/>
+                    </a:lnB>
+                    <a:solidFill>
+                      <a:schemeClr val="bg2"/>
+                    </a:solidFill>
+                  </a:tcPr>
+                </a:tc>
+              </a:tr>
+              <a:tr h="274320">
+                <a:tc>
+                  <a:txBody>
+                    <a:bodyPr/>
+                    <a:lstStyle/>
+                    <a:p>
+                      <a:pPr indent="0" marL="0">
+                        <a:buNone/>
+                      </a:pPr>
+                      <a:r>
+                        <a:rPr lang="en-US" sz="1200" dirty="0">
+                          <a:solidFill>
+                            <a:schemeClr val="tx1"/>
+                          </a:solidFill>
+                        </a:rPr>
+                        <a:t>32</a:t>
+                      </a:r>
+                      <a:endParaRPr lang="en-US" sz="1200" dirty="0"/>
+                    </a:p>
+                  </a:txBody>
+                  <a:tcPr marL="91440" marR="91440" marT="45720" marB="45720">
+                    <a:lnL w="6350" cap="flat" cmpd="sng" algn="ctr">
+                      <a:solidFill>
+                        <a:srgbClr val="D5DBDF"/>
+                      </a:solidFill>
+                      <a:prstDash val="solid"/>
+                      <a:round/>
+                      <a:headEnd type="none" w="med" len="med"/>
+                      <a:tailEnd type="none" w="med" len="med"/>
+                    </a:lnL>
+                    <a:lnR w="6350" cap="flat" cmpd="sng" algn="ctr">
+                      <a:solidFill>
+                        <a:srgbClr val="D5DBDF"/>
+                      </a:solidFill>
+                      <a:prstDash val="solid"/>
+                      <a:round/>
+                      <a:headEnd type="none" w="med" len="med"/>
+                      <a:tailEnd type="none" w="med" len="med"/>
+                    </a:lnR>
+                    <a:lnT w="6350" cap="flat" cmpd="sng" algn="ctr">
+                      <a:solidFill>
+                        <a:srgbClr val="D5DBDF"/>
+                      </a:solidFill>
+                      <a:prstDash val="solid"/>
+                      <a:round/>
+                      <a:headEnd type="none" w="med" len="med"/>
+                      <a:tailEnd type="none" w="med" len="med"/>
+                    </a:lnT>
+                    <a:lnB w="6350" cap="flat" cmpd="sng" algn="ctr">
+                      <a:solidFill>
+                        <a:srgbClr val="D5DBDF"/>
+                      </a:solidFill>
+                      <a:prstDash val="solid"/>
+                      <a:round/>
+                      <a:headEnd type="none" w="med" len="med"/>
+                      <a:tailEnd type="none" w="med" len="med"/>
+                    </a:lnB>
+                  </a:tcPr>
+                </a:tc>
+                <a:tc>
+                  <a:txBody>
+                    <a:bodyPr/>
+                    <a:lstStyle/>
+                    <a:p>
+                      <a:pPr indent="0" marL="0">
+                        <a:buNone/>
+                      </a:pPr>
+                      <a:r>
+                        <a:rPr lang="en-US" sz="1200" dirty="0">
+                          <a:solidFill>
+                            <a:schemeClr val="tx1"/>
+                          </a:solidFill>
+                        </a:rPr>
+                        <a:t>0.0016 (0.0026)</a:t>
+                      </a:r>
+                      <a:endParaRPr lang="en-US" sz="1200" dirty="0"/>
+                    </a:p>
+                  </a:txBody>
+                  <a:tcPr marL="91440" marR="91440" marT="45720" marB="45720">
+                    <a:lnL w="6350" cap="flat" cmpd="sng" algn="ctr">
+                      <a:solidFill>
+                        <a:srgbClr val="D5DBDF"/>
+                      </a:solidFill>
+                      <a:prstDash val="solid"/>
+                      <a:round/>
+                      <a:headEnd type="none" w="med" len="med"/>
+                      <a:tailEnd type="none" w="med" len="med"/>
+                    </a:lnL>
+                    <a:lnR w="6350" cap="flat" cmpd="sng" algn="ctr">
+                      <a:solidFill>
+                        <a:srgbClr val="D5DBDF"/>
+                      </a:solidFill>
+                      <a:prstDash val="solid"/>
+                      <a:round/>
+                      <a:headEnd type="none" w="med" len="med"/>
+                      <a:tailEnd type="none" w="med" len="med"/>
+                    </a:lnR>
+                    <a:lnT w="6350" cap="flat" cmpd="sng" algn="ctr">
+                      <a:solidFill>
+                        <a:srgbClr val="D5DBDF"/>
+                      </a:solidFill>
+                      <a:prstDash val="solid"/>
+                      <a:round/>
+                      <a:headEnd type="none" w="med" len="med"/>
+                      <a:tailEnd type="none" w="med" len="med"/>
+                    </a:lnT>
+                    <a:lnB w="6350" cap="flat" cmpd="sng" algn="ctr">
+                      <a:solidFill>
+                        <a:srgbClr val="D5DBDF"/>
+                      </a:solidFill>
+                      <a:prstDash val="solid"/>
+                      <a:round/>
+                      <a:headEnd type="none" w="med" len="med"/>
+                      <a:tailEnd type="none" w="med" len="med"/>
+                    </a:lnB>
+                  </a:tcPr>
+                </a:tc>
+                <a:tc>
+                  <a:txBody>
+                    <a:bodyPr/>
+                    <a:lstStyle/>
+                    <a:p>
+                      <a:pPr indent="0" marL="0">
+                        <a:buNone/>
+                      </a:pPr>
+                      <a:r>
+                        <a:rPr lang="en-US" sz="1200" dirty="0">
+                          <a:solidFill>
+                            <a:schemeClr val="tx1"/>
+                          </a:solidFill>
+                        </a:rPr>
+                        <a:t>0.997</a:t>
+                      </a:r>
+                      <a:endParaRPr lang="en-US" sz="1200" dirty="0"/>
+                    </a:p>
+                  </a:txBody>
+                  <a:tcPr marL="91440" marR="91440" marT="45720" marB="45720">
+                    <a:lnL w="6350" cap="flat" cmpd="sng" algn="ctr">
+                      <a:solidFill>
+                        <a:srgbClr val="D5DBDF"/>
+                      </a:solidFill>
+                      <a:prstDash val="solid"/>
+                      <a:round/>
+                      <a:headEnd type="none" w="med" len="med"/>
+                      <a:tailEnd type="none" w="med" len="med"/>
+                    </a:lnL>
+                    <a:lnR w="6350" cap="flat" cmpd="sng" algn="ctr">
+                      <a:solidFill>
+                        <a:srgbClr val="D5DBDF"/>
+                      </a:solidFill>
+                      <a:prstDash val="solid"/>
+                      <a:round/>
+                      <a:headEnd type="none" w="med" len="med"/>
+                      <a:tailEnd type="none" w="med" len="med"/>
+                    </a:lnR>
+                    <a:lnT w="6350" cap="flat" cmpd="sng" algn="ctr">
+                      <a:solidFill>
+                        <a:srgbClr val="D5DBDF"/>
+                      </a:solidFill>
+                      <a:prstDash val="solid"/>
+                      <a:round/>
+                      <a:headEnd type="none" w="med" len="med"/>
+                      <a:tailEnd type="none" w="med" len="med"/>
+                    </a:lnT>
+                    <a:lnB w="6350" cap="flat" cmpd="sng" algn="ctr">
+                      <a:solidFill>
+                        <a:srgbClr val="D5DBDF"/>
+                      </a:solidFill>
+                      <a:prstDash val="solid"/>
+                      <a:round/>
+                      <a:headEnd type="none" w="med" len="med"/>
+                      <a:tailEnd type="none" w="med" len="med"/>
+                    </a:lnB>
+                  </a:tcPr>
+                </a:tc>
+                <a:tc>
+                  <a:txBody>
+                    <a:bodyPr/>
+                    <a:lstStyle/>
+                    <a:p>
+                      <a:pPr indent="0" marL="0">
+                        <a:buNone/>
+                      </a:pPr>
+                      <a:r>
+                        <a:rPr lang="en-US" sz="1200" dirty="0">
+                          <a:solidFill>
+                            <a:schemeClr val="tx1"/>
+                          </a:solidFill>
+                        </a:rPr>
+                        <a:t>0.0401 (0.0002)</a:t>
+                      </a:r>
+                      <a:endParaRPr lang="en-US" sz="1200" dirty="0"/>
+                    </a:p>
+                  </a:txBody>
+                  <a:tcPr marL="91440" marR="91440" marT="45720" marB="45720">
+                    <a:lnL w="6350" cap="flat" cmpd="sng" algn="ctr">
+                      <a:solidFill>
+                        <a:srgbClr val="D5DBDF"/>
+                      </a:solidFill>
+                      <a:prstDash val="solid"/>
+                      <a:round/>
+                      <a:headEnd type="none" w="med" len="med"/>
+                      <a:tailEnd type="none" w="med" len="med"/>
+                    </a:lnL>
+                    <a:lnR w="6350" cap="flat" cmpd="sng" algn="ctr">
+                      <a:solidFill>
+                        <a:srgbClr val="D5DBDF"/>
+                      </a:solidFill>
+                      <a:prstDash val="solid"/>
+                      <a:round/>
+                      <a:headEnd type="none" w="med" len="med"/>
+                      <a:tailEnd type="none" w="med" len="med"/>
+                    </a:lnR>
+                    <a:lnT w="6350" cap="flat" cmpd="sng" algn="ctr">
+                      <a:solidFill>
+                        <a:srgbClr val="D5DBDF"/>
+                      </a:solidFill>
+                      <a:prstDash val="solid"/>
+                      <a:round/>
+                      <a:headEnd type="none" w="med" len="med"/>
+                      <a:tailEnd type="none" w="med" len="med"/>
+                    </a:lnT>
+                    <a:lnB w="6350" cap="flat" cmpd="sng" algn="ctr">
+                      <a:solidFill>
+                        <a:srgbClr val="D5DBDF"/>
+                      </a:solidFill>
+                      <a:prstDash val="solid"/>
+                      <a:round/>
+                      <a:headEnd type="none" w="med" len="med"/>
+                      <a:tailEnd type="none" w="med" len="med"/>
+                    </a:lnB>
+                  </a:tcPr>
+                </a:tc>
+              </a:tr>
+              <a:tr h="274320">
+                <a:tc>
+                  <a:txBody>
+                    <a:bodyPr/>
+                    <a:lstStyle/>
+                    <a:p>
+                      <a:pPr indent="0" marL="0">
+                        <a:buNone/>
+                      </a:pPr>
+                      <a:r>
+                        <a:rPr lang="en-US" sz="1200" dirty="0">
+                          <a:solidFill>
+                            <a:schemeClr val="tx1"/>
+                          </a:solidFill>
+                        </a:rPr>
+                        <a:t>64</a:t>
+                      </a:r>
+                      <a:endParaRPr lang="en-US" sz="1200" dirty="0"/>
+                    </a:p>
+                  </a:txBody>
+                  <a:tcPr marL="91440" marR="91440" marT="45720" marB="45720">
+                    <a:lnL w="6350" cap="flat" cmpd="sng" algn="ctr">
+                      <a:solidFill>
+                        <a:srgbClr val="D5DBDF"/>
+                      </a:solidFill>
+                      <a:prstDash val="solid"/>
+                      <a:round/>
+                      <a:headEnd type="none" w="med" len="med"/>
+                      <a:tailEnd type="none" w="med" len="med"/>
+                    </a:lnL>
+                    <a:lnR w="6350" cap="flat" cmpd="sng" algn="ctr">
+                      <a:solidFill>
+                        <a:srgbClr val="D5DBDF"/>
+                      </a:solidFill>
+                      <a:prstDash val="solid"/>
+                      <a:round/>
+                      <a:headEnd type="none" w="med" len="med"/>
+                      <a:tailEnd type="none" w="med" len="med"/>
+                    </a:lnR>
+                    <a:lnT w="6350" cap="flat" cmpd="sng" algn="ctr">
+                      <a:solidFill>
+                        <a:srgbClr val="D5DBDF"/>
+                      </a:solidFill>
+                      <a:prstDash val="solid"/>
+                      <a:round/>
+                      <a:headEnd type="none" w="med" len="med"/>
+                      <a:tailEnd type="none" w="med" len="med"/>
+                    </a:lnT>
+                    <a:lnB w="6350" cap="flat" cmpd="sng" algn="ctr">
+                      <a:solidFill>
+                        <a:srgbClr val="D5DBDF"/>
+                      </a:solidFill>
+                      <a:prstDash val="solid"/>
+                      <a:round/>
+                      <a:headEnd type="none" w="med" len="med"/>
+                      <a:tailEnd type="none" w="med" len="med"/>
+                    </a:lnB>
+                  </a:tcPr>
+                </a:tc>
+                <a:tc>
+                  <a:txBody>
+                    <a:bodyPr/>
+                    <a:lstStyle/>
+                    <a:p>
+                      <a:pPr indent="0" marL="0">
+                        <a:buNone/>
+                      </a:pPr>
+                      <a:r>
+                        <a:rPr lang="en-US" sz="1200" dirty="0">
+                          <a:solidFill>
+                            <a:schemeClr val="tx1"/>
+                          </a:solidFill>
+                        </a:rPr>
+                        <a:t>0.0050 (0.0028)</a:t>
+                      </a:r>
+                      <a:endParaRPr lang="en-US" sz="1200" dirty="0"/>
+                    </a:p>
+                  </a:txBody>
+                  <a:tcPr marL="91440" marR="91440" marT="45720" marB="45720">
+                    <a:lnL w="6350" cap="flat" cmpd="sng" algn="ctr">
+                      <a:solidFill>
+                        <a:srgbClr val="D5DBDF"/>
+                      </a:solidFill>
+                      <a:prstDash val="solid"/>
+                      <a:round/>
+                      <a:headEnd type="none" w="med" len="med"/>
+                      <a:tailEnd type="none" w="med" len="med"/>
+                    </a:lnL>
+                    <a:lnR w="6350" cap="flat" cmpd="sng" algn="ctr">
+                      <a:solidFill>
+                        <a:srgbClr val="D5DBDF"/>
+                      </a:solidFill>
+                      <a:prstDash val="solid"/>
+                      <a:round/>
+                      <a:headEnd type="none" w="med" len="med"/>
+                      <a:tailEnd type="none" w="med" len="med"/>
+                    </a:lnR>
+                    <a:lnT w="6350" cap="flat" cmpd="sng" algn="ctr">
+                      <a:solidFill>
+                        <a:srgbClr val="D5DBDF"/>
+                      </a:solidFill>
+                      <a:prstDash val="solid"/>
+                      <a:round/>
+                      <a:headEnd type="none" w="med" len="med"/>
+                      <a:tailEnd type="none" w="med" len="med"/>
+                    </a:lnT>
+                    <a:lnB w="6350" cap="flat" cmpd="sng" algn="ctr">
+                      <a:solidFill>
+                        <a:srgbClr val="D5DBDF"/>
+                      </a:solidFill>
+                      <a:prstDash val="solid"/>
+                      <a:round/>
+                      <a:headEnd type="none" w="med" len="med"/>
+                      <a:tailEnd type="none" w="med" len="med"/>
+                    </a:lnB>
+                  </a:tcPr>
+                </a:tc>
+                <a:tc>
+                  <a:txBody>
+                    <a:bodyPr/>
+                    <a:lstStyle/>
+                    <a:p>
+                      <a:pPr indent="0" marL="0">
+                        <a:buNone/>
+                      </a:pPr>
+                      <a:r>
+                        <a:rPr lang="en-US" sz="1200" dirty="0">
+                          <a:solidFill>
+                            <a:schemeClr val="tx1"/>
+                          </a:solidFill>
+                        </a:rPr>
+                        <a:t>1.008</a:t>
+                      </a:r>
+                      <a:endParaRPr lang="en-US" sz="1200" dirty="0"/>
+                    </a:p>
+                  </a:txBody>
+                  <a:tcPr marL="91440" marR="91440" marT="45720" marB="45720">
+                    <a:lnL w="6350" cap="flat" cmpd="sng" algn="ctr">
+                      <a:solidFill>
+                        <a:srgbClr val="D5DBDF"/>
+                      </a:solidFill>
+                      <a:prstDash val="solid"/>
+                      <a:round/>
+                      <a:headEnd type="none" w="med" len="med"/>
+                      <a:tailEnd type="none" w="med" len="med"/>
+                    </a:lnL>
+                    <a:lnR w="6350" cap="flat" cmpd="sng" algn="ctr">
+                      <a:solidFill>
+                        <a:srgbClr val="D5DBDF"/>
+                      </a:solidFill>
+                      <a:prstDash val="solid"/>
+                      <a:round/>
+                      <a:headEnd type="none" w="med" len="med"/>
+                      <a:tailEnd type="none" w="med" len="med"/>
+                    </a:lnR>
+                    <a:lnT w="6350" cap="flat" cmpd="sng" algn="ctr">
+                      <a:solidFill>
+                        <a:srgbClr val="D5DBDF"/>
+                      </a:solidFill>
+                      <a:prstDash val="solid"/>
+                      <a:round/>
+                      <a:headEnd type="none" w="med" len="med"/>
+                      <a:tailEnd type="none" w="med" len="med"/>
+                    </a:lnT>
+                    <a:lnB w="6350" cap="flat" cmpd="sng" algn="ctr">
+                      <a:solidFill>
+                        <a:srgbClr val="D5DBDF"/>
+                      </a:solidFill>
+                      <a:prstDash val="solid"/>
+                      <a:round/>
+                      <a:headEnd type="none" w="med" len="med"/>
+                      <a:tailEnd type="none" w="med" len="med"/>
+                    </a:lnB>
+                  </a:tcPr>
+                </a:tc>
+                <a:tc>
+                  <a:txBody>
+                    <a:bodyPr/>
+                    <a:lstStyle/>
+                    <a:p>
+                      <a:pPr indent="0" marL="0">
+                        <a:buNone/>
+                      </a:pPr>
+                      <a:r>
+                        <a:rPr lang="en-US" sz="1200" dirty="0">
+                          <a:solidFill>
+                            <a:schemeClr val="tx1"/>
+                          </a:solidFill>
+                        </a:rPr>
+                        <a:t>0.0405 (0.0003)</a:t>
+                      </a:r>
+                      <a:endParaRPr lang="en-US" sz="1200" dirty="0"/>
+                    </a:p>
+                  </a:txBody>
+                  <a:tcPr marL="91440" marR="91440" marT="45720" marB="45720">
+                    <a:lnL w="6350" cap="flat" cmpd="sng" algn="ctr">
+                      <a:solidFill>
+                        <a:srgbClr val="D5DBDF"/>
+                      </a:solidFill>
+                      <a:prstDash val="solid"/>
+                      <a:round/>
+                      <a:headEnd type="none" w="med" len="med"/>
+                      <a:tailEnd type="none" w="med" len="med"/>
+                    </a:lnL>
+                    <a:lnR w="6350" cap="flat" cmpd="sng" algn="ctr">
+                      <a:solidFill>
+                        <a:srgbClr val="D5DBDF"/>
+                      </a:solidFill>
+                      <a:prstDash val="solid"/>
+                      <a:round/>
+                      <a:headEnd type="none" w="med" len="med"/>
+                      <a:tailEnd type="none" w="med" len="med"/>
+                    </a:lnR>
+                    <a:lnT w="6350" cap="flat" cmpd="sng" algn="ctr">
+                      <a:solidFill>
+                        <a:srgbClr val="D5DBDF"/>
+                      </a:solidFill>
+                      <a:prstDash val="solid"/>
+                      <a:round/>
+                      <a:headEnd type="none" w="med" len="med"/>
+                      <a:tailEnd type="none" w="med" len="med"/>
+                    </a:lnT>
+                    <a:lnB w="6350" cap="flat" cmpd="sng" algn="ctr">
+                      <a:solidFill>
+                        <a:srgbClr val="D5DBDF"/>
+                      </a:solidFill>
+                      <a:prstDash val="solid"/>
+                      <a:round/>
+                      <a:headEnd type="none" w="med" len="med"/>
+                      <a:tailEnd type="none" w="med" len="med"/>
+                    </a:lnB>
+                  </a:tcPr>
+                </a:tc>
+              </a:tr>
+              <a:tr h="274320">
+                <a:tc>
+                  <a:txBody>
+                    <a:bodyPr/>
+                    <a:lstStyle/>
+                    <a:p>
+                      <a:pPr indent="0" marL="0">
+                        <a:buNone/>
+                      </a:pPr>
+                      <a:r>
+                        <a:rPr lang="en-US" sz="1200" dirty="0">
+                          <a:solidFill>
+                            <a:schemeClr val="tx1"/>
+                          </a:solidFill>
+                        </a:rPr>
+                        <a:t>128</a:t>
+                      </a:r>
+                      <a:endParaRPr lang="en-US" sz="1200" dirty="0"/>
+                    </a:p>
+                  </a:txBody>
+                  <a:tcPr marL="91440" marR="91440" marT="45720" marB="45720">
+                    <a:lnL w="6350" cap="flat" cmpd="sng" algn="ctr">
+                      <a:solidFill>
+                        <a:srgbClr val="D5DBDF"/>
+                      </a:solidFill>
+                      <a:prstDash val="solid"/>
+                      <a:round/>
+                      <a:headEnd type="none" w="med" len="med"/>
+                      <a:tailEnd type="none" w="med" len="med"/>
+                    </a:lnL>
+                    <a:lnR w="6350" cap="flat" cmpd="sng" algn="ctr">
+                      <a:solidFill>
+                        <a:srgbClr val="D5DBDF"/>
+                      </a:solidFill>
+                      <a:prstDash val="solid"/>
+                      <a:round/>
+                      <a:headEnd type="none" w="med" len="med"/>
+                      <a:tailEnd type="none" w="med" len="med"/>
+                    </a:lnR>
+                    <a:lnT w="6350" cap="flat" cmpd="sng" algn="ctr">
+                      <a:solidFill>
+                        <a:srgbClr val="D5DBDF"/>
+                      </a:solidFill>
+                      <a:prstDash val="solid"/>
+                      <a:round/>
+                      <a:headEnd type="none" w="med" len="med"/>
+                      <a:tailEnd type="none" w="med" len="med"/>
+                    </a:lnT>
+                    <a:lnB w="6350" cap="flat" cmpd="sng" algn="ctr">
+                      <a:solidFill>
+                        <a:srgbClr val="D5DBDF"/>
+                      </a:solidFill>
+                      <a:prstDash val="solid"/>
+                      <a:round/>
+                      <a:headEnd type="none" w="med" len="med"/>
+                      <a:tailEnd type="none" w="med" len="med"/>
+                    </a:lnB>
+                  </a:tcPr>
+                </a:tc>
+                <a:tc>
+                  <a:txBody>
+                    <a:bodyPr/>
+                    <a:lstStyle/>
+                    <a:p>
+                      <a:pPr indent="0" marL="0">
+                        <a:buNone/>
+                      </a:pPr>
+                      <a:r>
+                        <a:rPr lang="en-US" sz="1200" dirty="0">
+                          <a:solidFill>
+                            <a:schemeClr val="tx1"/>
+                          </a:solidFill>
+                        </a:rPr>
+                        <a:t>-0.0012 (0.0030)</a:t>
+                      </a:r>
+                      <a:endParaRPr lang="en-US" sz="1200" dirty="0"/>
+                    </a:p>
+                  </a:txBody>
+                  <a:tcPr marL="91440" marR="91440" marT="45720" marB="45720">
+                    <a:lnL w="6350" cap="flat" cmpd="sng" algn="ctr">
+                      <a:solidFill>
+                        <a:srgbClr val="D5DBDF"/>
+                      </a:solidFill>
+                      <a:prstDash val="solid"/>
+                      <a:round/>
+                      <a:headEnd type="none" w="med" len="med"/>
+                      <a:tailEnd type="none" w="med" len="med"/>
+                    </a:lnL>
+                    <a:lnR w="6350" cap="flat" cmpd="sng" algn="ctr">
+                      <a:solidFill>
+                        <a:srgbClr val="D5DBDF"/>
+                      </a:solidFill>
+                      <a:prstDash val="solid"/>
+                      <a:round/>
+                      <a:headEnd type="none" w="med" len="med"/>
+                      <a:tailEnd type="none" w="med" len="med"/>
+                    </a:lnR>
+                    <a:lnT w="6350" cap="flat" cmpd="sng" algn="ctr">
+                      <a:solidFill>
+                        <a:srgbClr val="D5DBDF"/>
+                      </a:solidFill>
+                      <a:prstDash val="solid"/>
+                      <a:round/>
+                      <a:headEnd type="none" w="med" len="med"/>
+                      <a:tailEnd type="none" w="med" len="med"/>
+                    </a:lnT>
+                    <a:lnB w="6350" cap="flat" cmpd="sng" algn="ctr">
+                      <a:solidFill>
+                        <a:srgbClr val="D5DBDF"/>
+                      </a:solidFill>
+                      <a:prstDash val="solid"/>
+                      <a:round/>
+                      <a:headEnd type="none" w="med" len="med"/>
+                      <a:tailEnd type="none" w="med" len="med"/>
+                    </a:lnB>
+                  </a:tcPr>
+                </a:tc>
+                <a:tc>
+                  <a:txBody>
+                    <a:bodyPr/>
+                    <a:lstStyle/>
+                    <a:p>
+                      <a:pPr indent="0" marL="0">
+                        <a:buNone/>
+                      </a:pPr>
+                      <a:r>
+                        <a:rPr lang="en-US" sz="1200" dirty="0">
+                          <a:solidFill>
+                            <a:schemeClr val="tx1"/>
+                          </a:solidFill>
+                        </a:rPr>
+                        <a:t>1.008</a:t>
+                      </a:r>
+                      <a:endParaRPr lang="en-US" sz="1200" dirty="0"/>
+                    </a:p>
+                  </a:txBody>
+                  <a:tcPr marL="91440" marR="91440" marT="45720" marB="45720">
+                    <a:lnL w="6350" cap="flat" cmpd="sng" algn="ctr">
+                      <a:solidFill>
+                        <a:srgbClr val="D5DBDF"/>
+                      </a:solidFill>
+                      <a:prstDash val="solid"/>
+                      <a:round/>
+                      <a:headEnd type="none" w="med" len="med"/>
+                      <a:tailEnd type="none" w="med" len="med"/>
+                    </a:lnL>
+                    <a:lnR w="6350" cap="flat" cmpd="sng" algn="ctr">
+                      <a:solidFill>
+                        <a:srgbClr val="D5DBDF"/>
+                      </a:solidFill>
+                      <a:prstDash val="solid"/>
+                      <a:round/>
+                      <a:headEnd type="none" w="med" len="med"/>
+                      <a:tailEnd type="none" w="med" len="med"/>
+                    </a:lnR>
+                    <a:lnT w="6350" cap="flat" cmpd="sng" algn="ctr">
+                      <a:solidFill>
+                        <a:srgbClr val="D5DBDF"/>
+                      </a:solidFill>
+                      <a:prstDash val="solid"/>
+                      <a:round/>
+                      <a:headEnd type="none" w="med" len="med"/>
+                      <a:tailEnd type="none" w="med" len="med"/>
+                    </a:lnT>
+                    <a:lnB w="6350" cap="flat" cmpd="sng" algn="ctr">
+                      <a:solidFill>
+                        <a:srgbClr val="D5DBDF"/>
+                      </a:solidFill>
+                      <a:prstDash val="solid"/>
+                      <a:round/>
+                      <a:headEnd type="none" w="med" len="med"/>
+                      <a:tailEnd type="none" w="med" len="med"/>
+                    </a:lnB>
+                  </a:tcPr>
+                </a:tc>
+                <a:tc>
+                  <a:txBody>
+                    <a:bodyPr/>
+                    <a:lstStyle/>
+                    <a:p>
+                      <a:pPr indent="0" marL="0">
+                        <a:buNone/>
+                      </a:pPr>
+                      <a:r>
+                        <a:rPr lang="en-US" sz="1200" dirty="0">
+                          <a:solidFill>
+                            <a:schemeClr val="tx1"/>
+                          </a:solidFill>
+                        </a:rPr>
+                        <a:t>0.0405 (0.0003)</a:t>
+                      </a:r>
+                      <a:endParaRPr lang="en-US" sz="1200" dirty="0"/>
+                    </a:p>
+                  </a:txBody>
+                  <a:tcPr marL="91440" marR="91440" marT="45720" marB="45720">
+                    <a:lnL w="6350" cap="flat" cmpd="sng" algn="ctr">
+                      <a:solidFill>
+                        <a:srgbClr val="D5DBDF"/>
+                      </a:solidFill>
+                      <a:prstDash val="solid"/>
+                      <a:round/>
+                      <a:headEnd type="none" w="med" len="med"/>
+                      <a:tailEnd type="none" w="med" len="med"/>
+                    </a:lnL>
+                    <a:lnR w="6350" cap="flat" cmpd="sng" algn="ctr">
+                      <a:solidFill>
+                        <a:srgbClr val="D5DBDF"/>
+                      </a:solidFill>
+                      <a:prstDash val="solid"/>
+                      <a:round/>
+                      <a:headEnd type="none" w="med" len="med"/>
+                      <a:tailEnd type="none" w="med" len="med"/>
+                    </a:lnR>
+                    <a:lnT w="6350" cap="flat" cmpd="sng" algn="ctr">
+                      <a:solidFill>
+                        <a:srgbClr val="D5DBDF"/>
+                      </a:solidFill>
+                      <a:prstDash val="solid"/>
+                      <a:round/>
+                      <a:headEnd type="none" w="med" len="med"/>
+                      <a:tailEnd type="none" w="med" len="med"/>
+                    </a:lnT>
+                    <a:lnB w="6350" cap="flat" cmpd="sng" algn="ctr">
+                      <a:solidFill>
+                        <a:srgbClr val="D5DBDF"/>
+                      </a:solidFill>
+                      <a:prstDash val="solid"/>
+                      <a:round/>
+                      <a:headEnd type="none" w="med" len="med"/>
+                      <a:tailEnd type="none" w="med" len="med"/>
+                    </a:lnB>
+                  </a:tcPr>
+                </a:tc>
+              </a:tr>
+            </a:tbl>
+          </a:graphicData>
+        </a:graphic>
+      </p:graphicFrame>
+      <p:sp>
+        <p:nvSpPr>
+          <p:cNvPr id="4" name="q1c note"/>
+          <p:cNvSpPr txBox="1"/>
+          <p:nvPr/>
+        </p:nvSpPr>
+        <p:spPr>
+          <a:xfrm>
+            <a:off x="457200" y="2286000"/>
+            <a:ext cx="4480560" cy="457200"/>
+          </a:xfrm>
+          <a:prstGeom prst="rect">
+            <a:avLst/>
+          </a:prstGeom>
+          <a:noFill/>
+          <a:ln/>
+        </p:spPr>
+        <p:txBody>
+          <a:bodyPr wrap="square" rtlCol="0" anchor="t"/>
+          <a:lstStyle/>
+          <a:p>
+            <a:pPr indent="0" marL="0">
+              <a:spcAft>
+                <a:spcPts val="700"/>
+              </a:spcAft>
+              <a:buNone/>
+            </a:pPr>
+            <a:r>
+              <a:rPr lang="en-US" sz="1200" dirty="0">
+                <a:solidFill>
+                  <a:schemeClr val="accent5"/>
+                </a:solidFill>
+              </a:rPr>
+              <a:t>Targets: 0, 1, ξ = 0.04. 100,000 paths, n = 128. All within about 2 SE.</a:t>
+            </a:r>
+            <a:endParaRPr lang="en-US" sz="1200" dirty="0"/>
+          </a:p>
+        </p:txBody>
+      </p:sp>
+      <p:pic>
+        <p:nvPicPr>
+          <p:cNvPr id="5" name="variance paths figure" descr="/home/claude/rbergomi-vr/slides/variance_paths.png">    </p:cNvPr>
+          <p:cNvPicPr>
+            <a:picLocks noChangeAspect="1"/>
+          </p:cNvPicPr>
+          <p:nvPr/>
+        </p:nvPicPr>
+        <p:blipFill>
+          <a:blip r:embed="rId1"/>
+          <a:stretch>
+            <a:fillRect/>
+          </a:stretch>
+        </p:blipFill>
+        <p:spPr>
+          <a:xfrm>
+            <a:off x="5120640" y="1051560"/>
+            <a:ext cx="3429000" cy="1234440"/>
+          </a:xfrm>
+          <a:prstGeom prst="rect">
+            <a:avLst/>
+          </a:prstGeom>
+        </p:spPr>
+      </p:pic>
+      <p:sp>
+        <p:nvSpPr>
+          <p:cNvPr id="6" name="fig caption"/>
+          <p:cNvSpPr txBox="1"/>
+          <p:nvPr/>
+        </p:nvSpPr>
+        <p:spPr>
+          <a:xfrm>
+            <a:off x="5120640" y="2286000"/>
+            <a:ext cx="3566160" cy="228600"/>
+          </a:xfrm>
+          <a:prstGeom prst="rect">
+            <a:avLst/>
+          </a:prstGeom>
+          <a:noFill/>
+          <a:ln/>
+        </p:spPr>
+        <p:txBody>
+          <a:bodyPr wrap="square" rtlCol="0" anchor="t"/>
+          <a:lstStyle/>
+          <a:p>
+            <a:pPr indent="0" marL="0">
+              <a:spcAft>
+                <a:spcPts val="700"/>
+              </a:spcAft>
+              <a:buNone/>
+            </a:pPr>
+            <a:r>
+              <a:rPr lang="en-US" sz="1000" dirty="0">
+                <a:solidFill>
+                  <a:schemeClr val="accent5"/>
+                </a:solidFill>
+              </a:rPr>
+              <a:t>Same inputs: H = 0.1 paths are much rougher than H = 0.4</a:t>
+            </a:r>
+            <a:endParaRPr lang="en-US" sz="1000" dirty="0"/>
           </a:p>
         </p:txBody>
       </p:sp>
       <p:sp>
         <p:nvSpPr>
-          <p:cNvPr id="3" name="method card 1"/>
+          <p:cNvPr id="7" name="roughness why"/>
+          <p:cNvSpPr txBox="1"/>
+          <p:nvPr/>
+        </p:nvSpPr>
+        <p:spPr>
+          <a:xfrm>
+            <a:off x="5120640" y="2542032"/>
+            <a:ext cx="3566160" cy="548640"/>
+          </a:xfrm>
+          <a:prstGeom prst="rect">
+            <a:avLst/>
+          </a:prstGeom>
+          <a:noFill/>
+          <a:ln/>
+        </p:spPr>
+        <p:txBody>
+          <a:bodyPr wrap="square" rtlCol="0" anchor="t"/>
+          <a:lstStyle/>
+          <a:p>
+            <a:pPr indent="0" marL="0">
+              <a:spcAft>
+                <a:spcPts val="700"/>
+              </a:spcAft>
+              <a:buNone/>
+            </a:pPr>
+            <a:r>
+              <a:rPr lang="en-US" sz="1050" dirty="0">
+                <a:solidFill>
+                  <a:schemeClr val="tx1"/>
+                </a:solidFill>
+              </a:rPr>
+              <a:t>Why: in Y</a:t>
+            </a:r>
+            <a:pPr indent="0" marL="0">
+              <a:spcAft>
+                <a:spcPts val="700"/>
+              </a:spcAft>
+              <a:buNone/>
+            </a:pPr>
+            <a:r>
+              <a:rPr lang="en-US" sz="1050" baseline="-40000" dirty="0">
+                <a:solidFill>
+                  <a:schemeClr val="tx1"/>
+                </a:solidFill>
+              </a:rPr>
+              <a:t>t</a:t>
+            </a:r>
+            <a:pPr indent="0" marL="0">
+              <a:spcAft>
+                <a:spcPts val="700"/>
+              </a:spcAft>
+              <a:buNone/>
+            </a:pPr>
+            <a:r>
+              <a:rPr lang="en-US" sz="1050" dirty="0">
+                <a:solidFill>
+                  <a:schemeClr val="tx1"/>
+                </a:solidFill>
+              </a:rPr>
+              <a:t> = √(2H) ∫ (t − s)</a:t>
+            </a:r>
+            <a:pPr indent="0" marL="0">
+              <a:spcAft>
+                <a:spcPts val="700"/>
+              </a:spcAft>
+              <a:buNone/>
+            </a:pPr>
+            <a:r>
+              <a:rPr lang="en-US" sz="1050" baseline="30000" dirty="0">
+                <a:solidFill>
+                  <a:schemeClr val="tx1"/>
+                </a:solidFill>
+              </a:rPr>
+              <a:t>H−1/2</a:t>
+            </a:r>
+            <a:pPr indent="0" marL="0">
+              <a:spcAft>
+                <a:spcPts val="700"/>
+              </a:spcAft>
+              <a:buNone/>
+            </a:pPr>
+            <a:r>
+              <a:rPr lang="en-US" sz="1050" dirty="0">
+                <a:solidFill>
+                  <a:schemeClr val="tx1"/>
+                </a:solidFill>
+              </a:rPr>
+              <a:t> dW</a:t>
+            </a:r>
+            <a:pPr indent="0" marL="0">
+              <a:spcAft>
+                <a:spcPts val="700"/>
+              </a:spcAft>
+              <a:buNone/>
+            </a:pPr>
+            <a:r>
+              <a:rPr lang="en-US" sz="1050" baseline="-40000" dirty="0">
+                <a:solidFill>
+                  <a:schemeClr val="tx1"/>
+                </a:solidFill>
+              </a:rPr>
+              <a:t>s</a:t>
+            </a:r>
+            <a:pPr indent="0" marL="0">
+              <a:spcAft>
+                <a:spcPts val="700"/>
+              </a:spcAft>
+              <a:buNone/>
+            </a:pPr>
+            <a:r>
+              <a:rPr lang="en-US" sz="1050" dirty="0">
+                <a:solidFill>
+                  <a:schemeClr val="tx1"/>
+                </a:solidFill>
+              </a:rPr>
+              <a:t> the weight on recent shocks (s near t) blows up when H &lt; 1/2, so Y moves about Δ</a:t>
+            </a:r>
+            <a:pPr indent="0" marL="0">
+              <a:spcAft>
+                <a:spcPts val="700"/>
+              </a:spcAft>
+              <a:buNone/>
+            </a:pPr>
+            <a:r>
+              <a:rPr lang="en-US" sz="1050" baseline="30000" dirty="0">
+                <a:solidFill>
+                  <a:schemeClr val="tx1"/>
+                </a:solidFill>
+              </a:rPr>
+              <a:t>H</a:t>
+            </a:r>
+            <a:pPr indent="0" marL="0">
+              <a:spcAft>
+                <a:spcPts val="700"/>
+              </a:spcAft>
+              <a:buNone/>
+            </a:pPr>
+            <a:r>
+              <a:rPr lang="en-US" sz="1050" dirty="0">
+                <a:solidFill>
+                  <a:schemeClr val="tx1"/>
+                </a:solidFill>
+              </a:rPr>
+              <a:t> per step, far more than √Δ</a:t>
+            </a:r>
+            <a:endParaRPr lang="en-US" sz="1050" dirty="0"/>
+          </a:p>
+        </p:txBody>
+      </p:sp>
+      <p:sp>
+        <p:nvSpPr>
+          <p:cNvPr id="8" name="q1d card"/>
           <p:cNvSpPr/>
           <p:nvPr/>
         </p:nvSpPr>
         <p:spPr>
           <a:xfrm>
-            <a:off x="457200" y="1097280"/>
-            <a:ext cx="4023360" cy="1325880"/>
+            <a:off x="457200" y="3246120"/>
+            <a:ext cx="8229600" cy="1417320"/>
           </a:xfrm>
           <a:prstGeom prst="roundRect">
             <a:avLst>
-              <a:gd name="adj" fmla="val 5517"/>
+              <a:gd name="adj" fmla="val 5161"/>
             </a:avLst>
           </a:prstGeom>
           <a:solidFill>
@@ -2920,14 +5052,14 @@
       </p:sp>
       <p:sp>
         <p:nvSpPr>
-          <p:cNvPr id="4" name="method text 1"/>
+          <p:cNvPr id="9" name="q1d text"/>
           <p:cNvSpPr txBox="1"/>
           <p:nvPr/>
         </p:nvSpPr>
         <p:spPr>
           <a:xfrm>
-            <a:off x="640080" y="1188720"/>
-            <a:ext cx="3657600" cy="1143000"/>
+            <a:off x="640080" y="3310128"/>
+            <a:ext cx="7863840" cy="1325880"/>
           </a:xfrm>
           <a:prstGeom prst="rect">
             <a:avLst/>
@@ -2946,16 +5078,13 @@
               <a:buNone/>
             </a:pPr>
             <a:r>
-              <a:rPr lang="en-US" sz="1600" b="1" dirty="0">
-                <a:solidFill>
-                  <a:schemeClr val="accent1"/>
-                </a:solidFill>
-              </a:rPr>
-              <a:t>Plain MC</a:t>
-            </a:r>
-            <a:endParaRPr lang="en-US" sz="1600" dirty="0"/>
-          </a:p>
-          <a:p>
+              <a:rPr lang="en-US" sz="1200" b="1" dirty="0">
+                <a:solidFill>
+                  <a:srgbClr val="D9622B"/>
+                </a:solidFill>
+              </a:rPr>
+              <a:t>(d) η = 0:  </a:t>
+            </a:r>
             <a:pPr indent="0" marL="0">
               <a:spcAft>
                 <a:spcPts val="400"/>
@@ -2963,65 +5092,13 @@
               <a:buNone/>
             </a:pPr>
             <a:r>
-              <a:rPr lang="en-US" sz="1300" dirty="0">
-                <a:solidFill>
-                  <a:schemeClr val="tx1"/>
-                </a:solidFill>
-              </a:rPr>
-              <a:t>Average the put payoffs over independent paths.</a:t>
-            </a:r>
-            <a:endParaRPr lang="en-US" sz="1600" dirty="0"/>
-          </a:p>
-        </p:txBody>
-      </p:sp>
-      <p:sp>
-        <p:nvSpPr>
-          <p:cNvPr id="5" name="method card 2"/>
-          <p:cNvSpPr/>
-          <p:nvPr/>
-        </p:nvSpPr>
-        <p:spPr>
-          <a:xfrm>
-            <a:off x="4663440" y="1097280"/>
-            <a:ext cx="4023360" cy="1325880"/>
-          </a:xfrm>
-          <a:prstGeom prst="roundRect">
-            <a:avLst>
-              <a:gd name="adj" fmla="val 5517"/>
-            </a:avLst>
-          </a:prstGeom>
-          <a:solidFill>
-            <a:schemeClr val="bg2"/>
-          </a:solidFill>
-          <a:ln w="12700">
-            <a:solidFill>
-              <a:schemeClr val="bg2"/>
-            </a:solidFill>
-            <a:prstDash val="solid"/>
-          </a:ln>
-        </p:spPr>
-      </p:sp>
-      <p:sp>
-        <p:nvSpPr>
-          <p:cNvPr id="6" name="method text 2"/>
-          <p:cNvSpPr txBox="1"/>
-          <p:nvPr/>
-        </p:nvSpPr>
-        <p:spPr>
-          <a:xfrm>
-            <a:off x="4846320" y="1188720"/>
-            <a:ext cx="3657600" cy="1143000"/>
-          </a:xfrm>
-          <a:prstGeom prst="rect">
-            <a:avLst/>
-          </a:prstGeom>
-          <a:noFill/>
-          <a:ln/>
-        </p:spPr>
-        <p:txBody>
-          <a:bodyPr wrap="square" rtlCol="0" anchor="t"/>
-          <a:lstStyle/>
-          <a:p>
+              <a:rPr lang="en-US" sz="1200" dirty="0">
+                <a:solidFill>
+                  <a:schemeClr val="tx1"/>
+                </a:solidFill>
+              </a:rPr>
+              <a:t>variance is constant ξ, so log S</a:t>
+            </a:r>
             <a:pPr indent="0" marL="0">
               <a:spcAft>
                 <a:spcPts val="400"/>
@@ -3029,16 +5106,13 @@
               <a:buNone/>
             </a:pPr>
             <a:r>
-              <a:rPr lang="en-US" sz="1600" b="1" dirty="0">
-                <a:solidFill>
-                  <a:schemeClr val="accent1"/>
-                </a:solidFill>
-              </a:rPr>
-              <a:t>Control variate (CV)</a:t>
-            </a:r>
-            <a:endParaRPr lang="en-US" sz="1600" dirty="0"/>
-          </a:p>
-          <a:p>
+              <a:rPr lang="en-US" sz="1200" baseline="-40000" dirty="0">
+                <a:solidFill>
+                  <a:schemeClr val="tx1"/>
+                </a:solidFill>
+              </a:rPr>
+              <a:t>n</a:t>
+            </a:r>
             <a:pPr indent="0" marL="0">
               <a:spcAft>
                 <a:spcPts val="400"/>
@@ -3046,64 +5120,15 @@
               <a:buNone/>
             </a:pPr>
             <a:r>
-              <a:rPr lang="en-US" sz="1300" dirty="0">
-                <a:solidFill>
-                  <a:schemeClr val="tx1"/>
-                </a:solidFill>
-              </a:rPr>
-              <a:t>Black–Scholes stock built from the same increments; its known price corrects the payoff. Coefficient fitted on a separate pilot run.</a:t>
-            </a:r>
-            <a:endParaRPr lang="en-US" sz="1600" dirty="0"/>
-          </a:p>
-        </p:txBody>
-      </p:sp>
-      <p:sp>
-        <p:nvSpPr>
-          <p:cNvPr id="7" name="method card 3"/>
-          <p:cNvSpPr/>
-          <p:nvPr/>
-        </p:nvSpPr>
-        <p:spPr>
-          <a:xfrm>
-            <a:off x="457200" y="2606040"/>
-            <a:ext cx="4023360" cy="1325880"/>
-          </a:xfrm>
-          <a:prstGeom prst="roundRect">
-            <a:avLst>
-              <a:gd name="adj" fmla="val 5517"/>
-            </a:avLst>
-          </a:prstGeom>
-          <a:solidFill>
-            <a:schemeClr val="bg2"/>
-          </a:solidFill>
-          <a:ln w="12700">
-            <a:solidFill>
-              <a:schemeClr val="bg2"/>
-            </a:solidFill>
-            <a:prstDash val="solid"/>
-          </a:ln>
-        </p:spPr>
-      </p:sp>
-      <p:sp>
-        <p:nvSpPr>
-          <p:cNvPr id="8" name="method text 3"/>
-          <p:cNvSpPr txBox="1"/>
-          <p:nvPr/>
-        </p:nvSpPr>
-        <p:spPr>
-          <a:xfrm>
-            <a:off x="640080" y="2697480"/>
-            <a:ext cx="3657600" cy="1143000"/>
-          </a:xfrm>
-          <a:prstGeom prst="rect">
-            <a:avLst/>
-          </a:prstGeom>
-          <a:noFill/>
-          <a:ln/>
-        </p:spPr>
-        <p:txBody>
-          <a:bodyPr wrap="square" rtlCol="0" anchor="t"/>
-          <a:lstStyle/>
+              <a:rPr lang="en-US" sz="1200" dirty="0">
+                <a:solidFill>
+                  <a:schemeClr val="tx1"/>
+                </a:solidFill>
+              </a:rPr>
+              <a:t> is exactly normal, i.e. Black–Scholes, for any n</a:t>
+            </a:r>
+            <a:endParaRPr lang="en-US" sz="1200" dirty="0"/>
+          </a:p>
           <a:p>
             <a:pPr indent="0" marL="0">
               <a:spcAft>
@@ -3112,16 +5137,13 @@
               <a:buNone/>
             </a:pPr>
             <a:r>
-              <a:rPr lang="en-US" sz="1600" b="1" dirty="0">
-                <a:solidFill>
-                  <a:schemeClr val="accent1"/>
-                </a:solidFill>
-              </a:rPr>
-              <a:t>Antithetic (AV)</a:t>
-            </a:r>
-            <a:endParaRPr lang="en-US" sz="1600" dirty="0"/>
-          </a:p>
-          <a:p>
+              <a:rPr lang="en-US" sz="1200" b="1" dirty="0">
+                <a:solidFill>
+                  <a:srgbClr val="D9622B"/>
+                </a:solidFill>
+              </a:rPr>
+              <a:t>Check:  </a:t>
+            </a:r>
             <a:pPr indent="0" marL="0">
               <a:spcAft>
                 <a:spcPts val="400"/>
@@ -3129,64 +5151,15 @@
               <a:buNone/>
             </a:pPr>
             <a:r>
-              <a:rPr lang="en-US" sz="1300" dirty="0">
-                <a:solidFill>
-                  <a:schemeClr val="tx1"/>
-                </a:solidFill>
-              </a:rPr>
-              <a:t>Each set of Gaussian inputs is used twice, as Z and −Z; the pair average is one observation.</a:t>
-            </a:r>
-            <a:endParaRPr lang="en-US" sz="1600" dirty="0"/>
-          </a:p>
-        </p:txBody>
-      </p:sp>
-      <p:sp>
-        <p:nvSpPr>
-          <p:cNvPr id="9" name="method card 4"/>
-          <p:cNvSpPr/>
-          <p:nvPr/>
-        </p:nvSpPr>
-        <p:spPr>
-          <a:xfrm>
-            <a:off x="4663440" y="2606040"/>
-            <a:ext cx="4023360" cy="1325880"/>
-          </a:xfrm>
-          <a:prstGeom prst="roundRect">
-            <a:avLst>
-              <a:gd name="adj" fmla="val 5517"/>
-            </a:avLst>
-          </a:prstGeom>
-          <a:solidFill>
-            <a:schemeClr val="bg2"/>
-          </a:solidFill>
-          <a:ln w="12700">
-            <a:solidFill>
-              <a:schemeClr val="bg2"/>
-            </a:solidFill>
-            <a:prstDash val="solid"/>
-          </a:ln>
-        </p:spPr>
-      </p:sp>
-      <p:sp>
-        <p:nvSpPr>
-          <p:cNvPr id="10" name="method text 4"/>
-          <p:cNvSpPr txBox="1"/>
-          <p:nvPr/>
-        </p:nvSpPr>
-        <p:spPr>
-          <a:xfrm>
-            <a:off x="4846320" y="2697480"/>
-            <a:ext cx="3657600" cy="1143000"/>
-          </a:xfrm>
-          <a:prstGeom prst="rect">
-            <a:avLst/>
-          </a:prstGeom>
-          <a:noFill/>
-          <a:ln/>
-        </p:spPr>
-        <p:txBody>
-          <a:bodyPr wrap="square" rtlCol="0" anchor="t"/>
-          <a:lstStyle/>
+              <a:rPr lang="en-US" sz="1200" dirty="0">
+                <a:solidFill>
+                  <a:schemeClr val="tx1"/>
+                </a:solidFill>
+              </a:rPr>
+              <a:t>simulated put prices at n = 1, 8, 128 match (6) within about 2 SE</a:t>
+            </a:r>
+            <a:endParaRPr lang="en-US" sz="1200" dirty="0"/>
+          </a:p>
           <a:p>
             <a:pPr indent="0" marL="0">
               <a:spcAft>
@@ -3195,16 +5168,13 @@
               <a:buNone/>
             </a:pPr>
             <a:r>
-              <a:rPr lang="en-US" sz="1600" b="1" dirty="0">
-                <a:solidFill>
-                  <a:schemeClr val="accent1"/>
-                </a:solidFill>
-              </a:rPr>
-              <a:t>Combined (AV+CV)</a:t>
-            </a:r>
-            <a:endParaRPr lang="en-US" sz="1600" dirty="0"/>
-          </a:p>
-          <a:p>
+              <a:rPr lang="en-US" sz="1200" b="1" dirty="0">
+                <a:solidFill>
+                  <a:srgbClr val="D9622B"/>
+                </a:solidFill>
+              </a:rPr>
+              <a:t>Would catch:  </a:t>
+            </a:r>
             <a:pPr indent="0" marL="0">
               <a:spcAft>
                 <a:spcPts val="400"/>
@@ -3212,48 +5182,183 @@
               <a:buNone/>
             </a:pPr>
             <a:r>
-              <a:rPr lang="en-US" sz="1300" dirty="0">
-                <a:solidFill>
-                  <a:schemeClr val="tx1"/>
-                </a:solidFill>
-              </a:rPr>
-              <a:t>Antithetic pairs, with the control applied to the pair average. Coefficient from a pilot of pairs.</a:t>
-            </a:r>
-            <a:endParaRPr lang="en-US" sz="1600" dirty="0"/>
-          </a:p>
-        </p:txBody>
-      </p:sp>
-      <p:sp>
-        <p:nvSpPr>
-          <p:cNvPr id="11" name="budget note"/>
-          <p:cNvSpPr txBox="1"/>
-          <p:nvPr/>
-        </p:nvSpPr>
-        <p:spPr>
-          <a:xfrm>
-            <a:off x="457200" y="4160520"/>
-            <a:ext cx="8229600" cy="411480"/>
-          </a:xfrm>
-          <a:prstGeom prst="rect">
-            <a:avLst/>
-          </a:prstGeom>
-          <a:noFill/>
-          <a:ln/>
-        </p:spPr>
-        <p:txBody>
-          <a:bodyPr wrap="square" rtlCol="0" anchor="ctr"/>
-          <a:lstStyle/>
-          <a:p>
-            <a:pPr indent="0" marL="0">
-              <a:buNone/>
-            </a:pPr>
-            <a:r>
               <a:rPr lang="en-US" sz="1200" dirty="0">
                 <a:solidFill>
-                  <a:schemeClr val="accent5"/>
-                </a:solidFill>
-              </a:rPr>
-              <a:t>Each method: 100,000 production path evaluations; pilots of 10,000. VRF = SE² ratio vs plain; Gain also divides by run time (incl. pilot).</a:t>
+                  <a:schemeClr val="tx1"/>
+                </a:solidFill>
+              </a:rPr>
+              <a:t>same normals for ΔW and ΔB. Correct step variance ρ</a:t>
+            </a:r>
+            <a:pPr indent="0" marL="0">
+              <a:spcAft>
+                <a:spcPts val="400"/>
+              </a:spcAft>
+              <a:buNone/>
+            </a:pPr>
+            <a:r>
+              <a:rPr lang="en-US" sz="1200" baseline="30000" dirty="0">
+                <a:solidFill>
+                  <a:schemeClr val="tx1"/>
+                </a:solidFill>
+              </a:rPr>
+              <a:t>2</a:t>
+            </a:r>
+            <a:pPr indent="0" marL="0">
+              <a:spcAft>
+                <a:spcPts val="400"/>
+              </a:spcAft>
+              <a:buNone/>
+            </a:pPr>
+            <a:r>
+              <a:rPr lang="en-US" sz="1200" dirty="0">
+                <a:solidFill>
+                  <a:schemeClr val="tx1"/>
+                </a:solidFill>
+              </a:rPr>
+              <a:t>Δ + (1−ρ</a:t>
+            </a:r>
+            <a:pPr indent="0" marL="0">
+              <a:spcAft>
+                <a:spcPts val="400"/>
+              </a:spcAft>
+              <a:buNone/>
+            </a:pPr>
+            <a:r>
+              <a:rPr lang="en-US" sz="1200" baseline="30000" dirty="0">
+                <a:solidFill>
+                  <a:schemeClr val="tx1"/>
+                </a:solidFill>
+              </a:rPr>
+              <a:t>2</a:t>
+            </a:r>
+            <a:pPr indent="0" marL="0">
+              <a:spcAft>
+                <a:spcPts val="400"/>
+              </a:spcAft>
+              <a:buNone/>
+            </a:pPr>
+            <a:r>
+              <a:rPr lang="en-US" sz="1200" dirty="0">
+                <a:solidFill>
+                  <a:schemeClr val="tx1"/>
+                </a:solidFill>
+              </a:rPr>
+              <a:t>)Δ = Δ; with the bug (ρ + √(1−ρ</a:t>
+            </a:r>
+            <a:pPr indent="0" marL="0">
+              <a:spcAft>
+                <a:spcPts val="400"/>
+              </a:spcAft>
+              <a:buNone/>
+            </a:pPr>
+            <a:r>
+              <a:rPr lang="en-US" sz="1200" baseline="30000" dirty="0">
+                <a:solidFill>
+                  <a:schemeClr val="tx1"/>
+                </a:solidFill>
+              </a:rPr>
+              <a:t>2</a:t>
+            </a:r>
+            <a:pPr indent="0" marL="0">
+              <a:spcAft>
+                <a:spcPts val="400"/>
+              </a:spcAft>
+              <a:buNone/>
+            </a:pPr>
+            <a:r>
+              <a:rPr lang="en-US" sz="1200" dirty="0">
+                <a:solidFill>
+                  <a:schemeClr val="tx1"/>
+                </a:solidFill>
+              </a:rPr>
+              <a:t>))</a:t>
+            </a:r>
+            <a:pPr indent="0" marL="0">
+              <a:spcAft>
+                <a:spcPts val="400"/>
+              </a:spcAft>
+              <a:buNone/>
+            </a:pPr>
+            <a:r>
+              <a:rPr lang="en-US" sz="1200" baseline="30000" dirty="0">
+                <a:solidFill>
+                  <a:schemeClr val="tx1"/>
+                </a:solidFill>
+              </a:rPr>
+              <a:t>2</a:t>
+            </a:r>
+            <a:pPr indent="0" marL="0">
+              <a:spcAft>
+                <a:spcPts val="400"/>
+              </a:spcAft>
+              <a:buNone/>
+            </a:pPr>
+            <a:r>
+              <a:rPr lang="en-US" sz="1200" dirty="0">
+                <a:solidFill>
+                  <a:schemeClr val="tx1"/>
+                </a:solidFill>
+              </a:rPr>
+              <a:t>Δ ≈ 0.0002Δ, so the stock barely moves and the K = 100 put is ≈ 1.0 instead of 5.64</a:t>
+            </a:r>
+            <a:endParaRPr lang="en-US" sz="1200" dirty="0"/>
+          </a:p>
+          <a:p>
+            <a:pPr indent="0" marL="0">
+              <a:spcAft>
+                <a:spcPts val="400"/>
+              </a:spcAft>
+              <a:buNone/>
+            </a:pPr>
+            <a:r>
+              <a:rPr lang="en-US" sz="1200" b="1" dirty="0">
+                <a:solidFill>
+                  <a:srgbClr val="D9622B"/>
+                </a:solidFill>
+              </a:rPr>
+              <a:t>Would miss:  </a:t>
+            </a:r>
+            <a:pPr indent="0" marL="0">
+              <a:spcAft>
+                <a:spcPts val="400"/>
+              </a:spcAft>
+              <a:buNone/>
+            </a:pPr>
+            <a:r>
+              <a:rPr lang="en-US" sz="1200" dirty="0">
+                <a:solidFill>
+                  <a:schemeClr val="tx1"/>
+                </a:solidFill>
+              </a:rPr>
+              <a:t>look-ahead (using V</a:t>
+            </a:r>
+            <a:pPr indent="0" marL="0">
+              <a:spcAft>
+                <a:spcPts val="400"/>
+              </a:spcAft>
+              <a:buNone/>
+            </a:pPr>
+            <a:r>
+              <a:rPr lang="en-US" sz="1200" baseline="-40000" dirty="0">
+                <a:solidFill>
+                  <a:schemeClr val="tx1"/>
+                </a:solidFill>
+              </a:rPr>
+              <a:t>j+1</a:t>
+            </a:r>
+            <a:pPr indent="0" marL="0">
+              <a:spcAft>
+                <a:spcPts val="400"/>
+              </a:spcAft>
+              <a:buNone/>
+            </a:pPr>
+            <a:r>
+              <a:rPr lang="en-US" sz="1200" dirty="0">
+                <a:solidFill>
+                  <a:schemeClr val="tx1"/>
+                </a:solidFill>
+              </a:rPr>
+              <a:t> in the stock step), since V is constant at η = 0</a:t>
             </a:r>
             <a:endParaRPr lang="en-US" sz="1200" dirty="0"/>
           </a:p>
@@ -3361,42 +5466,489 @@
                   <a:schemeClr val="tx2"/>
                 </a:solidFill>
               </a:rPr>
-              <a:t>Baseline results, K = 100</a:t>
+              <a:t>Q2: Black–Scholes control variate</a:t>
             </a:r>
             <a:endParaRPr lang="en-US" sz="2600" dirty="0"/>
           </a:p>
         </p:txBody>
       </p:sp>
-      <p:graphicFrame>
-        <p:nvGraphicFramePr>
-          <p:cNvPr id="3" name="results chart" descr=""/>
-          <p:cNvGraphicFramePr/>
-          <p:nvPr/>
-        </p:nvGraphicFramePr>
-        <p:xfrm>
-          <a:off x="457200" y="1097280"/>
-          <a:ext cx="4389120" cy="3474720"/>
-        </p:xfrm>
-        <a:graphic xmlns:a="http://schemas.openxmlformats.org/drawingml/2006/main">
-          <a:graphicData uri="http://schemas.openxmlformats.org/drawingml/2006/chart">
-            <c:chart xmlns:c="http://schemas.openxmlformats.org/drawingml/2006/chart" r:id="rId1"/>
-          </a:graphicData>
-        </a:graphic>
-      </p:graphicFrame>
       <p:sp>
         <p:nvSpPr>
-          <p:cNvPr id="4" name="takeaway card"/>
+          <p:cNvPr id="3" name="q2 bullets"/>
+          <p:cNvSpPr txBox="1"/>
+          <p:nvPr/>
+        </p:nvSpPr>
+        <p:spPr>
+          <a:xfrm>
+            <a:off x="457200" y="1097280"/>
+            <a:ext cx="5120640" cy="3474720"/>
+          </a:xfrm>
+          <a:prstGeom prst="rect">
+            <a:avLst/>
+          </a:prstGeom>
+          <a:noFill/>
+          <a:ln/>
+        </p:spPr>
+        <p:txBody>
+          <a:bodyPr wrap="square" rtlCol="0" anchor="t"/>
+          <a:lstStyle/>
+          <a:p>
+            <a:pPr indent="0" marL="0">
+              <a:spcAft>
+                <a:spcPts val="700"/>
+              </a:spcAft>
+              <a:buNone/>
+            </a:pPr>
+            <a:r>
+              <a:rPr lang="en-US" sz="1300" b="1" dirty="0">
+                <a:solidFill>
+                  <a:srgbClr val="D9622B"/>
+                </a:solidFill>
+              </a:rPr>
+              <a:t>(a)  </a:t>
+            </a:r>
+            <a:pPr indent="0" marL="0">
+              <a:spcAft>
+                <a:spcPts val="700"/>
+              </a:spcAft>
+              <a:buNone/>
+            </a:pPr>
+            <a:r>
+              <a:rPr lang="en-US" sz="1300" dirty="0">
+                <a:solidFill>
+                  <a:schemeClr val="tx1"/>
+                </a:solidFill>
+              </a:rPr>
+              <a:t>Control: a Black–Scholes stock with constant variance ξ, built from the same ΔW, ΔB. Its put price c</a:t>
+            </a:r>
+            <a:pPr indent="0" marL="0">
+              <a:spcAft>
+                <a:spcPts val="700"/>
+              </a:spcAft>
+              <a:buNone/>
+            </a:pPr>
+            <a:r>
+              <a:rPr lang="en-US" sz="1300" baseline="-40000" dirty="0">
+                <a:solidFill>
+                  <a:schemeClr val="tx1"/>
+                </a:solidFill>
+              </a:rPr>
+              <a:t>K</a:t>
+            </a:r>
+            <a:pPr indent="0" marL="0">
+              <a:spcAft>
+                <a:spcPts val="700"/>
+              </a:spcAft>
+              <a:buNone/>
+            </a:pPr>
+            <a:r>
+              <a:rPr lang="en-US" sz="1300" dirty="0">
+                <a:solidFill>
+                  <a:schemeClr val="tx1"/>
+                </a:solidFill>
+              </a:rPr>
+              <a:t> = BS</a:t>
+            </a:r>
+            <a:pPr indent="0" marL="0">
+              <a:spcAft>
+                <a:spcPts val="700"/>
+              </a:spcAft>
+              <a:buNone/>
+            </a:pPr>
+            <a:r>
+              <a:rPr lang="en-US" sz="1300" baseline="-40000" dirty="0">
+                <a:solidFill>
+                  <a:schemeClr val="tx1"/>
+                </a:solidFill>
+              </a:rPr>
+              <a:t>put</a:t>
+            </a:r>
+            <a:pPr indent="0" marL="0">
+              <a:spcAft>
+                <a:spcPts val="700"/>
+              </a:spcAft>
+              <a:buNone/>
+            </a:pPr>
+            <a:r>
+              <a:rPr lang="en-US" sz="1300" dirty="0">
+                <a:solidFill>
+                  <a:schemeClr val="tx1"/>
+                </a:solidFill>
+              </a:rPr>
+              <a:t>(S</a:t>
+            </a:r>
+            <a:pPr indent="0" marL="0">
+              <a:spcAft>
+                <a:spcPts val="700"/>
+              </a:spcAft>
+              <a:buNone/>
+            </a:pPr>
+            <a:r>
+              <a:rPr lang="en-US" sz="1300" baseline="-40000" dirty="0">
+                <a:solidFill>
+                  <a:schemeClr val="tx1"/>
+                </a:solidFill>
+              </a:rPr>
+              <a:t>0</a:t>
+            </a:r>
+            <a:pPr indent="0" marL="0">
+              <a:spcAft>
+                <a:spcPts val="700"/>
+              </a:spcAft>
+              <a:buNone/>
+            </a:pPr>
+            <a:r>
+              <a:rPr lang="en-US" sz="1300" dirty="0">
+                <a:solidFill>
+                  <a:schemeClr val="tx1"/>
+                </a:solidFill>
+              </a:rPr>
+              <a:t>, K, ξT) is known</a:t>
+            </a:r>
+            <a:endParaRPr lang="en-US" sz="1300" dirty="0"/>
+          </a:p>
+          <a:p>
+            <a:pPr indent="0" marL="0">
+              <a:spcAft>
+                <a:spcPts val="700"/>
+              </a:spcAft>
+              <a:buNone/>
+            </a:pPr>
+            <a:r>
+              <a:rPr lang="en-US" sz="1300" b="1" dirty="0">
+                <a:solidFill>
+                  <a:srgbClr val="D9622B"/>
+                </a:solidFill>
+              </a:rPr>
+              <a:t>(a)  </a:t>
+            </a:r>
+            <a:pPr indent="0" marL="0">
+              <a:spcAft>
+                <a:spcPts val="700"/>
+              </a:spcAft>
+              <a:buNone/>
+            </a:pPr>
+            <a:r>
+              <a:rPr lang="en-US" sz="1300" dirty="0">
+                <a:solidFill>
+                  <a:schemeClr val="tx1"/>
+                </a:solidFill>
+              </a:rPr>
+              <a:t>Adjusted payoff R = X − β(C − c</a:t>
+            </a:r>
+            <a:pPr indent="0" marL="0">
+              <a:spcAft>
+                <a:spcPts val="700"/>
+              </a:spcAft>
+              <a:buNone/>
+            </a:pPr>
+            <a:r>
+              <a:rPr lang="en-US" sz="1300" baseline="-40000" dirty="0">
+                <a:solidFill>
+                  <a:schemeClr val="tx1"/>
+                </a:solidFill>
+              </a:rPr>
+              <a:t>K</a:t>
+            </a:r>
+            <a:pPr indent="0" marL="0">
+              <a:spcAft>
+                <a:spcPts val="700"/>
+              </a:spcAft>
+              <a:buNone/>
+            </a:pPr>
+            <a:r>
+              <a:rPr lang="en-US" sz="1300" dirty="0">
+                <a:solidFill>
+                  <a:schemeClr val="tx1"/>
+                </a:solidFill>
+              </a:rPr>
+              <a:t>) is unbiased for any fixed β</a:t>
+            </a:r>
+            <a:endParaRPr lang="en-US" sz="1300" dirty="0"/>
+          </a:p>
+          <a:p>
+            <a:pPr indent="0" marL="0">
+              <a:spcAft>
+                <a:spcPts val="700"/>
+              </a:spcAft>
+              <a:buNone/>
+            </a:pPr>
+            <a:r>
+              <a:rPr lang="en-US" sz="1300" b="1" dirty="0">
+                <a:solidFill>
+                  <a:srgbClr val="D9622B"/>
+                </a:solidFill>
+              </a:rPr>
+              <a:t>(a)  </a:t>
+            </a:r>
+            <a:pPr indent="0" marL="0">
+              <a:spcAft>
+                <a:spcPts val="700"/>
+              </a:spcAft>
+              <a:buNone/>
+            </a:pPr>
+            <a:r>
+              <a:rPr lang="en-US" sz="1300" dirty="0">
+                <a:solidFill>
+                  <a:schemeClr val="tx1"/>
+                </a:solidFill>
+              </a:rPr>
+              <a:t>Best β* = Cov(X, C) / Var(C)</a:t>
+            </a:r>
+            <a:endParaRPr lang="en-US" sz="1300" dirty="0"/>
+          </a:p>
+          <a:p>
+            <a:pPr indent="0" marL="0">
+              <a:spcAft>
+                <a:spcPts val="700"/>
+              </a:spcAft>
+              <a:buNone/>
+            </a:pPr>
+            <a:r>
+              <a:rPr lang="en-US" sz="1300" b="1" dirty="0">
+                <a:solidFill>
+                  <a:srgbClr val="D9622B"/>
+                </a:solidFill>
+              </a:rPr>
+              <a:t>(a)  </a:t>
+            </a:r>
+            <a:pPr indent="0" marL="0">
+              <a:spcAft>
+                <a:spcPts val="700"/>
+              </a:spcAft>
+              <a:buNone/>
+            </a:pPr>
+            <a:r>
+              <a:rPr lang="en-US" sz="1300" dirty="0">
+                <a:solidFill>
+                  <a:schemeClr val="tx1"/>
+                </a:solidFill>
+              </a:rPr>
+              <a:t>Minimum variance: Var(R*) = Var(X) · (1 − Corr(X, C)</a:t>
+            </a:r>
+            <a:pPr indent="0" marL="0">
+              <a:spcAft>
+                <a:spcPts val="700"/>
+              </a:spcAft>
+              <a:buNone/>
+            </a:pPr>
+            <a:r>
+              <a:rPr lang="en-US" sz="1300" baseline="30000" dirty="0">
+                <a:solidFill>
+                  <a:schemeClr val="tx1"/>
+                </a:solidFill>
+              </a:rPr>
+              <a:t>2</a:t>
+            </a:r>
+            <a:pPr indent="0" marL="0">
+              <a:spcAft>
+                <a:spcPts val="700"/>
+              </a:spcAft>
+              <a:buNone/>
+            </a:pPr>
+            <a:r>
+              <a:rPr lang="en-US" sz="1300" dirty="0">
+                <a:solidFill>
+                  <a:schemeClr val="tx1"/>
+                </a:solidFill>
+              </a:rPr>
+              <a:t>)</a:t>
+            </a:r>
+            <a:endParaRPr lang="en-US" sz="1300" dirty="0"/>
+          </a:p>
+          <a:p>
+            <a:pPr indent="0" marL="0">
+              <a:spcAft>
+                <a:spcPts val="700"/>
+              </a:spcAft>
+              <a:buNone/>
+            </a:pPr>
+            <a:r>
+              <a:rPr lang="en-US" sz="1300" b="1" dirty="0">
+                <a:solidFill>
+                  <a:srgbClr val="D9622B"/>
+                </a:solidFill>
+              </a:rPr>
+              <a:t>(a)  </a:t>
+            </a:r>
+            <a:pPr indent="0" marL="0">
+              <a:spcAft>
+                <a:spcPts val="700"/>
+              </a:spcAft>
+              <a:buNone/>
+            </a:pPr>
+            <a:r>
+              <a:rPr lang="en-US" sz="1300" dirty="0">
+                <a:solidFill>
+                  <a:schemeClr val="tx1"/>
+                </a:solidFill>
+              </a:rPr>
+              <a:t>An independent control stock has zero correlation, so it cannot help</a:t>
+            </a:r>
+            <a:endParaRPr lang="en-US" sz="1300" dirty="0"/>
+          </a:p>
+          <a:p>
+            <a:pPr indent="0" marL="0">
+              <a:spcAft>
+                <a:spcPts val="700"/>
+              </a:spcAft>
+              <a:buNone/>
+            </a:pPr>
+            <a:r>
+              <a:rPr lang="en-US" sz="1300" b="1" dirty="0">
+                <a:solidFill>
+                  <a:srgbClr val="D9622B"/>
+                </a:solidFill>
+              </a:rPr>
+              <a:t>(b)  </a:t>
+            </a:r>
+            <a:pPr indent="0" marL="0">
+              <a:spcAft>
+                <a:spcPts val="700"/>
+              </a:spcAft>
+              <a:buNone/>
+            </a:pPr>
+            <a:r>
+              <a:rPr lang="en-US" sz="1300" dirty="0">
+                <a:solidFill>
+                  <a:schemeClr val="tx1"/>
+                </a:solidFill>
+              </a:rPr>
+              <a:t>β estimated per strike on a separate pilot (10,000 paths), then frozen: stays unbiased. If the pilot Var(C) = 0, β = 0 (falls back to plain MC)</a:t>
+            </a:r>
+            <a:endParaRPr lang="en-US" sz="1300" dirty="0"/>
+          </a:p>
+          <a:p>
+            <a:pPr indent="0" marL="0">
+              <a:spcAft>
+                <a:spcPts val="700"/>
+              </a:spcAft>
+              <a:buNone/>
+            </a:pPr>
+            <a:r>
+              <a:rPr lang="en-US" sz="1300" b="1" dirty="0">
+                <a:solidFill>
+                  <a:srgbClr val="D9622B"/>
+                </a:solidFill>
+              </a:rPr>
+              <a:t>(b)  </a:t>
+            </a:r>
+            <a:pPr indent="0" marL="0">
+              <a:spcAft>
+                <a:spcPts val="700"/>
+              </a:spcAft>
+              <a:buNone/>
+            </a:pPr>
+            <a:r>
+              <a:rPr lang="en-US" sz="1300" dirty="0">
+                <a:solidFill>
+                  <a:schemeClr val="tx1"/>
+                </a:solidFill>
+              </a:rPr>
+              <a:t>Fitting β on the production paths needs care: β then depends on the same C</a:t>
+            </a:r>
+            <a:pPr indent="0" marL="0">
+              <a:spcAft>
+                <a:spcPts val="700"/>
+              </a:spcAft>
+              <a:buNone/>
+            </a:pPr>
+            <a:r>
+              <a:rPr lang="en-US" sz="1300" baseline="-40000" dirty="0">
+                <a:solidFill>
+                  <a:schemeClr val="tx1"/>
+                </a:solidFill>
+              </a:rPr>
+              <a:t>i</a:t>
+            </a:r>
+            <a:pPr indent="0" marL="0">
+              <a:spcAft>
+                <a:spcPts val="700"/>
+              </a:spcAft>
+              <a:buNone/>
+            </a:pPr>
+            <a:r>
+              <a:rPr lang="en-US" sz="1300" dirty="0">
+                <a:solidFill>
+                  <a:schemeClr val="tx1"/>
+                </a:solidFill>
+              </a:rPr>
+              <a:t> it multiplies, so E[β(C̄ − c</a:t>
+            </a:r>
+            <a:pPr indent="0" marL="0">
+              <a:spcAft>
+                <a:spcPts val="700"/>
+              </a:spcAft>
+              <a:buNone/>
+            </a:pPr>
+            <a:r>
+              <a:rPr lang="en-US" sz="1300" baseline="-40000" dirty="0">
+                <a:solidFill>
+                  <a:schemeClr val="tx1"/>
+                </a:solidFill>
+              </a:rPr>
+              <a:t>K</a:t>
+            </a:r>
+            <a:pPr indent="0" marL="0">
+              <a:spcAft>
+                <a:spcPts val="700"/>
+              </a:spcAft>
+              <a:buNone/>
+            </a:pPr>
+            <a:r>
+              <a:rPr lang="en-US" sz="1300" dirty="0">
+                <a:solidFill>
+                  <a:schemeClr val="tx1"/>
+                </a:solidFill>
+              </a:rPr>
+              <a:t>)] ≠ 0 (small bias), and the R</a:t>
+            </a:r>
+            <a:pPr indent="0" marL="0">
+              <a:spcAft>
+                <a:spcPts val="700"/>
+              </a:spcAft>
+              <a:buNone/>
+            </a:pPr>
+            <a:r>
+              <a:rPr lang="en-US" sz="1300" baseline="-40000" dirty="0">
+                <a:solidFill>
+                  <a:schemeClr val="tx1"/>
+                </a:solidFill>
+              </a:rPr>
+              <a:t>i</a:t>
+            </a:r>
+            <a:pPr indent="0" marL="0">
+              <a:spcAft>
+                <a:spcPts val="700"/>
+              </a:spcAft>
+              <a:buNone/>
+            </a:pPr>
+            <a:r>
+              <a:rPr lang="en-US" sz="1300" dirty="0">
+                <a:solidFill>
+                  <a:schemeClr val="tx1"/>
+                </a:solidFill>
+              </a:rPr>
+              <a:t> are no longer independent</a:t>
+            </a:r>
+            <a:endParaRPr lang="en-US" sz="1300" dirty="0"/>
+          </a:p>
+        </p:txBody>
+      </p:sp>
+      <p:sp>
+        <p:nvSpPr>
+          <p:cNvPr id="4" name="q2 card"/>
           <p:cNvSpPr/>
           <p:nvPr/>
         </p:nvSpPr>
         <p:spPr>
           <a:xfrm>
-            <a:off x="5029200" y="1097280"/>
-            <a:ext cx="3657600" cy="3474720"/>
+            <a:off x="5852160" y="1097280"/>
+            <a:ext cx="2834640" cy="3474720"/>
           </a:xfrm>
           <a:prstGeom prst="roundRect">
             <a:avLst>
-              <a:gd name="adj" fmla="val 2105"/>
+              <a:gd name="adj" fmla="val 2581"/>
             </a:avLst>
           </a:prstGeom>
           <a:solidFill>
@@ -3412,14 +5964,14 @@
       </p:sp>
       <p:sp>
         <p:nvSpPr>
-          <p:cNvPr id="5" name="takeaway text"/>
+          <p:cNvPr id="5" name="q2 card text"/>
           <p:cNvSpPr txBox="1"/>
           <p:nvPr/>
         </p:nvSpPr>
         <p:spPr>
           <a:xfrm>
-            <a:off x="5212080" y="1188720"/>
-            <a:ext cx="3291840" cy="3291840"/>
+            <a:off x="5989320" y="1234440"/>
+            <a:ext cx="2560320" cy="3200400"/>
           </a:xfrm>
           <a:prstGeom prst="rect">
             <a:avLst/>
@@ -3433,27 +5985,26 @@
           <a:p>
             <a:pPr indent="0" marL="0">
               <a:spcAft>
-                <a:spcPts val="600"/>
-              </a:spcAft>
-              <a:buNone/>
-            </a:pPr>
-            <a:r>
-              <a:rPr lang="en-US" sz="1500" b="1" dirty="0">
+                <a:spcPts val="800"/>
+              </a:spcAft>
+              <a:buNone/>
+            </a:pPr>
+            <a:r>
+              <a:rPr lang="en-US" sz="1400" b="1" dirty="0">
                 <a:solidFill>
                   <a:schemeClr val="tx2"/>
                 </a:solidFill>
               </a:rPr>
-              <a:t>Observations</a:t>
-            </a:r>
-            <a:endParaRPr lang="en-US" sz="1300" dirty="0"/>
-          </a:p>
-          <a:p>
-            <a:pPr marL="342900" indent="-342900">
-              <a:spcAft>
-                <a:spcPts val="600"/>
-              </a:spcAft>
-              <a:buSzPct val="100000"/>
-              <a:buChar char="•"/>
+              <a:t>Check (c): η = 0, β = 1</a:t>
+            </a:r>
+            <a:endParaRPr lang="en-US" sz="1400" dirty="0"/>
+          </a:p>
+          <a:p>
+            <a:pPr indent="0" marL="0">
+              <a:spcAft>
+                <a:spcPts val="800"/>
+              </a:spcAft>
+              <a:buNone/>
             </a:pPr>
             <a:r>
               <a:rPr lang="en-US" sz="1300" dirty="0">
@@ -3461,17 +6012,27 @@
                   <a:schemeClr val="tx1"/>
                 </a:solidFill>
               </a:rPr>
-              <a:t>CV: VRF 3.2. Payoff and control move together (corr 0.83); VRF ≈ 1/(1−corr²)</a:t>
-            </a:r>
-            <a:endParaRPr lang="en-US" sz="1300" dirty="0"/>
-          </a:p>
-          <a:p>
-            <a:pPr marL="342900" indent="-342900">
-              <a:spcAft>
-                <a:spcPts val="600"/>
-              </a:spcAft>
-              <a:buSzPct val="100000"/>
-              <a:buChar char="•"/>
+              <a:t>max |R − c</a:t>
+            </a:r>
+            <a:pPr indent="0" marL="0">
+              <a:spcAft>
+                <a:spcPts val="800"/>
+              </a:spcAft>
+              <a:buNone/>
+            </a:pPr>
+            <a:r>
+              <a:rPr lang="en-US" sz="1300" baseline="-40000" dirty="0">
+                <a:solidFill>
+                  <a:schemeClr val="tx1"/>
+                </a:solidFill>
+              </a:rPr>
+              <a:t>K</a:t>
+            </a:r>
+            <a:pPr indent="0" marL="0">
+              <a:spcAft>
+                <a:spcPts val="800"/>
+              </a:spcAft>
+              <a:buNone/>
             </a:pPr>
             <a:r>
               <a:rPr lang="en-US" sz="1300" dirty="0">
@@ -3479,45 +6040,71 @@
                   <a:schemeClr val="tx1"/>
                 </a:solidFill>
               </a:rPr>
-              <a:t>AV: VRF 1.4. Pair outcomes only mildly offset (corr -0.28); VRF ≈ 1/(1+corr)</a:t>
-            </a:r>
-            <a:endParaRPr lang="en-US" sz="1300" dirty="0"/>
-          </a:p>
-          <a:p>
-            <a:pPr marL="342900" indent="-342900">
-              <a:spcAft>
-                <a:spcPts val="600"/>
-              </a:spcAft>
-              <a:buSzPct val="100000"/>
-              <a:buChar char="•"/>
-            </a:pPr>
-            <a:r>
-              <a:rPr lang="en-US" sz="1300" dirty="0">
-                <a:solidFill>
-                  <a:schemeClr val="tx1"/>
-                </a:solidFill>
-              </a:rPr>
-              <a:t>Gain ranks AV+CV first (2.8): a pair needs half the random numbers, so it runs faster</a:t>
-            </a:r>
-            <a:endParaRPr lang="en-US" sz="1300" dirty="0"/>
-          </a:p>
-          <a:p>
-            <a:pPr marL="342900" indent="-342900">
-              <a:spcAft>
-                <a:spcPts val="600"/>
-              </a:spcAft>
-              <a:buSzPct val="100000"/>
-              <a:buChar char="•"/>
-            </a:pPr>
-            <a:r>
-              <a:rPr lang="en-US" sz="1300" dirty="0">
-                <a:solidFill>
-                  <a:schemeClr val="tx1"/>
-                </a:solidFill>
-              </a:rPr>
-              <a:t>All four 95% confidence intervals overlap</a:t>
-            </a:r>
-            <a:endParaRPr lang="en-US" sz="1300" dirty="0"/>
+              <a:t>|</a:t>
+            </a:r>
+            <a:endParaRPr lang="en-US" sz="1400" dirty="0"/>
+          </a:p>
+          <a:p>
+            <a:pPr indent="0" marL="0">
+              <a:spcAft>
+                <a:spcPts val="800"/>
+              </a:spcAft>
+              <a:buNone/>
+            </a:pPr>
+            <a:r>
+              <a:rPr lang="en-US" sz="3200" b="1" dirty="0">
+                <a:solidFill>
+                  <a:schemeClr val="accent1"/>
+                </a:solidFill>
+              </a:rPr>
+              <a:t>1e-13</a:t>
+            </a:r>
+            <a:endParaRPr lang="en-US" sz="1400" dirty="0"/>
+          </a:p>
+          <a:p>
+            <a:pPr indent="0" marL="0">
+              <a:spcAft>
+                <a:spcPts val="800"/>
+              </a:spcAft>
+              <a:buNone/>
+            </a:pPr>
+            <a:r>
+              <a:rPr lang="en-US" sz="1200" dirty="0">
+                <a:solidFill>
+                  <a:schemeClr val="tx1"/>
+                </a:solidFill>
+              </a:rPr>
+              <a:t>At η = 0 the model stock and the control are the same path, so R equals c</a:t>
+            </a:r>
+            <a:pPr indent="0" marL="0">
+              <a:spcAft>
+                <a:spcPts val="800"/>
+              </a:spcAft>
+              <a:buNone/>
+            </a:pPr>
+            <a:r>
+              <a:rPr lang="en-US" sz="1200" baseline="-40000" dirty="0">
+                <a:solidFill>
+                  <a:schemeClr val="tx1"/>
+                </a:solidFill>
+              </a:rPr>
+              <a:t>K</a:t>
+            </a:r>
+            <a:pPr indent="0" marL="0">
+              <a:spcAft>
+                <a:spcPts val="800"/>
+              </a:spcAft>
+              <a:buNone/>
+            </a:pPr>
+            <a:r>
+              <a:rPr lang="en-US" sz="1200" dirty="0">
+                <a:solidFill>
+                  <a:schemeClr val="tx1"/>
+                </a:solidFill>
+              </a:rPr>
+              <a:t> on every path (up to roundoff).</a:t>
+            </a:r>
+            <a:endParaRPr lang="en-US" sz="1400" dirty="0"/>
           </a:p>
         </p:txBody>
       </p:sp>
@@ -3623,42 +6210,256 @@
                   <a:schemeClr val="tx2"/>
                 </a:solidFill>
               </a:rPr>
-              <a:t>Parameter sensitivity, K = 100</a:t>
+              <a:t>Q3: antithetic sampling</a:t>
             </a:r>
             <a:endParaRPr lang="en-US" sz="2600" dirty="0"/>
           </a:p>
         </p:txBody>
       </p:sp>
-      <p:graphicFrame>
-        <p:nvGraphicFramePr>
-          <p:cNvPr id="3" name="sensitivity chart" descr=""/>
-          <p:cNvGraphicFramePr/>
-          <p:nvPr/>
-        </p:nvGraphicFramePr>
-        <p:xfrm>
-          <a:off x="457200" y="1097280"/>
-          <a:ext cx="4389120" cy="3474720"/>
-        </p:xfrm>
-        <a:graphic xmlns:a="http://schemas.openxmlformats.org/drawingml/2006/main">
-          <a:graphicData uri="http://schemas.openxmlformats.org/drawingml/2006/chart">
-            <c:chart xmlns:c="http://schemas.openxmlformats.org/drawingml/2006/chart" r:id="rId1"/>
-          </a:graphicData>
-        </a:graphic>
-      </p:graphicFrame>
       <p:sp>
         <p:nvSpPr>
-          <p:cNvPr id="4" name="why card"/>
+          <p:cNvPr id="3" name="q3 bullets"/>
+          <p:cNvSpPr txBox="1"/>
+          <p:nvPr/>
+        </p:nvSpPr>
+        <p:spPr>
+          <a:xfrm>
+            <a:off x="457200" y="1097280"/>
+            <a:ext cx="5120640" cy="3474720"/>
+          </a:xfrm>
+          <a:prstGeom prst="rect">
+            <a:avLst/>
+          </a:prstGeom>
+          <a:noFill/>
+          <a:ln/>
+        </p:spPr>
+        <p:txBody>
+          <a:bodyPr wrap="square" rtlCol="0" anchor="t"/>
+          <a:lstStyle/>
+          <a:p>
+            <a:pPr indent="0" marL="0">
+              <a:spcAft>
+                <a:spcPts val="700"/>
+              </a:spcAft>
+              <a:buNone/>
+            </a:pPr>
+            <a:r>
+              <a:rPr lang="en-US" sz="1300" b="1" dirty="0">
+                <a:solidFill>
+                  <a:srgbClr val="D9622B"/>
+                </a:solidFill>
+              </a:rPr>
+              <a:t>(a)  </a:t>
+            </a:r>
+            <a:pPr indent="0" marL="0">
+              <a:spcAft>
+                <a:spcPts val="700"/>
+              </a:spcAft>
+              <a:buNone/>
+            </a:pPr>
+            <a:r>
+              <a:rPr lang="en-US" sz="1300" dirty="0">
+                <a:solidFill>
+                  <a:schemeClr val="tx1"/>
+                </a:solidFill>
+              </a:rPr>
+              <a:t>Pair: inputs Z = (G, U, D) and −Z. Both paths have the correct law; the variance paths are ξ exp(±η Y</a:t>
+            </a:r>
+            <a:pPr indent="0" marL="0">
+              <a:spcAft>
+                <a:spcPts val="700"/>
+              </a:spcAft>
+              <a:buNone/>
+            </a:pPr>
+            <a:r>
+              <a:rPr lang="en-US" sz="1300" baseline="-40000" dirty="0">
+                <a:solidFill>
+                  <a:schemeClr val="tx1"/>
+                </a:solidFill>
+              </a:rPr>
+              <a:t>j</a:t>
+            </a:r>
+            <a:pPr indent="0" marL="0">
+              <a:spcAft>
+                <a:spcPts val="700"/>
+              </a:spcAft>
+              <a:buNone/>
+            </a:pPr>
+            <a:r>
+              <a:rPr lang="en-US" sz="1300" dirty="0">
+                <a:solidFill>
+                  <a:schemeClr val="tx1"/>
+                </a:solidFill>
+              </a:rPr>
+              <a:t> − η</a:t>
+            </a:r>
+            <a:pPr indent="0" marL="0">
+              <a:spcAft>
+                <a:spcPts val="700"/>
+              </a:spcAft>
+              <a:buNone/>
+            </a:pPr>
+            <a:r>
+              <a:rPr lang="en-US" sz="1300" baseline="30000" dirty="0">
+                <a:solidFill>
+                  <a:schemeClr val="tx1"/>
+                </a:solidFill>
+              </a:rPr>
+              <a:t>2</a:t>
+            </a:r>
+            <a:pPr indent="0" marL="0">
+              <a:spcAft>
+                <a:spcPts val="700"/>
+              </a:spcAft>
+              <a:buNone/>
+            </a:pPr>
+            <a:r>
+              <a:rPr lang="en-US" sz="1300" dirty="0">
+                <a:solidFill>
+                  <a:schemeClr val="tx1"/>
+                </a:solidFill>
+              </a:rPr>
+              <a:t> q</a:t>
+            </a:r>
+            <a:pPr indent="0" marL="0">
+              <a:spcAft>
+                <a:spcPts val="700"/>
+              </a:spcAft>
+              <a:buNone/>
+            </a:pPr>
+            <a:r>
+              <a:rPr lang="en-US" sz="1300" baseline="-40000" dirty="0">
+                <a:solidFill>
+                  <a:schemeClr val="tx1"/>
+                </a:solidFill>
+              </a:rPr>
+              <a:t>j</a:t>
+            </a:r>
+            <a:pPr indent="0" marL="0">
+              <a:spcAft>
+                <a:spcPts val="700"/>
+              </a:spcAft>
+              <a:buNone/>
+            </a:pPr>
+            <a:r>
+              <a:rPr lang="en-US" sz="1300" dirty="0">
+                <a:solidFill>
+                  <a:schemeClr val="tx1"/>
+                </a:solidFill>
+              </a:rPr>
+              <a:t> / 2)</a:t>
+            </a:r>
+            <a:endParaRPr lang="en-US" sz="1300" dirty="0"/>
+          </a:p>
+          <a:p>
+            <a:pPr indent="0" marL="0">
+              <a:spcAft>
+                <a:spcPts val="700"/>
+              </a:spcAft>
+              <a:buNone/>
+            </a:pPr>
+            <a:r>
+              <a:rPr lang="en-US" sz="1300" b="1" dirty="0">
+                <a:solidFill>
+                  <a:srgbClr val="D9622B"/>
+                </a:solidFill>
+              </a:rPr>
+              <a:t>(a)  </a:t>
+            </a:r>
+            <a:pPr indent="0" marL="0">
+              <a:spcAft>
+                <a:spcPts val="700"/>
+              </a:spcAft>
+              <a:buNone/>
+            </a:pPr>
+            <a:r>
+              <a:rPr lang="en-US" sz="1300" dirty="0">
+                <a:solidFill>
+                  <a:schemeClr val="tx1"/>
+                </a:solidFill>
+              </a:rPr>
+              <a:t>Flipping only the stock returns but keeping the same variance path is wrong: it reverses the price–volatility correlation (ρ = −0.7 becomes +0.7), so the path no longer follows the model</a:t>
+            </a:r>
+            <a:endParaRPr lang="en-US" sz="1300" dirty="0"/>
+          </a:p>
+          <a:p>
+            <a:pPr indent="0" marL="0">
+              <a:spcAft>
+                <a:spcPts val="700"/>
+              </a:spcAft>
+              <a:buNone/>
+            </a:pPr>
+            <a:r>
+              <a:rPr lang="en-US" sz="1300" b="1" dirty="0">
+                <a:solidFill>
+                  <a:srgbClr val="D9622B"/>
+                </a:solidFill>
+              </a:rPr>
+              <a:t>(b)  </a:t>
+            </a:r>
+            <a:pPr indent="0" marL="0">
+              <a:spcAft>
+                <a:spcPts val="700"/>
+              </a:spcAft>
+              <a:buNone/>
+            </a:pPr>
+            <a:r>
+              <a:rPr lang="en-US" sz="1300" dirty="0">
+                <a:solidFill>
+                  <a:schemeClr val="tx1"/>
+                </a:solidFill>
+              </a:rPr>
+              <a:t>Is full reflection guaranteed to reduce variance in this model? No: the payoff is not monotone in the inputs, so the pair correlation could be positive</a:t>
+            </a:r>
+            <a:endParaRPr lang="en-US" sz="1300" dirty="0"/>
+          </a:p>
+          <a:p>
+            <a:pPr indent="0" marL="0">
+              <a:spcAft>
+                <a:spcPts val="700"/>
+              </a:spcAft>
+              <a:buNone/>
+            </a:pPr>
+            <a:r>
+              <a:rPr lang="en-US" sz="1300" b="1" dirty="0">
+                <a:solidFill>
+                  <a:srgbClr val="D9622B"/>
+                </a:solidFill>
+              </a:rPr>
+              <a:t>(c)  </a:t>
+            </a:r>
+            <a:pPr indent="0" marL="0">
+              <a:spcAft>
+                <a:spcPts val="700"/>
+              </a:spcAft>
+              <a:buNone/>
+            </a:pPr>
+            <a:r>
+              <a:rPr lang="en-US" sz="1300" dirty="0">
+                <a:solidFill>
+                  <a:schemeClr val="tx1"/>
+                </a:solidFill>
+              </a:rPr>
+              <a:t>SE uses the M pair averages. Treating the 2M payoffs as independent is off by the factor √(1 + corr)</a:t>
+            </a:r>
+            <a:endParaRPr lang="en-US" sz="1300" dirty="0"/>
+          </a:p>
+        </p:txBody>
+      </p:sp>
+      <p:sp>
+        <p:nvSpPr>
+          <p:cNvPr id="4" name="q3 card"/>
           <p:cNvSpPr/>
           <p:nvPr/>
         </p:nvSpPr>
         <p:spPr>
           <a:xfrm>
-            <a:off x="5029200" y="1097280"/>
-            <a:ext cx="3657600" cy="3474720"/>
+            <a:off x="5852160" y="1097280"/>
+            <a:ext cx="2834640" cy="3474720"/>
           </a:xfrm>
           <a:prstGeom prst="roundRect">
             <a:avLst>
-              <a:gd name="adj" fmla="val 2105"/>
+              <a:gd name="adj" fmla="val 2581"/>
             </a:avLst>
           </a:prstGeom>
           <a:solidFill>
@@ -3674,14 +6475,14 @@
       </p:sp>
       <p:sp>
         <p:nvSpPr>
-          <p:cNvPr id="5" name="why text"/>
+          <p:cNvPr id="5" name="q3 card text"/>
           <p:cNvSpPr txBox="1"/>
           <p:nvPr/>
         </p:nvSpPr>
         <p:spPr>
           <a:xfrm>
-            <a:off x="5212080" y="1188720"/>
-            <a:ext cx="3291840" cy="3291840"/>
+            <a:off x="5989320" y="1234440"/>
+            <a:ext cx="2560320" cy="3200400"/>
           </a:xfrm>
           <a:prstGeom prst="rect">
             <a:avLst/>
@@ -3695,27 +6496,26 @@
           <a:p>
             <a:pPr indent="0" marL="0">
               <a:spcAft>
-                <a:spcPts val="600"/>
-              </a:spcAft>
-              <a:buNone/>
-            </a:pPr>
-            <a:r>
-              <a:rPr lang="en-US" sz="1500" b="1" dirty="0">
+                <a:spcPts val="800"/>
+              </a:spcAft>
+              <a:buNone/>
+            </a:pPr>
+            <a:r>
+              <a:rPr lang="en-US" sz="1400" b="1" dirty="0">
                 <a:solidFill>
                   <a:schemeClr val="tx2"/>
                 </a:solidFill>
               </a:rPr>
-              <a:t>Observations</a:t>
-            </a:r>
-            <a:endParaRPr lang="en-US" sz="1300" dirty="0"/>
-          </a:p>
-          <a:p>
-            <a:pPr marL="342900" indent="-342900">
-              <a:spcAft>
-                <a:spcPts val="600"/>
-              </a:spcAft>
-              <a:buSzPct val="100000"/>
-              <a:buChar char="•"/>
+              <a:t>Key formula (b)</a:t>
+            </a:r>
+            <a:endParaRPr lang="en-US" sz="1400" dirty="0"/>
+          </a:p>
+          <a:p>
+            <a:pPr indent="0" marL="0">
+              <a:spcAft>
+                <a:spcPts val="800"/>
+              </a:spcAft>
+              <a:buNone/>
             </a:pPr>
             <a:r>
               <a:rPr lang="en-US" sz="1300" dirty="0">
@@ -3723,17 +6523,16 @@
                   <a:schemeClr val="tx1"/>
                 </a:solidFill>
               </a:rPr>
-              <a:t>Smaller η or larger H: the stock behaves more like the Black–Scholes control, so corr rises (0.83 → 0.97, 0.93) and CV improves</a:t>
-            </a:r>
-            <a:endParaRPr lang="en-US" sz="1300" dirty="0"/>
-          </a:p>
-          <a:p>
-            <a:pPr marL="342900" indent="-342900">
-              <a:spcAft>
-                <a:spcPts val="600"/>
-              </a:spcAft>
-              <a:buSzPct val="100000"/>
-              <a:buChar char="•"/>
+              <a:t>Var(AV, M pairs)</a:t>
+            </a:r>
+            <a:endParaRPr lang="en-US" sz="1400" dirty="0"/>
+          </a:p>
+          <a:p>
+            <a:pPr indent="0" marL="0">
+              <a:spcAft>
+                <a:spcPts val="800"/>
+              </a:spcAft>
+              <a:buNone/>
             </a:pPr>
             <a:r>
               <a:rPr lang="en-US" sz="1300" dirty="0">
@@ -3741,27 +6540,99 @@
                   <a:schemeClr val="tx1"/>
                 </a:solidFill>
               </a:rPr>
-              <a:t>Baseline: AV+CV is below CV. Flipping removes noise the control already explains (corr falls to 0.74 after pairing)</a:t>
-            </a:r>
-            <a:endParaRPr lang="en-US" sz="1300" dirty="0"/>
-          </a:p>
-          <a:p>
-            <a:pPr marL="342900" indent="-342900">
-              <a:spcAft>
-                <a:spcPts val="600"/>
-              </a:spcAft>
-              <a:buSzPct val="100000"/>
-              <a:buChar char="•"/>
-            </a:pPr>
-            <a:r>
-              <a:rPr lang="en-US" sz="1300" dirty="0">
-                <a:solidFill>
-                  <a:schemeClr val="tx1"/>
-                </a:solidFill>
-              </a:rPr>
-              <a:t>η = 0.5, H = 0.4: the control still fits the pair well, so AV+CV leads on VRF and Gain</a:t>
-            </a:r>
-            <a:endParaRPr lang="en-US" sz="1300" dirty="0"/>
+              <a:t>÷ Var(plain, 2M paths)</a:t>
+            </a:r>
+            <a:endParaRPr lang="en-US" sz="1400" dirty="0"/>
+          </a:p>
+          <a:p>
+            <a:pPr indent="0" marL="0">
+              <a:spcAft>
+                <a:spcPts val="800"/>
+              </a:spcAft>
+              <a:buNone/>
+            </a:pPr>
+            <a:r>
+              <a:rPr lang="en-US" sz="2000" b="1" dirty="0">
+                <a:solidFill>
+                  <a:schemeClr val="accent1"/>
+                </a:solidFill>
+              </a:rPr>
+              <a:t>= 1 + Corr(X</a:t>
+            </a:r>
+            <a:pPr indent="0" marL="0">
+              <a:spcAft>
+                <a:spcPts val="800"/>
+              </a:spcAft>
+              <a:buNone/>
+            </a:pPr>
+            <a:r>
+              <a:rPr lang="en-US" sz="2000" b="1" baseline="30000" dirty="0">
+                <a:solidFill>
+                  <a:schemeClr val="accent1"/>
+                </a:solidFill>
+              </a:rPr>
+              <a:t>+</a:t>
+            </a:r>
+            <a:pPr indent="0" marL="0">
+              <a:spcAft>
+                <a:spcPts val="800"/>
+              </a:spcAft>
+              <a:buNone/>
+            </a:pPr>
+            <a:r>
+              <a:rPr lang="en-US" sz="2000" b="1" dirty="0">
+                <a:solidFill>
+                  <a:schemeClr val="accent1"/>
+                </a:solidFill>
+              </a:rPr>
+              <a:t>, X</a:t>
+            </a:r>
+            <a:pPr indent="0" marL="0">
+              <a:spcAft>
+                <a:spcPts val="800"/>
+              </a:spcAft>
+              <a:buNone/>
+            </a:pPr>
+            <a:r>
+              <a:rPr lang="en-US" sz="2000" b="1" baseline="30000" dirty="0">
+                <a:solidFill>
+                  <a:schemeClr val="accent1"/>
+                </a:solidFill>
+              </a:rPr>
+              <a:t>−</a:t>
+            </a:r>
+            <a:pPr indent="0" marL="0">
+              <a:spcAft>
+                <a:spcPts val="800"/>
+              </a:spcAft>
+              <a:buNone/>
+            </a:pPr>
+            <a:r>
+              <a:rPr lang="en-US" sz="2000" b="1" dirty="0">
+                <a:solidFill>
+                  <a:schemeClr val="accent1"/>
+                </a:solidFill>
+              </a:rPr>
+              <a:t>)</a:t>
+            </a:r>
+            <a:endParaRPr lang="en-US" sz="1400" dirty="0"/>
+          </a:p>
+          <a:p>
+            <a:pPr indent="0" marL="0">
+              <a:spcAft>
+                <a:spcPts val="800"/>
+              </a:spcAft>
+              <a:buNone/>
+            </a:pPr>
+            <a:r>
+              <a:rPr lang="en-US" sz="1200" dirty="0">
+                <a:solidFill>
+                  <a:schemeClr val="tx1"/>
+                </a:solidFill>
+              </a:rPr>
+              <a:t>Helps only when the two members of a pair move in opposite directions (negative correlation).</a:t>
+            </a:r>
+            <a:endParaRPr lang="en-US" sz="1400" dirty="0"/>
           </a:p>
         </p:txBody>
       </p:sp>
@@ -3821,6 +6692,1192 @@
 <file path=ppt/slides/slide6.xml><?xml version="1.0" encoding="utf-8"?>
 <p:sld xmlns:a="http://schemas.openxmlformats.org/drawingml/2006/main" xmlns:r="http://schemas.openxmlformats.org/officeDocument/2006/relationships" xmlns:p="http://schemas.openxmlformats.org/presentationml/2006/main">
   <p:cSld name="Slide 6">
+    <p:spTree>
+      <p:nvGrpSpPr>
+        <p:cNvPr id="1" name=""/>
+        <p:cNvGrpSpPr/>
+        <p:nvPr/>
+      </p:nvGrpSpPr>
+      <p:grpSpPr>
+        <a:xfrm>
+          <a:off x="0" y="0"/>
+          <a:ext cx="0" cy="0"/>
+          <a:chOff x="0" y="0"/>
+          <a:chExt cx="0" cy="0"/>
+        </a:xfrm>
+      </p:grpSpPr>
+      <p:sp>
+        <p:nvSpPr>
+          <p:cNvPr id="2" name="Text 0"/>
+          <p:cNvSpPr/>
+          <p:nvPr>
+            <p:ph idx="100" type="title" hasCustomPrompt="1"/>
+          </p:nvPr>
+        </p:nvSpPr>
+        <p:spPr>
+          <a:xfrm>
+            <a:off x="457200" y="274320"/>
+            <a:ext cx="8229600" cy="685800"/>
+          </a:xfrm>
+          <a:prstGeom prst="rect">
+            <a:avLst/>
+          </a:prstGeom>
+          <a:noFill/>
+          <a:ln/>
+        </p:spPr>
+        <p:txBody>
+          <a:bodyPr wrap="square" rtlCol="0" anchor="ctr"/>
+          <a:lstStyle/>
+          <a:p>
+            <a:pPr algn="l" indent="0" marL="0">
+              <a:buNone/>
+            </a:pPr>
+            <a:r>
+              <a:rPr lang="en-US" sz="2600" b="1" dirty="0">
+                <a:solidFill>
+                  <a:schemeClr val="tx2"/>
+                </a:solidFill>
+              </a:rPr>
+              <a:t>Q4: combining both methods</a:t>
+            </a:r>
+            <a:endParaRPr lang="en-US" sz="2600" dirty="0"/>
+          </a:p>
+        </p:txBody>
+      </p:sp>
+      <p:sp>
+        <p:nvSpPr>
+          <p:cNvPr id="3" name="q4 bullets"/>
+          <p:cNvSpPr txBox="1"/>
+          <p:nvPr/>
+        </p:nvSpPr>
+        <p:spPr>
+          <a:xfrm>
+            <a:off x="457200" y="1097280"/>
+            <a:ext cx="5120640" cy="3474720"/>
+          </a:xfrm>
+          <a:prstGeom prst="rect">
+            <a:avLst/>
+          </a:prstGeom>
+          <a:noFill/>
+          <a:ln/>
+        </p:spPr>
+        <p:txBody>
+          <a:bodyPr wrap="square" rtlCol="0" anchor="t"/>
+          <a:lstStyle/>
+          <a:p>
+            <a:pPr indent="0" marL="0">
+              <a:spcAft>
+                <a:spcPts val="700"/>
+              </a:spcAft>
+              <a:buNone/>
+            </a:pPr>
+            <a:r>
+              <a:rPr lang="en-US" sz="1400" b="1" dirty="0">
+                <a:solidFill>
+                  <a:srgbClr val="D9622B"/>
+                </a:solidFill>
+              </a:rPr>
+              <a:t>(a)  </a:t>
+            </a:r>
+            <a:pPr indent="0" marL="0">
+              <a:spcAft>
+                <a:spcPts val="700"/>
+              </a:spcAft>
+              <a:buNone/>
+            </a:pPr>
+            <a:r>
+              <a:rPr lang="en-US" sz="1400" dirty="0">
+                <a:solidFill>
+                  <a:schemeClr val="tx1"/>
+                </a:solidFill>
+              </a:rPr>
+              <a:t>Apply the control to each pair: R</a:t>
+            </a:r>
+            <a:pPr indent="0" marL="0">
+              <a:spcAft>
+                <a:spcPts val="700"/>
+              </a:spcAft>
+              <a:buNone/>
+            </a:pPr>
+            <a:r>
+              <a:rPr lang="en-US" sz="1400" baseline="-40000" dirty="0">
+                <a:solidFill>
+                  <a:schemeClr val="tx1"/>
+                </a:solidFill>
+              </a:rPr>
+              <a:t>pair</a:t>
+            </a:r>
+            <a:pPr indent="0" marL="0">
+              <a:spcAft>
+                <a:spcPts val="700"/>
+              </a:spcAft>
+              <a:buNone/>
+            </a:pPr>
+            <a:r>
+              <a:rPr lang="en-US" sz="1400" dirty="0">
+                <a:solidFill>
+                  <a:schemeClr val="tx1"/>
+                </a:solidFill>
+              </a:rPr>
+              <a:t> = A − γ(C</a:t>
+            </a:r>
+            <a:pPr indent="0" marL="0">
+              <a:spcAft>
+                <a:spcPts val="700"/>
+              </a:spcAft>
+              <a:buNone/>
+            </a:pPr>
+            <a:r>
+              <a:rPr lang="en-US" sz="1400" baseline="-40000" dirty="0">
+                <a:solidFill>
+                  <a:schemeClr val="tx1"/>
+                </a:solidFill>
+              </a:rPr>
+              <a:t>A</a:t>
+            </a:r>
+            <a:pPr indent="0" marL="0">
+              <a:spcAft>
+                <a:spcPts val="700"/>
+              </a:spcAft>
+              <a:buNone/>
+            </a:pPr>
+            <a:r>
+              <a:rPr lang="en-US" sz="1400" dirty="0">
+                <a:solidFill>
+                  <a:schemeClr val="tx1"/>
+                </a:solidFill>
+              </a:rPr>
+              <a:t> − c</a:t>
+            </a:r>
+            <a:pPr indent="0" marL="0">
+              <a:spcAft>
+                <a:spcPts val="700"/>
+              </a:spcAft>
+              <a:buNone/>
+            </a:pPr>
+            <a:r>
+              <a:rPr lang="en-US" sz="1400" baseline="-40000" dirty="0">
+                <a:solidFill>
+                  <a:schemeClr val="tx1"/>
+                </a:solidFill>
+              </a:rPr>
+              <a:t>K</a:t>
+            </a:r>
+            <a:pPr indent="0" marL="0">
+              <a:spcAft>
+                <a:spcPts val="700"/>
+              </a:spcAft>
+              <a:buNone/>
+            </a:pPr>
+            <a:r>
+              <a:rPr lang="en-US" sz="1400" dirty="0">
+                <a:solidFill>
+                  <a:schemeClr val="tx1"/>
+                </a:solidFill>
+              </a:rPr>
+              <a:t>), where A and C</a:t>
+            </a:r>
+            <a:pPr indent="0" marL="0">
+              <a:spcAft>
+                <a:spcPts val="700"/>
+              </a:spcAft>
+              <a:buNone/>
+            </a:pPr>
+            <a:r>
+              <a:rPr lang="en-US" sz="1400" baseline="-40000" dirty="0">
+                <a:solidFill>
+                  <a:schemeClr val="tx1"/>
+                </a:solidFill>
+              </a:rPr>
+              <a:t>A</a:t>
+            </a:r>
+            <a:pPr indent="0" marL="0">
+              <a:spcAft>
+                <a:spcPts val="700"/>
+              </a:spcAft>
+              <a:buNone/>
+            </a:pPr>
+            <a:r>
+              <a:rPr lang="en-US" sz="1400" dirty="0">
+                <a:solidFill>
+                  <a:schemeClr val="tx1"/>
+                </a:solidFill>
+              </a:rPr>
+              <a:t> are pair averages</a:t>
+            </a:r>
+            <a:endParaRPr lang="en-US" sz="1400" dirty="0"/>
+          </a:p>
+          <a:p>
+            <a:pPr indent="0" marL="0">
+              <a:spcAft>
+                <a:spcPts val="700"/>
+              </a:spcAft>
+              <a:buNone/>
+            </a:pPr>
+            <a:r>
+              <a:rPr lang="en-US" sz="1400" b="1" dirty="0">
+                <a:solidFill>
+                  <a:srgbClr val="D9622B"/>
+                </a:solidFill>
+              </a:rPr>
+              <a:t>(a)  </a:t>
+            </a:r>
+            <a:pPr indent="0" marL="0">
+              <a:spcAft>
+                <a:spcPts val="700"/>
+              </a:spcAft>
+              <a:buNone/>
+            </a:pPr>
+            <a:r>
+              <a:rPr lang="en-US" sz="1400" dirty="0">
+                <a:solidFill>
+                  <a:schemeClr val="tx1"/>
+                </a:solidFill>
+              </a:rPr>
+              <a:t>Best γ = Cov(A, C</a:t>
+            </a:r>
+            <a:pPr indent="0" marL="0">
+              <a:spcAft>
+                <a:spcPts val="700"/>
+              </a:spcAft>
+              <a:buNone/>
+            </a:pPr>
+            <a:r>
+              <a:rPr lang="en-US" sz="1400" baseline="-40000" dirty="0">
+                <a:solidFill>
+                  <a:schemeClr val="tx1"/>
+                </a:solidFill>
+              </a:rPr>
+              <a:t>A</a:t>
+            </a:r>
+            <a:pPr indent="0" marL="0">
+              <a:spcAft>
+                <a:spcPts val="700"/>
+              </a:spcAft>
+              <a:buNone/>
+            </a:pPr>
+            <a:r>
+              <a:rPr lang="en-US" sz="1400" dirty="0">
+                <a:solidFill>
+                  <a:schemeClr val="tx1"/>
+                </a:solidFill>
+              </a:rPr>
+              <a:t>) / Var(C</a:t>
+            </a:r>
+            <a:pPr indent="0" marL="0">
+              <a:spcAft>
+                <a:spcPts val="700"/>
+              </a:spcAft>
+              <a:buNone/>
+            </a:pPr>
+            <a:r>
+              <a:rPr lang="en-US" sz="1400" baseline="-40000" dirty="0">
+                <a:solidFill>
+                  <a:schemeClr val="tx1"/>
+                </a:solidFill>
+              </a:rPr>
+              <a:t>A</a:t>
+            </a:r>
+            <a:pPr indent="0" marL="0">
+              <a:spcAft>
+                <a:spcPts val="700"/>
+              </a:spcAft>
+              <a:buNone/>
+            </a:pPr>
+            <a:r>
+              <a:rPr lang="en-US" sz="1400" dirty="0">
+                <a:solidFill>
+                  <a:schemeClr val="tx1"/>
+                </a:solidFill>
+              </a:rPr>
+              <a:t>). It differs from β: pairing already removes part of the noise, so the control fits what is left</a:t>
+            </a:r>
+            <a:endParaRPr lang="en-US" sz="1400" dirty="0"/>
+          </a:p>
+          <a:p>
+            <a:pPr indent="0" marL="0">
+              <a:spcAft>
+                <a:spcPts val="700"/>
+              </a:spcAft>
+              <a:buNone/>
+            </a:pPr>
+            <a:r>
+              <a:rPr lang="en-US" sz="1400" b="1" dirty="0">
+                <a:solidFill>
+                  <a:srgbClr val="D9622B"/>
+                </a:solidFill>
+              </a:rPr>
+              <a:t>(b)  </a:t>
+            </a:r>
+            <a:pPr indent="0" marL="0">
+              <a:spcAft>
+                <a:spcPts val="700"/>
+              </a:spcAft>
+              <a:buNone/>
+            </a:pPr>
+            <a:r>
+              <a:rPr lang="en-US" sz="1400" dirty="0">
+                <a:solidFill>
+                  <a:schemeClr val="tx1"/>
+                </a:solidFill>
+              </a:rPr>
+              <a:t>γ estimated on a separate pilot of 5,000 pairs, then frozen: unbiased because E[C</a:t>
+            </a:r>
+            <a:pPr indent="0" marL="0">
+              <a:spcAft>
+                <a:spcPts val="700"/>
+              </a:spcAft>
+              <a:buNone/>
+            </a:pPr>
+            <a:r>
+              <a:rPr lang="en-US" sz="1400" baseline="-40000" dirty="0">
+                <a:solidFill>
+                  <a:schemeClr val="tx1"/>
+                </a:solidFill>
+              </a:rPr>
+              <a:t>A</a:t>
+            </a:r>
+            <a:pPr indent="0" marL="0">
+              <a:spcAft>
+                <a:spcPts val="700"/>
+              </a:spcAft>
+              <a:buNone/>
+            </a:pPr>
+            <a:r>
+              <a:rPr lang="en-US" sz="1400" dirty="0">
+                <a:solidFill>
+                  <a:schemeClr val="tx1"/>
+                </a:solidFill>
+              </a:rPr>
+              <a:t>] = c</a:t>
+            </a:r>
+            <a:pPr indent="0" marL="0">
+              <a:spcAft>
+                <a:spcPts val="700"/>
+              </a:spcAft>
+              <a:buNone/>
+            </a:pPr>
+            <a:r>
+              <a:rPr lang="en-US" sz="1400" baseline="-40000" dirty="0">
+                <a:solidFill>
+                  <a:schemeClr val="tx1"/>
+                </a:solidFill>
+              </a:rPr>
+              <a:t>K</a:t>
+            </a:r>
+            <a:endParaRPr lang="en-US" sz="1400" dirty="0"/>
+          </a:p>
+          <a:p>
+            <a:pPr indent="0" marL="0">
+              <a:spcAft>
+                <a:spcPts val="700"/>
+              </a:spcAft>
+              <a:buNone/>
+            </a:pPr>
+            <a:r>
+              <a:rPr lang="en-US" sz="1400" b="1" dirty="0">
+                <a:solidFill>
+                  <a:srgbClr val="D9622B"/>
+                </a:solidFill>
+              </a:rPr>
+              <a:t>(b)  </a:t>
+            </a:r>
+            <a:pPr indent="0" marL="0">
+              <a:spcAft>
+                <a:spcPts val="700"/>
+              </a:spcAft>
+              <a:buNone/>
+            </a:pPr>
+            <a:r>
+              <a:rPr lang="en-US" sz="1400" dirty="0">
+                <a:solidFill>
+                  <a:schemeClr val="tx1"/>
+                </a:solidFill>
+              </a:rPr>
+              <a:t>SE from the M production values of R</a:t>
+            </a:r>
+            <a:pPr indent="0" marL="0">
+              <a:spcAft>
+                <a:spcPts val="700"/>
+              </a:spcAft>
+              <a:buNone/>
+            </a:pPr>
+            <a:r>
+              <a:rPr lang="en-US" sz="1400" baseline="-40000" dirty="0">
+                <a:solidFill>
+                  <a:schemeClr val="tx1"/>
+                </a:solidFill>
+              </a:rPr>
+              <a:t>pair</a:t>
+            </a:r>
+            <a:endParaRPr lang="en-US" sz="1400" dirty="0"/>
+          </a:p>
+        </p:txBody>
+      </p:sp>
+      <p:sp>
+        <p:nvSpPr>
+          <p:cNvPr id="4" name="q4 card"/>
+          <p:cNvSpPr/>
+          <p:nvPr/>
+        </p:nvSpPr>
+        <p:spPr>
+          <a:xfrm>
+            <a:off x="5852160" y="1097280"/>
+            <a:ext cx="2834640" cy="3474720"/>
+          </a:xfrm>
+          <a:prstGeom prst="roundRect">
+            <a:avLst>
+              <a:gd name="adj" fmla="val 2581"/>
+            </a:avLst>
+          </a:prstGeom>
+          <a:solidFill>
+            <a:schemeClr val="bg2"/>
+          </a:solidFill>
+          <a:ln w="12700">
+            <a:solidFill>
+              <a:schemeClr val="bg2"/>
+            </a:solidFill>
+            <a:prstDash val="solid"/>
+          </a:ln>
+        </p:spPr>
+      </p:sp>
+      <p:sp>
+        <p:nvSpPr>
+          <p:cNvPr id="5" name="q4 card text"/>
+          <p:cNvSpPr txBox="1"/>
+          <p:nvPr/>
+        </p:nvSpPr>
+        <p:spPr>
+          <a:xfrm>
+            <a:off x="5989320" y="1234440"/>
+            <a:ext cx="2560320" cy="3200400"/>
+          </a:xfrm>
+          <a:prstGeom prst="rect">
+            <a:avLst/>
+          </a:prstGeom>
+          <a:noFill/>
+          <a:ln/>
+        </p:spPr>
+        <p:txBody>
+          <a:bodyPr wrap="square" rtlCol="0" anchor="t"/>
+          <a:lstStyle/>
+          <a:p>
+            <a:pPr indent="0" marL="0">
+              <a:spcAft>
+                <a:spcPts val="800"/>
+              </a:spcAft>
+              <a:buNone/>
+            </a:pPr>
+            <a:r>
+              <a:rPr lang="en-US" sz="1400" b="1" dirty="0">
+                <a:solidFill>
+                  <a:schemeClr val="tx2"/>
+                </a:solidFill>
+              </a:rPr>
+              <a:t>Why γ ≠ β (a)</a:t>
+            </a:r>
+            <a:endParaRPr lang="en-US" sz="1400" dirty="0"/>
+          </a:p>
+          <a:p>
+            <a:pPr indent="0" marL="0">
+              <a:spcAft>
+                <a:spcPts val="800"/>
+              </a:spcAft>
+              <a:buNone/>
+            </a:pPr>
+            <a:r>
+              <a:rPr lang="en-US" sz="1200" dirty="0">
+                <a:solidFill>
+                  <a:schemeClr val="tx1"/>
+                </a:solidFill>
+              </a:rPr>
+              <a:t>Split each payoff into a part that flips sign with Z and a part that does not.</a:t>
+            </a:r>
+            <a:endParaRPr lang="en-US" sz="1400" dirty="0"/>
+          </a:p>
+          <a:p>
+            <a:pPr indent="0" marL="0">
+              <a:spcAft>
+                <a:spcPts val="800"/>
+              </a:spcAft>
+              <a:buNone/>
+            </a:pPr>
+            <a:r>
+              <a:rPr lang="en-US" sz="1200" dirty="0">
+                <a:solidFill>
+                  <a:schemeClr val="tx1"/>
+                </a:solidFill>
+              </a:rPr>
+              <a:t>Pair averaging cancels the sign-flipping part.</a:t>
+            </a:r>
+            <a:endParaRPr lang="en-US" sz="1400" dirty="0"/>
+          </a:p>
+          <a:p>
+            <a:pPr indent="0" marL="0">
+              <a:spcAft>
+                <a:spcPts val="800"/>
+              </a:spcAft>
+              <a:buNone/>
+            </a:pPr>
+            <a:r>
+              <a:rPr lang="en-US" sz="1300" b="1" dirty="0">
+                <a:solidFill>
+                  <a:schemeClr val="accent1"/>
+                </a:solidFill>
+              </a:rPr>
+              <a:t>β fits both parts; γ fits only the part that remains.</a:t>
+            </a:r>
+            <a:endParaRPr lang="en-US" sz="1400" dirty="0"/>
+          </a:p>
+        </p:txBody>
+      </p:sp>
+      <p:sp>
+        <p:nvSpPr>
+          <p:cNvPr id="25" name="Slide Number Placeholder 0"/>
+          <p:cNvSpPr>
+            <a:spLocks noGrp="1"/>
+          </p:cNvSpPr>
+          <p:nvPr>
+            <p:ph type="sldNum" sz="quarter" idx="4294967295"/>
+          </p:nvPr>
+        </p:nvSpPr>
+        <p:spPr>
+          <a:xfrm>
+            <a:off x="8229600" y="4754880"/>
+            <a:ext cx="457200" cy="274320"/>
+          </a:xfrm>
+          <a:prstGeom prst="rect">
+            <a:avLst/>
+          </a:prstGeom>
+          <a:extLst>
+            <a:ext uri="{C572A759-6A51-4108-AA02-DFA0A04FC94B}">
+              <ma14:wrappingTextBoxFlag xmlns:ma14="http://schemas.microsoft.com/office/mac/drawingml/2011/main" val="0"/>
+            </a:ext>
+          </a:extLst>
+        </p:spPr>
+        <p:txBody>
+          <a:bodyPr/>
+          <a:lstStyle>
+            <a:lvl1pPr>
+              <a:defRPr sz="1000">
+                <a:solidFill>
+                  <a:schemeClr val="accent5"/>
+                </a:solidFill>
+              </a:defRPr>
+            </a:lvl1pPr>
+          </a:lstStyle>
+          <a:p>
+            <a:pPr algn="l"/>
+            <a:fld id="{F7021451-1387-4CA6-816F-3879F97B5CBC}" type="slidenum">
+              <a:rPr b="0" lang="en-US"/>
+              <a:t>6</a:t>
+            </a:fld>
+            <a:endParaRPr lang="en-US"/>
+          </a:p>
+        </p:txBody>
+      </p:sp>
+    </p:spTree>
+  </p:cSld>
+  <p:clrMapOvr>
+    <a:masterClrMapping/>
+  </p:clrMapOvr>
+</p:sld>
+</file>
+
+<file path=ppt/slides/slide7.xml><?xml version="1.0" encoding="utf-8"?>
+<p:sld xmlns:a="http://schemas.openxmlformats.org/drawingml/2006/main" xmlns:r="http://schemas.openxmlformats.org/officeDocument/2006/relationships" xmlns:p="http://schemas.openxmlformats.org/presentationml/2006/main">
+  <p:cSld name="Slide 7">
+    <p:spTree>
+      <p:nvGrpSpPr>
+        <p:cNvPr id="1" name=""/>
+        <p:cNvGrpSpPr/>
+        <p:nvPr/>
+      </p:nvGrpSpPr>
+      <p:grpSpPr>
+        <a:xfrm>
+          <a:off x="0" y="0"/>
+          <a:ext cx="0" cy="0"/>
+          <a:chOff x="0" y="0"/>
+          <a:chExt cx="0" cy="0"/>
+        </a:xfrm>
+      </p:grpSpPr>
+      <p:sp>
+        <p:nvSpPr>
+          <p:cNvPr id="2" name="Text 0"/>
+          <p:cNvSpPr/>
+          <p:nvPr>
+            <p:ph idx="100" type="title" hasCustomPrompt="1"/>
+          </p:nvPr>
+        </p:nvSpPr>
+        <p:spPr>
+          <a:xfrm>
+            <a:off x="457200" y="274320"/>
+            <a:ext cx="8229600" cy="685800"/>
+          </a:xfrm>
+          <a:prstGeom prst="rect">
+            <a:avLst/>
+          </a:prstGeom>
+          <a:noFill/>
+          <a:ln/>
+        </p:spPr>
+        <p:txBody>
+          <a:bodyPr wrap="square" rtlCol="0" anchor="ctr"/>
+          <a:lstStyle/>
+          <a:p>
+            <a:pPr algn="l" indent="0" marL="0">
+              <a:buNone/>
+            </a:pPr>
+            <a:r>
+              <a:rPr lang="en-US" sz="2600" b="1" dirty="0">
+                <a:solidFill>
+                  <a:schemeClr val="tx2"/>
+                </a:solidFill>
+              </a:rPr>
+              <a:t>Q5 (a)–(b): baseline results, K = 100</a:t>
+            </a:r>
+            <a:endParaRPr lang="en-US" sz="2600" dirty="0"/>
+          </a:p>
+        </p:txBody>
+      </p:sp>
+      <p:graphicFrame>
+        <p:nvGraphicFramePr>
+          <p:cNvPr id="3" name="results chart" descr=""/>
+          <p:cNvGraphicFramePr/>
+          <p:nvPr/>
+        </p:nvGraphicFramePr>
+        <p:xfrm>
+          <a:off x="457200" y="1097280"/>
+          <a:ext cx="4389120" cy="3474720"/>
+        </p:xfrm>
+        <a:graphic xmlns:a="http://schemas.openxmlformats.org/drawingml/2006/main">
+          <a:graphicData uri="http://schemas.openxmlformats.org/drawingml/2006/chart">
+            <c:chart xmlns:c="http://schemas.openxmlformats.org/drawingml/2006/chart" r:id="rId1"/>
+          </a:graphicData>
+        </a:graphic>
+      </p:graphicFrame>
+      <p:sp>
+        <p:nvSpPr>
+          <p:cNvPr id="4" name="q5a card"/>
+          <p:cNvSpPr/>
+          <p:nvPr/>
+        </p:nvSpPr>
+        <p:spPr>
+          <a:xfrm>
+            <a:off x="5029200" y="1097280"/>
+            <a:ext cx="3657600" cy="3474720"/>
+          </a:xfrm>
+          <a:prstGeom prst="roundRect">
+            <a:avLst>
+              <a:gd name="adj" fmla="val 2105"/>
+            </a:avLst>
+          </a:prstGeom>
+          <a:solidFill>
+            <a:schemeClr val="bg2"/>
+          </a:solidFill>
+          <a:ln w="12700">
+            <a:solidFill>
+              <a:schemeClr val="bg2"/>
+            </a:solidFill>
+            <a:prstDash val="solid"/>
+          </a:ln>
+        </p:spPr>
+      </p:sp>
+      <p:sp>
+        <p:nvSpPr>
+          <p:cNvPr id="5" name="q5a text"/>
+          <p:cNvSpPr txBox="1"/>
+          <p:nvPr/>
+        </p:nvSpPr>
+        <p:spPr>
+          <a:xfrm>
+            <a:off x="5212080" y="1234440"/>
+            <a:ext cx="3291840" cy="3200400"/>
+          </a:xfrm>
+          <a:prstGeom prst="rect">
+            <a:avLst/>
+          </a:prstGeom>
+          <a:noFill/>
+          <a:ln/>
+        </p:spPr>
+        <p:txBody>
+          <a:bodyPr wrap="square" rtlCol="0" anchor="t"/>
+          <a:lstStyle/>
+          <a:p>
+            <a:pPr indent="0" marL="0">
+              <a:spcAft>
+                <a:spcPts val="600"/>
+              </a:spcAft>
+              <a:buNone/>
+            </a:pPr>
+            <a:r>
+              <a:rPr lang="en-US" sz="1300" b="1" dirty="0">
+                <a:solidFill>
+                  <a:srgbClr val="D9622B"/>
+                </a:solidFill>
+              </a:rPr>
+              <a:t>CV  </a:t>
+            </a:r>
+            <a:pPr indent="0" marL="0">
+              <a:spcAft>
+                <a:spcPts val="600"/>
+              </a:spcAft>
+              <a:buNone/>
+            </a:pPr>
+            <a:r>
+              <a:rPr lang="en-US" sz="1300" dirty="0">
+                <a:solidFill>
+                  <a:schemeClr val="tx1"/>
+                </a:solidFill>
+              </a:rPr>
+              <a:t>VRF 3.2. Payoff and control move together (corr 0.83); VRF ≈ 1/(1−corr</a:t>
+            </a:r>
+            <a:pPr indent="0" marL="0">
+              <a:spcAft>
+                <a:spcPts val="600"/>
+              </a:spcAft>
+              <a:buNone/>
+            </a:pPr>
+            <a:r>
+              <a:rPr lang="en-US" sz="1300" baseline="30000" dirty="0">
+                <a:solidFill>
+                  <a:schemeClr val="tx1"/>
+                </a:solidFill>
+              </a:rPr>
+              <a:t>2</a:t>
+            </a:r>
+            <a:pPr indent="0" marL="0">
+              <a:spcAft>
+                <a:spcPts val="600"/>
+              </a:spcAft>
+              <a:buNone/>
+            </a:pPr>
+            <a:r>
+              <a:rPr lang="en-US" sz="1300" dirty="0">
+                <a:solidFill>
+                  <a:schemeClr val="tx1"/>
+                </a:solidFill>
+              </a:rPr>
+              <a:t>)</a:t>
+            </a:r>
+            <a:endParaRPr lang="en-US" sz="1300" dirty="0"/>
+          </a:p>
+          <a:p>
+            <a:pPr indent="0" marL="0">
+              <a:spcAft>
+                <a:spcPts val="600"/>
+              </a:spcAft>
+              <a:buNone/>
+            </a:pPr>
+            <a:r>
+              <a:rPr lang="en-US" sz="1300" b="1" dirty="0">
+                <a:solidFill>
+                  <a:srgbClr val="D9622B"/>
+                </a:solidFill>
+              </a:rPr>
+              <a:t>AV  </a:t>
+            </a:r>
+            <a:pPr indent="0" marL="0">
+              <a:spcAft>
+                <a:spcPts val="600"/>
+              </a:spcAft>
+              <a:buNone/>
+            </a:pPr>
+            <a:r>
+              <a:rPr lang="en-US" sz="1300" dirty="0">
+                <a:solidFill>
+                  <a:schemeClr val="tx1"/>
+                </a:solidFill>
+              </a:rPr>
+              <a:t>VRF 1.4. Pair outcomes only mildly offset (corr -0.28); VRF ≈ 1/(1+corr)</a:t>
+            </a:r>
+            <a:endParaRPr lang="en-US" sz="1300" dirty="0"/>
+          </a:p>
+          <a:p>
+            <a:pPr indent="0" marL="0">
+              <a:spcAft>
+                <a:spcPts val="600"/>
+              </a:spcAft>
+              <a:buNone/>
+            </a:pPr>
+            <a:r>
+              <a:rPr lang="en-US" sz="1300" b="1" dirty="0">
+                <a:solidFill>
+                  <a:srgbClr val="D9622B"/>
+                </a:solidFill>
+              </a:rPr>
+              <a:t>Gain  </a:t>
+            </a:r>
+            <a:pPr indent="0" marL="0">
+              <a:spcAft>
+                <a:spcPts val="600"/>
+              </a:spcAft>
+              <a:buNone/>
+            </a:pPr>
+            <a:r>
+              <a:rPr lang="en-US" sz="1300" dirty="0">
+                <a:solidFill>
+                  <a:schemeClr val="tx1"/>
+                </a:solidFill>
+              </a:rPr>
+              <a:t>AV+CV is first (2.8): a pair needs half the random numbers, so it runs faster</a:t>
+            </a:r>
+            <a:endParaRPr lang="en-US" sz="1300" dirty="0"/>
+          </a:p>
+          <a:p>
+            <a:pPr indent="0" marL="0">
+              <a:spcAft>
+                <a:spcPts val="600"/>
+              </a:spcAft>
+              <a:buNone/>
+            </a:pPr>
+            <a:r>
+              <a:rPr lang="en-US" sz="1300" b="1" dirty="0">
+                <a:solidFill>
+                  <a:srgbClr val="D9622B"/>
+                </a:solidFill>
+              </a:rPr>
+              <a:t>Prices  </a:t>
+            </a:r>
+            <a:pPr indent="0" marL="0">
+              <a:spcAft>
+                <a:spcPts val="600"/>
+              </a:spcAft>
+              <a:buNone/>
+            </a:pPr>
+            <a:r>
+              <a:rPr lang="en-US" sz="1300" dirty="0">
+                <a:solidFill>
+                  <a:schemeClr val="tx1"/>
+                </a:solidFill>
+              </a:rPr>
+              <a:t>All four 95% confidence intervals overlap</a:t>
+            </a:r>
+            <a:endParaRPr lang="en-US" sz="1300" dirty="0"/>
+          </a:p>
+        </p:txBody>
+      </p:sp>
+      <p:sp>
+        <p:nvSpPr>
+          <p:cNvPr id="25" name="Slide Number Placeholder 0"/>
+          <p:cNvSpPr>
+            <a:spLocks noGrp="1"/>
+          </p:cNvSpPr>
+          <p:nvPr>
+            <p:ph type="sldNum" sz="quarter" idx="4294967295"/>
+          </p:nvPr>
+        </p:nvSpPr>
+        <p:spPr>
+          <a:xfrm>
+            <a:off x="8229600" y="4754880"/>
+            <a:ext cx="457200" cy="274320"/>
+          </a:xfrm>
+          <a:prstGeom prst="rect">
+            <a:avLst/>
+          </a:prstGeom>
+          <a:extLst>
+            <a:ext uri="{C572A759-6A51-4108-AA02-DFA0A04FC94B}">
+              <ma14:wrappingTextBoxFlag xmlns:ma14="http://schemas.microsoft.com/office/mac/drawingml/2011/main" val="0"/>
+            </a:ext>
+          </a:extLst>
+        </p:spPr>
+        <p:txBody>
+          <a:bodyPr/>
+          <a:lstStyle>
+            <a:lvl1pPr>
+              <a:defRPr sz="1000">
+                <a:solidFill>
+                  <a:schemeClr val="accent5"/>
+                </a:solidFill>
+              </a:defRPr>
+            </a:lvl1pPr>
+          </a:lstStyle>
+          <a:p>
+            <a:pPr algn="l"/>
+            <a:fld id="{F7021451-1387-4CA6-816F-3879F97B5CBC}" type="slidenum">
+              <a:rPr b="0" lang="en-US"/>
+              <a:t>7</a:t>
+            </a:fld>
+            <a:endParaRPr lang="en-US"/>
+          </a:p>
+        </p:txBody>
+      </p:sp>
+    </p:spTree>
+  </p:cSld>
+  <p:clrMapOvr>
+    <a:masterClrMapping/>
+  </p:clrMapOvr>
+</p:sld>
+</file>
+
+<file path=ppt/slides/slide8.xml><?xml version="1.0" encoding="utf-8"?>
+<p:sld xmlns:a="http://schemas.openxmlformats.org/drawingml/2006/main" xmlns:r="http://schemas.openxmlformats.org/officeDocument/2006/relationships" xmlns:p="http://schemas.openxmlformats.org/presentationml/2006/main">
+  <p:cSld name="Slide 8">
+    <p:spTree>
+      <p:nvGrpSpPr>
+        <p:cNvPr id="1" name=""/>
+        <p:cNvGrpSpPr/>
+        <p:nvPr/>
+      </p:nvGrpSpPr>
+      <p:grpSpPr>
+        <a:xfrm>
+          <a:off x="0" y="0"/>
+          <a:ext cx="0" cy="0"/>
+          <a:chOff x="0" y="0"/>
+          <a:chExt cx="0" cy="0"/>
+        </a:xfrm>
+      </p:grpSpPr>
+      <p:sp>
+        <p:nvSpPr>
+          <p:cNvPr id="2" name="Text 0"/>
+          <p:cNvSpPr/>
+          <p:nvPr>
+            <p:ph idx="100" type="title" hasCustomPrompt="1"/>
+          </p:nvPr>
+        </p:nvSpPr>
+        <p:spPr>
+          <a:xfrm>
+            <a:off x="457200" y="274320"/>
+            <a:ext cx="8229600" cy="685800"/>
+          </a:xfrm>
+          <a:prstGeom prst="rect">
+            <a:avLst/>
+          </a:prstGeom>
+          <a:noFill/>
+          <a:ln/>
+        </p:spPr>
+        <p:txBody>
+          <a:bodyPr wrap="square" rtlCol="0" anchor="ctr"/>
+          <a:lstStyle/>
+          <a:p>
+            <a:pPr algn="l" indent="0" marL="0">
+              <a:buNone/>
+            </a:pPr>
+            <a:r>
+              <a:rPr lang="en-US" sz="2600" b="1" dirty="0">
+                <a:solidFill>
+                  <a:schemeClr val="tx2"/>
+                </a:solidFill>
+              </a:rPr>
+              <a:t>Q5 (c): parameter sensitivity, K = 100</a:t>
+            </a:r>
+            <a:endParaRPr lang="en-US" sz="2600" dirty="0"/>
+          </a:p>
+        </p:txBody>
+      </p:sp>
+      <p:graphicFrame>
+        <p:nvGraphicFramePr>
+          <p:cNvPr id="3" name="sensitivity chart" descr=""/>
+          <p:cNvGraphicFramePr/>
+          <p:nvPr/>
+        </p:nvGraphicFramePr>
+        <p:xfrm>
+          <a:off x="457200" y="1097280"/>
+          <a:ext cx="4389120" cy="3474720"/>
+        </p:xfrm>
+        <a:graphic xmlns:a="http://schemas.openxmlformats.org/drawingml/2006/main">
+          <a:graphicData uri="http://schemas.openxmlformats.org/drawingml/2006/chart">
+            <c:chart xmlns:c="http://schemas.openxmlformats.org/drawingml/2006/chart" r:id="rId1"/>
+          </a:graphicData>
+        </a:graphic>
+      </p:graphicFrame>
+      <p:sp>
+        <p:nvSpPr>
+          <p:cNvPr id="4" name="q5c card"/>
+          <p:cNvSpPr/>
+          <p:nvPr/>
+        </p:nvSpPr>
+        <p:spPr>
+          <a:xfrm>
+            <a:off x="5029200" y="1097280"/>
+            <a:ext cx="3657600" cy="3474720"/>
+          </a:xfrm>
+          <a:prstGeom prst="roundRect">
+            <a:avLst>
+              <a:gd name="adj" fmla="val 2105"/>
+            </a:avLst>
+          </a:prstGeom>
+          <a:solidFill>
+            <a:schemeClr val="bg2"/>
+          </a:solidFill>
+          <a:ln w="12700">
+            <a:solidFill>
+              <a:schemeClr val="bg2"/>
+            </a:solidFill>
+            <a:prstDash val="solid"/>
+          </a:ln>
+        </p:spPr>
+      </p:sp>
+      <p:sp>
+        <p:nvSpPr>
+          <p:cNvPr id="5" name="q5c text"/>
+          <p:cNvSpPr txBox="1"/>
+          <p:nvPr/>
+        </p:nvSpPr>
+        <p:spPr>
+          <a:xfrm>
+            <a:off x="5212080" y="1234440"/>
+            <a:ext cx="3291840" cy="3200400"/>
+          </a:xfrm>
+          <a:prstGeom prst="rect">
+            <a:avLst/>
+          </a:prstGeom>
+          <a:noFill/>
+          <a:ln/>
+        </p:spPr>
+        <p:txBody>
+          <a:bodyPr wrap="square" rtlCol="0" anchor="t"/>
+          <a:lstStyle/>
+          <a:p>
+            <a:pPr indent="0" marL="0">
+              <a:spcAft>
+                <a:spcPts val="600"/>
+              </a:spcAft>
+              <a:buNone/>
+            </a:pPr>
+            <a:r>
+              <a:rPr lang="en-US" sz="1300" b="1" dirty="0">
+                <a:solidFill>
+                  <a:srgbClr val="D9622B"/>
+                </a:solidFill>
+              </a:rPr>
+              <a:t>Why  </a:t>
+            </a:r>
+            <a:pPr indent="0" marL="0">
+              <a:spcAft>
+                <a:spcPts val="600"/>
+              </a:spcAft>
+              <a:buNone/>
+            </a:pPr>
+            <a:r>
+              <a:rPr lang="en-US" sz="1300" dirty="0">
+                <a:solidFill>
+                  <a:schemeClr val="tx1"/>
+                </a:solidFill>
+              </a:rPr>
+              <a:t>Smaller η or larger H: the stock behaves more like the Black–Scholes control, so corr rises (0.83 → 0.97, 0.93) and CV improves</a:t>
+            </a:r>
+            <a:endParaRPr lang="en-US" sz="1300" dirty="0"/>
+          </a:p>
+          <a:p>
+            <a:pPr indent="0" marL="0">
+              <a:spcAft>
+                <a:spcPts val="600"/>
+              </a:spcAft>
+              <a:buNone/>
+            </a:pPr>
+            <a:r>
+              <a:rPr lang="en-US" sz="1300" b="1" dirty="0">
+                <a:solidFill>
+                  <a:srgbClr val="D9622B"/>
+                </a:solidFill>
+              </a:rPr>
+              <a:t>Baseline  </a:t>
+            </a:r>
+            <a:pPr indent="0" marL="0">
+              <a:spcAft>
+                <a:spcPts val="600"/>
+              </a:spcAft>
+              <a:buNone/>
+            </a:pPr>
+            <a:r>
+              <a:rPr lang="en-US" sz="1300" dirty="0">
+                <a:solidFill>
+                  <a:schemeClr val="tx1"/>
+                </a:solidFill>
+              </a:rPr>
+              <a:t>AV+CV is below CV. Flipping removes noise the control already explains (corr falls to 0.74 after pairing)</a:t>
+            </a:r>
+            <a:endParaRPr lang="en-US" sz="1300" dirty="0"/>
+          </a:p>
+          <a:p>
+            <a:pPr indent="0" marL="0">
+              <a:spcAft>
+                <a:spcPts val="600"/>
+              </a:spcAft>
+              <a:buNone/>
+            </a:pPr>
+            <a:r>
+              <a:rPr lang="en-US" sz="1300" b="1" dirty="0">
+                <a:solidFill>
+                  <a:srgbClr val="D9622B"/>
+                </a:solidFill>
+              </a:rPr>
+              <a:t>η = 0.5, H = 0.4  </a:t>
+            </a:r>
+            <a:pPr indent="0" marL="0">
+              <a:spcAft>
+                <a:spcPts val="600"/>
+              </a:spcAft>
+              <a:buNone/>
+            </a:pPr>
+            <a:r>
+              <a:rPr lang="en-US" sz="1300" dirty="0">
+                <a:solidFill>
+                  <a:schemeClr val="tx1"/>
+                </a:solidFill>
+              </a:rPr>
+              <a:t>the control still fits the pair well, so AV+CV leads on VRF and Gain</a:t>
+            </a:r>
+            <a:endParaRPr lang="en-US" sz="1300" dirty="0"/>
+          </a:p>
+        </p:txBody>
+      </p:sp>
+      <p:sp>
+        <p:nvSpPr>
+          <p:cNvPr id="25" name="Slide Number Placeholder 0"/>
+          <p:cNvSpPr>
+            <a:spLocks noGrp="1"/>
+          </p:cNvSpPr>
+          <p:nvPr>
+            <p:ph type="sldNum" sz="quarter" idx="4294967295"/>
+          </p:nvPr>
+        </p:nvSpPr>
+        <p:spPr>
+          <a:xfrm>
+            <a:off x="8229600" y="4754880"/>
+            <a:ext cx="457200" cy="274320"/>
+          </a:xfrm>
+          <a:prstGeom prst="rect">
+            <a:avLst/>
+          </a:prstGeom>
+          <a:extLst>
+            <a:ext uri="{C572A759-6A51-4108-AA02-DFA0A04FC94B}">
+              <ma14:wrappingTextBoxFlag xmlns:ma14="http://schemas.microsoft.com/office/mac/drawingml/2011/main" val="0"/>
+            </a:ext>
+          </a:extLst>
+        </p:spPr>
+        <p:txBody>
+          <a:bodyPr/>
+          <a:lstStyle>
+            <a:lvl1pPr>
+              <a:defRPr sz="1000">
+                <a:solidFill>
+                  <a:schemeClr val="accent5"/>
+                </a:solidFill>
+              </a:defRPr>
+            </a:lvl1pPr>
+          </a:lstStyle>
+          <a:p>
+            <a:pPr algn="l"/>
+            <a:fld id="{F7021451-1387-4CA6-816F-3879F97B5CBC}" type="slidenum">
+              <a:rPr b="0" lang="en-US"/>
+              <a:t>8</a:t>
+            </a:fld>
+            <a:endParaRPr lang="en-US"/>
+          </a:p>
+        </p:txBody>
+      </p:sp>
+    </p:spTree>
+  </p:cSld>
+  <p:clrMapOvr>
+    <a:masterClrMapping/>
+  </p:clrMapOvr>
+</p:sld>
+</file>
+
+<file path=ppt/slides/slide9.xml><?xml version="1.0" encoding="utf-8"?>
+<p:sld xmlns:a="http://schemas.openxmlformats.org/drawingml/2006/main" xmlns:r="http://schemas.openxmlformats.org/officeDocument/2006/relationships" xmlns:p="http://schemas.openxmlformats.org/presentationml/2006/main">
+  <p:cSld name="Slide 9">
     <p:spTree>
       <p:nvGrpSpPr>
         <p:cNvPr id="1" name=""/>
